--- a/docs/performance_key_items/performance_key_items_with_diagram_ko.pptx
+++ b/docs/performance_key_items/performance_key_items_with_diagram_ko.pptx
@@ -2,23 +2,24 @@
 <file path=ppt/presentation.xml><?xml version="1.0" encoding="utf-8"?>
 <p:presentation xmlns:p="http://schemas.openxmlformats.org/presentationml/2006/main">
   <p:sldMasterIdLst>
-    <p:sldMasterId xmlns:r="http://schemas.openxmlformats.org/officeDocument/2006/relationships" id="2147483648" r:id="R493ce8d1954f4149"/>
+    <p:sldMasterId xmlns:r="http://schemas.openxmlformats.org/officeDocument/2006/relationships" id="2147483648" r:id="Rad74a14ed9a64b40"/>
   </p:sldMasterIdLst>
   <p:notesMasterIdLst>
-    <p:notesMasterId xmlns:r="http://schemas.openxmlformats.org/officeDocument/2006/relationships" r:id="R20872ec896e64839"/>
+    <p:notesMasterId xmlns:r="http://schemas.openxmlformats.org/officeDocument/2006/relationships" r:id="R36520843d5ef4e4f"/>
   </p:notesMasterIdLst>
   <p:sldIdLst>
-    <p:sldId xmlns:r="http://schemas.openxmlformats.org/officeDocument/2006/relationships" id="256" r:id="Ra813b594050d489f"/>
-    <p:sldId xmlns:r="http://schemas.openxmlformats.org/officeDocument/2006/relationships" id="257" r:id="R9165a4a0aac14169"/>
-    <p:sldId xmlns:r="http://schemas.openxmlformats.org/officeDocument/2006/relationships" id="258" r:id="Rf6c57ffa46eb460c"/>
-    <p:sldId xmlns:r="http://schemas.openxmlformats.org/officeDocument/2006/relationships" id="259" r:id="R6a6c711a39f240f8"/>
-    <p:sldId xmlns:r="http://schemas.openxmlformats.org/officeDocument/2006/relationships" id="260" r:id="Rf2f4849bc9934f6a"/>
-    <p:sldId xmlns:r="http://schemas.openxmlformats.org/officeDocument/2006/relationships" id="261" r:id="R4ab96e9e126f4327"/>
-    <p:sldId xmlns:r="http://schemas.openxmlformats.org/officeDocument/2006/relationships" id="262" r:id="R7715ba2f68b1402f"/>
-    <p:sldId xmlns:r="http://schemas.openxmlformats.org/officeDocument/2006/relationships" id="263" r:id="R6f538058565b4f5a"/>
-    <p:sldId xmlns:r="http://schemas.openxmlformats.org/officeDocument/2006/relationships" id="264" r:id="R584dcc233a034a40"/>
-    <p:sldId xmlns:r="http://schemas.openxmlformats.org/officeDocument/2006/relationships" id="265" r:id="R155a53e9fe084ce3"/>
-    <p:sldId xmlns:r="http://schemas.openxmlformats.org/officeDocument/2006/relationships" id="266" r:id="R6a125312257e4b8b"/>
+    <p:sldId xmlns:r="http://schemas.openxmlformats.org/officeDocument/2006/relationships" id="256" r:id="Rf77d167036b5495e"/>
+    <p:sldId xmlns:r="http://schemas.openxmlformats.org/officeDocument/2006/relationships" id="257" r:id="R7a9585a6fee74b5d"/>
+    <p:sldId xmlns:r="http://schemas.openxmlformats.org/officeDocument/2006/relationships" id="258" r:id="R547d8128512644de"/>
+    <p:sldId xmlns:r="http://schemas.openxmlformats.org/officeDocument/2006/relationships" id="259" r:id="R620e6a79ad3546a7"/>
+    <p:sldId xmlns:r="http://schemas.openxmlformats.org/officeDocument/2006/relationships" id="260" r:id="R72e17cd0565b4e03"/>
+    <p:sldId xmlns:r="http://schemas.openxmlformats.org/officeDocument/2006/relationships" id="261" r:id="R84230c94e7b0407f"/>
+    <p:sldId xmlns:r="http://schemas.openxmlformats.org/officeDocument/2006/relationships" id="262" r:id="R3bdeb3c095e54d26"/>
+    <p:sldId xmlns:r="http://schemas.openxmlformats.org/officeDocument/2006/relationships" id="263" r:id="R01dafbb8c4464df1"/>
+    <p:sldId xmlns:r="http://schemas.openxmlformats.org/officeDocument/2006/relationships" id="264" r:id="R6bc23e159be04a9b"/>
+    <p:sldId xmlns:r="http://schemas.openxmlformats.org/officeDocument/2006/relationships" id="265" r:id="Rc56d013a6dcb4324"/>
+    <p:sldId xmlns:r="http://schemas.openxmlformats.org/officeDocument/2006/relationships" id="266" r:id="R055053bb8ff84327"/>
+    <p:sldId xmlns:r="http://schemas.openxmlformats.org/officeDocument/2006/relationships" id="267" r:id="Rbaa2f94354654dc5"/>
   </p:sldIdLst>
   <p:sldSz cx="12192000" cy="6858000"/>
   <p:notesSz cx="6858000" cy="9144000"/>
@@ -562,7 +563,7 @@
           <a:lstStyle xmlns:a="http://schemas.openxmlformats.org/drawingml/2006/main"/>
           <a:p xmlns:a="http://schemas.openxmlformats.org/drawingml/2006/main">
             <a:r>
-              <a:t>A1은 요청마다 다음 4KiB 논리 페이지를 읽고, A2는 3개 묶음의 0,2,1 순열을 반복한다. 예시의 페이지 번호는 1부터 표시했다. A2/B2는 전체 주소 영역의 균등 난수 접근이 아니다. B1/B2는 각 페이지의 offset 0에서 64B만 반환한다. B3는 3개 논리 페이지 묶음에서 0,2,0,1 순서로 읽고 세 번째 요청에만 offset 64를 적용한다. 그러므로 P1의 첫 64B와 재방문의 두 번째 64B는 다른 데이터지만 동일 논리 페이지에 속하며, 동일 물리 페이지로 매핑될 수 있다. NAND page buffer 또는 Controller buffer에서 재사용할 수 있는지는 그 시점의 상태에 따른다. 항상 hit이나 항상 새 tR을 가정하지 않는다. B3는 기존 유한 요청열 모델에 구현되어 있으나 최근 64 Plane의 2ms 지속 부하 비교에는 포함하지 않았다.</a:t>
+              <a:t>증거 목록과 원문은 아래 고정 커밋 URL로 제공한다. 본 자료는 제품 실측 성능이나 HBF 사양의 공식 보장이 아니다. 모델은 4개의 독립 Port가 4채널 전체를 공유하며, Plane당 page buffer 1개와 물리 16KiB page를 사용한다. 가용률 85%는 100µs 주기의 명목 15µs Plane 휴지 구간으로 모델링했다. 실제 GC 쓰기/erase trace를 실행한 것은 아니다. 이전 maintenance OFF 실험은 B 패턴 낙폭 원인 확인을 위한 대조군이며, 성능 개선 기준으로 채택하지 않았다. Controller cache 및 64B 물리 분산도 채택하지 않았다. 후속 후보는 Port별 수락의 공정성, 주소 편향 및 동적 매핑에서의 재현성 검증이다. 이번 정리는 기존 결과만 사용했으며 성능 엔진이나 입력 tR을 수정하지 않았다.</a:t>
             </a:r>
           </a:p>
           <a:p xmlns:a="http://schemas.openxmlformats.org/drawingml/2006/main">
@@ -577,17 +578,37 @@
           </a:p>
           <a:p xmlns:a="http://schemas.openxmlformats.org/drawingml/2006/main">
             <a:r>
-              <a:t>https://github.com/JBRARAPARK/HBF_zNAND_Research/blob/22d9b33f085991f33d5273fdd9ce5688fb429fa4/znand/model.py</a:t>
-            </a:r>
-          </a:p>
-          <a:p xmlns:a="http://schemas.openxmlformats.org/drawingml/2006/main">
-            <a:r>
-              <a:t>https://github.com/JBRARAPARK/HBF_zNAND_Research/blob/22d9b33f085991f33d5273fdd9ce5688fb429fa4/znand/saturation.py</a:t>
-            </a:r>
-          </a:p>
-          <a:p xmlns:a="http://schemas.openxmlformats.org/drawingml/2006/main">
-            <a:r>
-              <a:t>https://github.com/JBRARAPARK/HBF_zNAND_Research/blob/22d9b33f085991f33d5273fdd9ce5688fb429fa4/znand/partial_saturation.py</a:t>
+              <a:t>https://github.com/JBRARAPARK/HBF_zNAND_Research/blob/22d9b33f085991f33d5273fdd9ce5688fb429fa4/results/znand/locality/matched_comparison.csv</a:t>
+            </a:r>
+          </a:p>
+          <a:p xmlns:a="http://schemas.openxmlformats.org/drawingml/2006/main">
+            <a:r>
+              <a:t>https://github.com/JBRARAPARK/HBF_zNAND_Research/blob/22d9b33f085991f33d5273fdd9ce5688fb429fa4/results/znand/host_ceiling/sweep.csv</a:t>
+            </a:r>
+          </a:p>
+          <a:p xmlns:a="http://schemas.openxmlformats.org/drawingml/2006/main">
+            <a:r>
+              <a:t>https://github.com/JBRARAPARK/HBF_zNAND_Research/blob/22d9b33f085991f33d5273fdd9ce5688fb429fa4/results/znand/host_ceiling/timing_validation.json</a:t>
+            </a:r>
+          </a:p>
+          <a:p xmlns:a="http://schemas.openxmlformats.org/drawingml/2006/main">
+            <a:r>
+              <a:t>https://github.com/JBRARAPARK/HBF_zNAND_Research/blob/22d9b33f085991f33d5273fdd9ce5688fb429fa4/results/znand/saturation/sweep.csv</a:t>
+            </a:r>
+          </a:p>
+          <a:p xmlns:a="http://schemas.openxmlformats.org/drawingml/2006/main">
+            <a:r>
+              <a:t>https://github.com/JBRARAPARK/HBF_zNAND_Research/blob/22d9b33f085991f33d5273fdd9ce5688fb429fa4/results/znand/saturation/RESULTS_KO.md</a:t>
+            </a:r>
+          </a:p>
+          <a:p xmlns:a="http://schemas.openxmlformats.org/drawingml/2006/main">
+            <a:r>
+              <a:t>https://github.com/JBRARAPARK/HBF_zNAND_Research/blob/22d9b33f085991f33d5273fdd9ce5688fb429fa4/results/znand/partial_dips/RESULTS_KO.md</a:t>
+            </a:r>
+          </a:p>
+          <a:p xmlns:a="http://schemas.openxmlformats.org/drawingml/2006/main">
+            <a:r>
+              <a:t>https://github.com/JBRARAPARK/HBF_zNAND_Research/blob/22d9b33f085991f33d5273fdd9ce5688fb429fa4/docs/07_prefetch_tuning_ko.md</a:t>
             </a:r>
           </a:p>
         </p:txBody>
@@ -657,6 +678,101 @@
           <a:lstStyle xmlns:a="http://schemas.openxmlformats.org/drawingml/2006/main"/>
           <a:p xmlns:a="http://schemas.openxmlformats.org/drawingml/2006/main">
             <a:r>
+              <a:t>A1은 요청마다 다음 4KiB 논리 페이지를 읽고, A2는 3개 묶음의 0,2,1 순열을 반복한다. 예시의 페이지 번호는 1부터 표시했다. A2/B2는 전체 주소 영역의 균등 난수 접근이 아니다. B1/B2는 각 페이지의 offset 0에서 64B만 반환한다. B3는 3개 논리 페이지 묶음에서 0,2,0,1 순서로 읽고 세 번째 요청에만 offset 64를 적용한다. 그러므로 P1의 첫 64B와 재방문의 두 번째 64B는 다른 데이터지만 동일 논리 페이지에 속하며, 동일 물리 페이지로 매핑될 수 있다. NAND page buffer 또는 Controller buffer에서 재사용할 수 있는지는 그 시점의 상태에 따른다. 항상 hit이나 항상 새 tR을 가정하지 않는다. B3는 기존 유한 요청열 모델에 구현되어 있으나 최근 64 Plane의 2ms 지속 부하 비교에는 포함하지 않았다.</a:t>
+            </a:r>
+          </a:p>
+          <a:p xmlns:a="http://schemas.openxmlformats.org/drawingml/2006/main">
+            <a:r>
+              <a:t/>
+            </a:r>
+          </a:p>
+          <a:p xmlns:a="http://schemas.openxmlformats.org/drawingml/2006/main">
+            <a:r>
+              <a:t>출처</a:t>
+            </a:r>
+          </a:p>
+          <a:p xmlns:a="http://schemas.openxmlformats.org/drawingml/2006/main">
+            <a:r>
+              <a:t>https://github.com/JBRARAPARK/HBF_zNAND_Research/blob/22d9b33f085991f33d5273fdd9ce5688fb429fa4/znand/model.py</a:t>
+            </a:r>
+          </a:p>
+          <a:p xmlns:a="http://schemas.openxmlformats.org/drawingml/2006/main">
+            <a:r>
+              <a:t>https://github.com/JBRARAPARK/HBF_zNAND_Research/blob/22d9b33f085991f33d5273fdd9ce5688fb429fa4/znand/saturation.py</a:t>
+            </a:r>
+          </a:p>
+          <a:p xmlns:a="http://schemas.openxmlformats.org/drawingml/2006/main">
+            <a:r>
+              <a:t>https://github.com/JBRARAPARK/HBF_zNAND_Research/blob/22d9b33f085991f33d5273fdd9ce5688fb429fa4/znand/partial_saturation.py</a:t>
+            </a:r>
+          </a:p>
+        </p:txBody>
+      </p:sp>
+      <p:sp>
+        <p:nvSpPr>
+          <p:cNvPr id="4" name="Slide Number Placeholder 3"/>
+          <p:cNvSpPr>
+            <a:spLocks xmlns:a="http://schemas.openxmlformats.org/drawingml/2006/main" noGrp="1"/>
+          </p:cNvSpPr>
+          <p:nvPr>
+            <p:ph type="sldNum" idx="5"/>
+          </p:nvPr>
+        </p:nvSpPr>
+        <p:spPr/>
+        <p:txBody>
+          <a:bodyPr xmlns:a="http://schemas.openxmlformats.org/drawingml/2006/main"/>
+          <a:lstStyle xmlns:a="http://schemas.openxmlformats.org/drawingml/2006/main"/>
+          <a:p xmlns:a="http://schemas.openxmlformats.org/drawingml/2006/main"/>
+        </p:txBody>
+      </p:sp>
+    </p:spTree>
+  </p:cSld>
+  <p:clrMapOvr>
+    <a:masterClrMapping xmlns:a="http://schemas.openxmlformats.org/drawingml/2006/main"/>
+  </p:clrMapOvr>
+</p:notes>
+</file>
+
+<file path=ppt/notesSlides/notesSlide12.xml><?xml version="1.0" encoding="utf-8"?>
+<p:notes xmlns:p="http://schemas.openxmlformats.org/presentationml/2006/main">
+  <p:cSld>
+    <p:spTree>
+      <p:nvGrpSpPr>
+        <p:cNvPr id="1" name=""/>
+        <p:cNvGrpSpPr/>
+        <p:nvPr/>
+      </p:nvGrpSpPr>
+      <p:grpSpPr>
+        <a:xfrm xmlns:a="http://schemas.openxmlformats.org/drawingml/2006/main"/>
+      </p:grpSpPr>
+      <p:sp>
+        <p:nvSpPr>
+          <p:cNvPr id="2" name="Slide Image Placeholder 1"/>
+          <p:cNvSpPr>
+            <a:spLocks xmlns:a="http://schemas.openxmlformats.org/drawingml/2006/main" noGrp="1"/>
+          </p:cNvSpPr>
+          <p:nvPr>
+            <p:ph type="sldImg" idx="0"/>
+          </p:nvPr>
+        </p:nvSpPr>
+        <p:spPr/>
+      </p:sp>
+      <p:sp>
+        <p:nvSpPr>
+          <p:cNvPr id="3" name="Notes Placeholder 2"/>
+          <p:cNvSpPr>
+            <a:spLocks xmlns:a="http://schemas.openxmlformats.org/drawingml/2006/main" noGrp="1"/>
+          </p:cNvSpPr>
+          <p:nvPr>
+            <p:ph type="body" idx="1"/>
+          </p:nvPr>
+        </p:nvSpPr>
+        <p:spPr/>
+        <p:txBody>
+          <a:bodyPr xmlns:a="http://schemas.openxmlformats.org/drawingml/2006/main"/>
+          <a:lstStyle xmlns:a="http://schemas.openxmlformats.org/drawingml/2006/main"/>
+          <a:p xmlns:a="http://schemas.openxmlformats.org/drawingml/2006/main">
+            <a:r>
               <a:t>A1/A2의 16KiB당 유효 데이터는 4개의 4KiB 논리 요청 전체다. B1/B2는 각 4KiB 논리 페이지의 처음 64B만 읽으므로, 같은 물리 페이지의 4개 논리 영역을 다 사용해도 256B다. 명목 효율은 1/64이며, 실제 구간에서 반환한 Host 바이트와 완료한 NAND 전송량은 구간 경계 및 버퍼 체류 때문에 정확히 64배로 맞지 않을 수 있다. B1의 NAND 처리량은 256.778240GB/s, B2는 256.991232GB/s다. 8MiB와 QD512에서 A1/B1은 같은 4KiB stripe와 head_locality 프로파일 및 동일 매핑을 사용한다. A2는 16KiB stripe/locality, B2는 4KiB stripe/head_locality라 크기만의 효과를 분리한 쌍이 아니다. 작은 요청에 필요 없는 바이트를 더 반환하면 유효 성능이 자동으로 늘어나는 것은 아니다. 같은 물리 페이지에서 실제로 소비하는 데이터량과 재사용률이 중요하다. B3의 이전 32 Plane 유한 요청열 결과를 현재 64 Plane 지속 부하 표에 혼합하지 않았다.</a:t>
             </a:r>
           </a:p>
@@ -757,7 +873,7 @@
           <a:lstStyle xmlns:a="http://schemas.openxmlformats.org/drawingml/2006/main"/>
           <a:p xmlns:a="http://schemas.openxmlformats.org/drawingml/2006/main">
             <a:r>
-              <a:t>이 구조는 현재 시뮬레이터 기준이다. 4개 Port는 독립적인 요청/응답 주체로, 한 Port도 주소에 따라 모든 Channel을 사용할 수 있다. Port와 Channel을 고정 1:1로 연결하지 않는다. Host IF는 Port당 512bit, 1GHz로 64GB/s이며 합계256GB/s다. 요청 수락 시 QD와 버퍼 용량을 확인하고, 신규16KiB 물리 페이지 작업에 대한 공유 버퍼 공간을 예약한다. 동일 물리 페이지 요청은 기존 작업에 연결할 수 있다. Lookup 이후 물리 주소의 연속성과 Port 선두 대기를 고려해 CA를 발행한다. NAND는4채널, 채널당16Plane, Plane당page buffer1개다. NAND출력은16KiB 전체 페이지이며 ECC 후 Controller buffer의 데이터가 반환 가능해진다. Port별 FIFO 선두만 응답하며 연결된 마지막 응답이 끝나면 Controller buffer를 해제한다. 영구cache나LRU 정책은 적용하지 않았다. UCIe의 모든 프로토콜 계층을 상세 구현한 회로도가 아니라 본 평가 모델의 동작 구조다.</a:t>
+              <a:t>tR은 현재 시뮬레이터의 NAND sensing 구간이며 Host의 end-to-end 읽기 지연 전체가 아니다. 이 페이지의 수치는 제품 보증치가 아니라 지금까지 승인·사용한 모델 입력값이다.</a:t>
             </a:r>
           </a:p>
           <a:p xmlns:a="http://schemas.openxmlformats.org/drawingml/2006/main">
@@ -767,6 +883,76 @@
           </a:p>
           <a:p xmlns:a="http://schemas.openxmlformats.org/drawingml/2006/main">
             <a:r>
+              <a:t>판정 단위는 (Channel, Plane)이다. q는 해당 Plane 내부의 물리 페이지 순번이며, 고객 A/B 패턴의 4KiB 논리 Page 번호나 Host 주소가 아니다. 다른 Plane에서 Read를 해도 이 Plane의 직전 sensing 이력은 바뀌지 않는다.</a:t>
+            </a:r>
+          </a:p>
+          <a:p xmlns:a="http://schemas.openxmlformats.org/drawingml/2006/main">
+            <a:r>
+              <a:t/>
+            </a:r>
+          </a:p>
+          <a:p xmlns:a="http://schemas.openxmlformats.org/drawingml/2006/main">
+            <a:r>
+              <a:t>판정 순서: 기존 Controller buffer 작업이 있으면 연결해서 사용한다. 새 NAND 작업이 필요하지만 해당 Plane의 page buffer에 같은 q가 남아 있으면 sensing을 생략한다. 이때 출력 CA, 16KiB NAND Data 전송, ECC와 응답 대기는 여전히 필요하다. page buffer miss이면 First → Group → q+1의 Short/Mid → Long 순서로 분류한다.</a:t>
+            </a:r>
+          </a:p>
+          <a:p xmlns:a="http://schemas.openxmlformats.org/drawingml/2006/main">
+            <a:r>
+              <a:t/>
+            </a:r>
+          </a:p>
+          <a:p xmlns:a="http://schemas.openxmlformats.org/drawingml/2006/main">
+            <a:r>
+              <a:t>First: 해당 Plane에서 이전 sensing 이력이 없을 때 20.69µs. 현재 모델은 최초 sensing에 1st Long 17.52µs + tRRC 3.17µs를 적용한다. Group: 이전/다음 q가 서로 다른 Group이면 20.69µs이며, q가 정확히 +1이더라도 Group 판정이 우선한다.</a:t>
+            </a:r>
+          </a:p>
+          <a:p xmlns:a="http://schemas.openxmlformats.org/drawingml/2006/main">
+            <a:r>
+              <a:t/>
+            </a:r>
+          </a:p>
+          <a:p xmlns:a="http://schemas.openxmlformats.org/drawingml/2006/main">
+            <a:r>
+              <a:t>같은 Group의 q+1에서 목적지 q가 홀수이면 Short 2.00µs, 짝수이면 Mid 2.08µs다. 물리 순회는 E/O 0→1, SSL 0→5, Block 0→1, WL 420→0, 다음 Group이다. q0→1은 동일 SSL의 E/O 0→1이라 Short, q1→2는 다음 SSL로 이동해 Mid, q11→12는 다음 Block으로 자연 순환해 Mid, q23→24는 다음 WL로 자연 순환해 Mid다. Group당 421×2×6×2=10,104개의 16KiB 물리 페이지이며 q10103→10104는 Group 전환이다.</a:t>
+            </a:r>
+          </a:p>
+          <a:p xmlns:a="http://schemas.openxmlformats.org/drawingml/2006/main">
+            <a:r>
+              <a:t/>
+            </a:r>
+          </a:p>
+          <a:p xmlns:a="http://schemas.openxmlformats.org/drawingml/2006/main">
+            <a:r>
+              <a:t>Long: 같은 Group에서 직전 q의 바로 다음 페이지가 아닌 곳으로 이동하면 12.16µs다. 예를 들어 q0→2는 목적지가 짝수여도 q+1이 아니므로 Mid가 아니라 Long이다. q3→1의 역방향 재방문도 page buffer에 해당 페이지가 없으면 Long이다. 논리 A2 순서만 보고 Long 여부를 판단하지 않고 L2P와 CA 발행 후의 물리 순서를 사용한다.</a:t>
+            </a:r>
+          </a:p>
+          <a:p xmlns:a="http://schemas.openxmlformats.org/drawingml/2006/main">
+            <a:r>
+              <a:t/>
+            </a:r>
+          </a:p>
+          <a:p xmlns:a="http://schemas.openxmlformats.org/drawingml/2006/main">
+            <a:r>
+              <a:t>평균 tR은 실제 sensing 횟수의 가중 평균이다. (20.69×(N_First+N_Group)+2.00×N_Short+2.08×N_Mid+12.16×N_Long) / N_sensing. page buffer hit와 Controller buffer 재사용은 sensing 횟수에 넣지 않는다. 연속 구간은 Short/Mid가 번갈아 발생하며 둘만 같은 횟수로 섞인 평균은2.04µs다. 성능 개선은 tR 상수를 줄인 것이 아니라 Long의 빈도를 줄인 결과다.</a:t>
+            </a:r>
+          </a:p>
+          <a:p xmlns:a="http://schemas.openxmlformats.org/drawingml/2006/main">
+            <a:r>
+              <a:t/>
+            </a:r>
+          </a:p>
+          <a:p xmlns:a="http://schemas.openxmlformats.org/drawingml/2006/main">
+            <a:r>
+              <a:t>Host 읽기에는 버퍼 수락 대기, lookup 0.5µs, CA 0.1µs, tR, 채널 Data 대기/전송, ECC 0.2µs, Port 내부 in-order 대기와 Host 반환 시간이 더해진다. NAND Data는16KiB/80.1125GB/s + turnaround0.05µs ≈0.254512µs이며, 자원 대기는 별도다. 64B와4KiB Host 요청 크기 자체로 tR을1/64로 줄이지 않는다. 물리 페이지가 같으면 sensing을 공유할 수 있는지는 버퍼와 진행 중 작업의 상태가 결정한다.</a:t>
+            </a:r>
+          </a:p>
+          <a:p xmlns:a="http://schemas.openxmlformats.org/drawingml/2006/main">
+            <a:r>
+              <a:t/>
+            </a:r>
+          </a:p>
+          <a:p xmlns:a="http://schemas.openxmlformats.org/drawingml/2006/main">
+            <a:r>
               <a:t>출처</a:t>
             </a:r>
           </a:p>
@@ -777,12 +963,17 @@
           </a:p>
           <a:p xmlns:a="http://schemas.openxmlformats.org/drawingml/2006/main">
             <a:r>
+              <a:t>https://github.com/JBRARAPARK/HBF_zNAND_Research/blob/22d9b33f085991f33d5273fdd9ce5688fb429fa4/docs/07_prefetch_tuning_ko.md</a:t>
+            </a:r>
+          </a:p>
+          <a:p xmlns:a="http://schemas.openxmlformats.org/drawingml/2006/main">
+            <a:r>
               <a:t>https://github.com/JBRARAPARK/HBF_zNAND_Research/blob/22d9b33f085991f33d5273fdd9ce5688fb429fa4/docs/12_controller_scheduling_ko.md</a:t>
             </a:r>
           </a:p>
           <a:p xmlns:a="http://schemas.openxmlformats.org/drawingml/2006/main">
             <a:r>
-              <a:t>https://github.com/JBRARAPARK/HBF_zNAND_Research/blob/22d9b33f085991f33d5273fdd9ce5688fb429fa4/results/znand/saturation/RESULTS_KO.md</a:t>
+              <a:t>https://github.com/JBRARAPARK/HBF_zNAND_Research/blob/22d9b33f085991f33d5273fdd9ce5688fb429fa4/results/znand/host_ceiling/timing_validation.json</a:t>
             </a:r>
           </a:p>
         </p:txBody>
@@ -852,7 +1043,7 @@
           <a:lstStyle xmlns:a="http://schemas.openxmlformats.org/drawingml/2006/main"/>
           <a:p xmlns:a="http://schemas.openxmlformats.org/drawingml/2006/main">
             <a:r>
-              <a:t>세 항목 중 1번은 내부 스케줄러 변경, 2번은 물리 자원 확대와 L2P 배치 변경, 3번은 버퍼와 포트별 QD 설정의 조합이다. 3번 비교는 admission 알고리즘을 수정한 결과가 아니다. 1번은 PF ON, 32 Plane, 32MiB, QD2048, 16KiB stripe의 A2 case37. 2번은 PF OFF, 64 Plane, 32MiB, QD2048, A2의 snapshot만 변경한 쌍. 3번은 PF OFF, 64 Plane, 8MiB, 영역 배치 A1의 고정 2ms 평균이다.</a:t>
+              <a:t>이 구조는 현재 시뮬레이터 기준이다. 4개 Port는 독립적인 요청/응답 주체로, 한 Port도 주소에 따라 모든 Channel을 사용할 수 있다. Port와 Channel을 고정 1:1로 연결하지 않는다. Host IF는 Port당 512bit, 1GHz로 64GB/s이며 합계256GB/s다. 요청 수락 시 QD와 버퍼 용량을 확인하고, 신규16KiB 물리 페이지 작업에 대한 공유 버퍼 공간을 예약한다. 동일 물리 페이지 요청은 기존 작업에 연결할 수 있다. Lookup 이후 물리 주소의 연속성과 Port 선두 대기를 고려해 CA를 발행한다. NAND는4채널, 채널당16Plane, Plane당page buffer1개다. NAND출력은16KiB 전체 페이지이며 ECC 후 Controller buffer의 데이터가 반환 가능해진다. Port별 FIFO 선두만 응답하며 연결된 마지막 응답이 끝나면 Controller buffer를 해제한다. 영구cache나LRU 정책은 적용하지 않았다. UCIe의 모든 프로토콜 계층을 상세 구현한 회로도가 아니라 본 평가 모델의 동작 구조다.</a:t>
             </a:r>
           </a:p>
           <a:p xmlns:a="http://schemas.openxmlformats.org/drawingml/2006/main">
@@ -867,17 +1058,17 @@
           </a:p>
           <a:p xmlns:a="http://schemas.openxmlformats.org/drawingml/2006/main">
             <a:r>
-              <a:t>https://github.com/JBRARAPARK/HBF_zNAND_Research/blob/22d9b33f085991f33d5273fdd9ce5688fb429fa4/results/znand/locality/matched_comparison.csv</a:t>
-            </a:r>
-          </a:p>
-          <a:p xmlns:a="http://schemas.openxmlformats.org/drawingml/2006/main">
-            <a:r>
-              <a:t>https://github.com/JBRARAPARK/HBF_zNAND_Research/blob/22d9b33f085991f33d5273fdd9ce5688fb429fa4/results/znand/host_ceiling/sweep.csv</a:t>
-            </a:r>
-          </a:p>
-          <a:p xmlns:a="http://schemas.openxmlformats.org/drawingml/2006/main">
-            <a:r>
-              <a:t>https://github.com/JBRARAPARK/HBF_zNAND_Research/blob/22d9b33f085991f33d5273fdd9ce5688fb429fa4/results/znand/saturation/sweep.csv</a:t>
+              <a:t>https://github.com/JBRARAPARK/HBF_zNAND_Research/blob/22d9b33f085991f33d5273fdd9ce5688fb429fa4/znand/model.py</a:t>
+            </a:r>
+          </a:p>
+          <a:p xmlns:a="http://schemas.openxmlformats.org/drawingml/2006/main">
+            <a:r>
+              <a:t>https://github.com/JBRARAPARK/HBF_zNAND_Research/blob/22d9b33f085991f33d5273fdd9ce5688fb429fa4/docs/12_controller_scheduling_ko.md</a:t>
+            </a:r>
+          </a:p>
+          <a:p xmlns:a="http://schemas.openxmlformats.org/drawingml/2006/main">
+            <a:r>
+              <a:t>https://github.com/JBRARAPARK/HBF_zNAND_Research/blob/22d9b33f085991f33d5273fdd9ce5688fb429fa4/results/znand/saturation/RESULTS_KO.md</a:t>
             </a:r>
           </a:p>
         </p:txBody>
@@ -947,7 +1138,7 @@
           <a:lstStyle xmlns:a="http://schemas.openxmlformats.org/drawingml/2006/main"/>
           <a:p xmlns:a="http://schemas.openxmlformats.org/drawingml/2006/main">
             <a:r>
-              <a:t>동일 조건의 CA 선택 정책만 비교한 case37. FIFO 37.08340647376568 GB/s, locality 118.25742257207769 GB/s, 증가율 218.89579145254046%. Long 비율 91.81307955100048%에서 10.56612981942411%. locality에서는 같은 Group의 q+1만 연속 후보로 취급한다. 이미 busy인 Plane은 선점하지 않는다. 이 초기 비교의 bypass 한도는 8이다. 후속 실험은 32로 확대했다. A1에서 bypass32 locality 129.174 GB/s와 head_locality 134.339 GB/s를 비교한 추가 이득은 4.00%였으며, 그 전체 증가를 선두 우선 효과로 해석하지 않는다. A2는 선두 우선의 추가 효과가 작아서 locality를 유지했다. 과거 B 패턴에 선두 우선을 무조건 확대하면 성능이 떨어진 사례도 있다. 현재 B 지속 부하 실험은 A1과 조건을 맞춰 head_locality를 사용한다.</a:t>
+              <a:t>세 항목 중 1번은 내부 스케줄러 변경, 2번은 물리 자원 확대와 L2P 배치 변경, 3번은 버퍼와 포트별 QD 설정의 조합이다. 3번 비교는 admission 알고리즘을 수정한 결과가 아니다. 1번은 PF ON, 32 Plane, 32MiB, QD2048, 16KiB stripe의 A2 case37. 2번은 PF OFF, 64 Plane, 32MiB, QD2048, A2의 snapshot만 변경한 쌍. 3번은 PF OFF, 64 Plane, 8MiB, 영역 배치 A1의 고정 2ms 평균이다.</a:t>
             </a:r>
           </a:p>
           <a:p xmlns:a="http://schemas.openxmlformats.org/drawingml/2006/main">
@@ -962,17 +1153,17 @@
           </a:p>
           <a:p xmlns:a="http://schemas.openxmlformats.org/drawingml/2006/main">
             <a:r>
-              <a:t>https://github.com/JBRARAPARK/HBF_zNAND_Research/blob/22d9b33f085991f33d5273fdd9ce5688fb429fa4/docs/12_controller_scheduling_ko.md</a:t>
-            </a:r>
-          </a:p>
-          <a:p xmlns:a="http://schemas.openxmlformats.org/drawingml/2006/main">
-            <a:r>
               <a:t>https://github.com/JBRARAPARK/HBF_zNAND_Research/blob/22d9b33f085991f33d5273fdd9ce5688fb429fa4/results/znand/locality/matched_comparison.csv</a:t>
             </a:r>
           </a:p>
           <a:p xmlns:a="http://schemas.openxmlformats.org/drawingml/2006/main">
             <a:r>
-              <a:t>https://github.com/JBRARAPARK/HBF_zNAND_Research/blob/22d9b33f085991f33d5273fdd9ce5688fb429fa4/results/znand/head_locality/RESULTS_KO.md</a:t>
+              <a:t>https://github.com/JBRARAPARK/HBF_zNAND_Research/blob/22d9b33f085991f33d5273fdd9ce5688fb429fa4/results/znand/host_ceiling/sweep.csv</a:t>
+            </a:r>
+          </a:p>
+          <a:p xmlns:a="http://schemas.openxmlformats.org/drawingml/2006/main">
+            <a:r>
+              <a:t>https://github.com/JBRARAPARK/HBF_zNAND_Research/blob/22d9b33f085991f33d5273fdd9ce5688fb429fa4/results/znand/saturation/sweep.csv</a:t>
             </a:r>
           </a:p>
         </p:txBody>
@@ -1042,7 +1233,7 @@
           <a:lstStyle xmlns:a="http://schemas.openxmlformats.org/drawingml/2006/main"/>
           <a:p xmlns:a="http://schemas.openxmlformats.org/drawingml/2006/main">
             <a:r>
-              <a:t>32 Plane의 최단 주기 상한은 CA 0.1µs + Short tR 2µs + NAND Data/turnaround 0.254512µs로 계산한 낙관적 상한이다. 가용률 100%로 놓아도 약222.674GB/s이며 현재85%를 고려한 Short/Mid 교대 공급량은 약186.111GB/s다. 이 가용률을 실험 결과에서 다시 감산하면 안 된다. 32에서64 Plane으로 바꾸는 비교는 geometry 변경을 포함한다. 같은 geometry의 기존 배치와 영역 배치 쌍은 전체 config 중 snapshot만 다르다. 64 Plane A2 Long비율은1142/8196=13.93%에서3/8196=0.0366%이며 finite run 초기first sensing을 포함한다. 평균tR만 낮아졌으며 tR 상수는 바꾸지 않았다.</a:t>
+              <a:t>동일 조건의 CA 선택 정책만 비교한 case37. FIFO 37.08340647376568 GB/s, locality 118.25742257207769 GB/s, 증가율 218.89579145254046%. Long 비율 91.81307955100048%에서 10.56612981942411%. locality에서는 같은 Group의 q+1만 연속 후보로 취급한다. 이미 busy인 Plane은 선점하지 않는다. 이 초기 비교의 bypass 한도는 8이다. 후속 실험은 32로 확대했다. A1에서 bypass32 locality 129.174 GB/s와 head_locality 134.339 GB/s를 비교한 추가 이득은 4.00%였으며, 그 전체 증가를 선두 우선 효과로 해석하지 않는다. A2는 선두 우선의 추가 효과가 작아서 locality를 유지했다. 과거 B 패턴에 선두 우선을 무조건 확대하면 성능이 떨어진 사례도 있다. 현재 B 지속 부하 실험은 A1과 조건을 맞춰 head_locality를 사용한다.</a:t>
             </a:r>
           </a:p>
           <a:p xmlns:a="http://schemas.openxmlformats.org/drawingml/2006/main">
@@ -1057,17 +1248,17 @@
           </a:p>
           <a:p xmlns:a="http://schemas.openxmlformats.org/drawingml/2006/main">
             <a:r>
-              <a:t>https://github.com/JBRARAPARK/HBF_zNAND_Research/blob/22d9b33f085991f33d5273fdd9ce5688fb429fa4/results/znand/host_ceiling/sweep.csv</a:t>
-            </a:r>
-          </a:p>
-          <a:p xmlns:a="http://schemas.openxmlformats.org/drawingml/2006/main">
-            <a:r>
-              <a:t>https://github.com/JBRARAPARK/HBF_zNAND_Research/blob/22d9b33f085991f33d5273fdd9ce5688fb429fa4/results/znand/host_ceiling/RESULTS_KO.md</a:t>
-            </a:r>
-          </a:p>
-          <a:p xmlns:a="http://schemas.openxmlformats.org/drawingml/2006/main">
-            <a:r>
-              <a:t>https://github.com/JBRARAPARK/HBF_zNAND_Research/blob/22d9b33f085991f33d5273fdd9ce5688fb429fa4/results/znand/host_ceiling/timing_validation.json</a:t>
+              <a:t>https://github.com/JBRARAPARK/HBF_zNAND_Research/blob/22d9b33f085991f33d5273fdd9ce5688fb429fa4/docs/12_controller_scheduling_ko.md</a:t>
+            </a:r>
+          </a:p>
+          <a:p xmlns:a="http://schemas.openxmlformats.org/drawingml/2006/main">
+            <a:r>
+              <a:t>https://github.com/JBRARAPARK/HBF_zNAND_Research/blob/22d9b33f085991f33d5273fdd9ce5688fb429fa4/results/znand/locality/matched_comparison.csv</a:t>
+            </a:r>
+          </a:p>
+          <a:p xmlns:a="http://schemas.openxmlformats.org/drawingml/2006/main">
+            <a:r>
+              <a:t>https://github.com/JBRARAPARK/HBF_zNAND_Research/blob/22d9b33f085991f33d5273fdd9ce5688fb429fa4/results/znand/head_locality/RESULTS_KO.md</a:t>
             </a:r>
           </a:p>
         </p:txBody>
@@ -1137,7 +1328,7 @@
           <a:lstStyle xmlns:a="http://schemas.openxmlformats.org/drawingml/2006/main"/>
           <a:p xmlns:a="http://schemas.openxmlformats.org/drawingml/2006/main">
             <a:r>
-              <a:t>표의 Plane 번호는 각 채널 내부 번호다. 동일하게 표시된 Plane 0은 채널별로 서로 다른 물리 자원이다. 영역 0은 채널당 Plane 0~3 등 4개 Plane을 사용하며, 4채널을 모두 활용한다. 비중첩 논리 영역을 각 Port가 읽는 합성 요청열에 맞춘 정적 L2P snapshot이다. 같은 물리 페이지의 offset 및 Channel 배치를 보존하고 Plane을 재배치한다. 64B 단위의 물리 분산이나 64B 단위 매핑을 추가하지 않았다. 동적 L2P와 편향 workload는 후속 검증이 필요하다.</a:t>
+              <a:t>32 Plane의 최단 주기 상한은 CA 0.1µs + Short tR 2µs + NAND Data/turnaround 0.254512µs로 계산한 낙관적 상한이다. 가용률 100%로 놓아도 약222.674GB/s이며 현재85%를 고려한 Short/Mid 교대 공급량은 약186.111GB/s다. 이 가용률을 실험 결과에서 다시 감산하면 안 된다. 32에서64 Plane으로 바꾸는 비교는 geometry 변경을 포함한다. 같은 geometry의 기존 배치와 영역 배치 쌍은 전체 config 중 snapshot만 다르다. 64 Plane A2 Long비율은1142/8196=13.93%에서3/8196=0.0366%이며 finite run 초기first sensing을 포함한다. 평균tR만 낮아졌으며 tR 상수는 바꾸지 않았다.</a:t>
             </a:r>
           </a:p>
           <a:p xmlns:a="http://schemas.openxmlformats.org/drawingml/2006/main">
@@ -1152,12 +1343,17 @@
           </a:p>
           <a:p xmlns:a="http://schemas.openxmlformats.org/drawingml/2006/main">
             <a:r>
+              <a:t>https://github.com/JBRARAPARK/HBF_zNAND_Research/blob/22d9b33f085991f33d5273fdd9ce5688fb429fa4/results/znand/host_ceiling/sweep.csv</a:t>
+            </a:r>
+          </a:p>
+          <a:p xmlns:a="http://schemas.openxmlformats.org/drawingml/2006/main">
+            <a:r>
               <a:t>https://github.com/JBRARAPARK/HBF_zNAND_Research/blob/22d9b33f085991f33d5273fdd9ce5688fb429fa4/results/znand/host_ceiling/RESULTS_KO.md</a:t>
             </a:r>
           </a:p>
           <a:p xmlns:a="http://schemas.openxmlformats.org/drawingml/2006/main">
             <a:r>
-              <a:t>https://github.com/JBRARAPARK/HBF_zNAND_Research/blob/22d9b33f085991f33d5273fdd9ce5688fb429fa4/results/znand/host_ceiling/snapshots/A2_64Plane.json</a:t>
+              <a:t>https://github.com/JBRARAPARK/HBF_zNAND_Research/blob/22d9b33f085991f33d5273fdd9ce5688fb429fa4/results/znand/host_ceiling/timing_validation.json</a:t>
             </a:r>
           </a:p>
         </p:txBody>
@@ -1227,7 +1423,7 @@
           <a:lstStyle xmlns:a="http://schemas.openxmlformats.org/drawingml/2006/main"/>
           <a:p xmlns:a="http://schemas.openxmlformats.org/drawingml/2006/main">
             <a:r>
-              <a:t>현재 admission은 Port 0, 1, 2, 3 순서이고, 요청 수락 시 공유 controller buffer를 예약한다. 버퍼와 Port별 QD 제한을 조합해 기존 admission의 편중을 줄인 결과다. 공정 중재 알고리즘을 구현한 결과는 아니다. 표는 설정 상한과 실제 평균 outstanding을 구분한다. A1 8MiB QD2048은 총 2029.55개, QD512는 총 2006.69개로 총합이 비슷해도 Port 분포가 다르다. A1 고정 평균은 68.857856에서 255.365922GB/s, A2는 71.888925에서 255.058330GB/s다. Actual outstanding은 수락된 AR에서 마지막 응답 완료 수를 뺀 값이며, Host 대기 요청은 포함하지 않는다. A1은 head_locality와 4KiB stripe, A2는 locality와 16KiB stripe를 사용한다.</a:t>
+              <a:t>표의 Plane 번호는 각 채널 내부 번호다. 동일하게 표시된 Plane 0은 채널별로 서로 다른 물리 자원이다. 영역 0은 채널당 Plane 0~3 등 4개 Plane을 사용하며, 4채널을 모두 활용한다. 비중첩 논리 영역을 각 Port가 읽는 합성 요청열에 맞춘 정적 L2P snapshot이다. 같은 물리 페이지의 offset 및 Channel 배치를 보존하고 Plane을 재배치한다. 64B 단위의 물리 분산이나 64B 단위 매핑을 추가하지 않았다. 동적 L2P와 편향 workload는 후속 검증이 필요하다.</a:t>
             </a:r>
           </a:p>
           <a:p xmlns:a="http://schemas.openxmlformats.org/drawingml/2006/main">
@@ -1242,12 +1438,12 @@
           </a:p>
           <a:p xmlns:a="http://schemas.openxmlformats.org/drawingml/2006/main">
             <a:r>
-              <a:t>https://github.com/JBRARAPARK/HBF_zNAND_Research/blob/22d9b33f085991f33d5273fdd9ce5688fb429fa4/results/znand/saturation/sweep.csv</a:t>
-            </a:r>
-          </a:p>
-          <a:p xmlns:a="http://schemas.openxmlformats.org/drawingml/2006/main">
-            <a:r>
-              <a:t>https://github.com/JBRARAPARK/HBF_zNAND_Research/blob/22d9b33f085991f33d5273fdd9ce5688fb429fa4/results/znand/saturation/RESULTS_KO.md</a:t>
+              <a:t>https://github.com/JBRARAPARK/HBF_zNAND_Research/blob/22d9b33f085991f33d5273fdd9ce5688fb429fa4/results/znand/host_ceiling/RESULTS_KO.md</a:t>
+            </a:r>
+          </a:p>
+          <a:p xmlns:a="http://schemas.openxmlformats.org/drawingml/2006/main">
+            <a:r>
+              <a:t>https://github.com/JBRARAPARK/HBF_zNAND_Research/blob/22d9b33f085991f33d5273fdd9ce5688fb429fa4/results/znand/host_ceiling/snapshots/A2_64Plane.json</a:t>
             </a:r>
           </a:p>
         </p:txBody>
@@ -1317,7 +1513,7 @@
           <a:lstStyle xmlns:a="http://schemas.openxmlformats.org/drawingml/2006/main"/>
           <a:p xmlns:a="http://schemas.openxmlformats.org/drawingml/2006/main">
             <a:r>
-              <a:t>이 표는 버퍼별 QD를 함께 선택한 결과다. 4MiB는 측정 조합 중 A1/A2가 모두 200GB/s를 넘긴 최소 용량이며, 모든 슬롯 수와 QD를 전수 탐색한 절대 하한은 아니다. 8MiB와 16MiB의 QD512 쌍은 같은 QD에서 버퍼를 비교할 수 있다. A1은 255.365922/255.371651, A2는 255.058330/255.211219GB/s다. 최고 500µs 값과 고정 2ms 값을 혼용하지 않는다. PF OFF이므로 Host 요청만으로 이 수치를 관측했다. Controller buffer는 16KiB 작업 단위로 예약하며 마지막 연결 응답 후 해제하는 임시 버퍼다. 지속적인 demand cache나 LRU를 새로 도입한 결과가 아니다. B1/B2는 연속된 64B 모두를 읽는 패턴이 아니고, 각 4KiB 논리 페이지의 64B만 읽는다. 16KiB 물리 페이지당 4개 64B, 즉 256B를 사용하므로 명목 효율은 1/64이다. 모델 내 NAND 부분 전송은 없다.</a:t>
+              <a:t>현재 admission은 Port 0, 1, 2, 3 순서이고, 요청 수락 시 공유 controller buffer를 예약한다. 버퍼와 Port별 QD 제한을 조합해 기존 admission의 편중을 줄인 결과다. 공정 중재 알고리즘을 구현한 결과는 아니다. 표는 설정 상한과 실제 평균 outstanding을 구분한다. A1 8MiB QD2048은 총 2029.55개, QD512는 총 2006.69개로 총합이 비슷해도 Port 분포가 다르다. A1 고정 평균은 68.857856에서 255.365922GB/s, A2는 71.888925에서 255.058330GB/s다. Actual outstanding은 수락된 AR에서 마지막 응답 완료 수를 뺀 값이며, Host 대기 요청은 포함하지 않는다. A1은 head_locality와 4KiB stripe, A2는 locality와 16KiB stripe를 사용한다.</a:t>
             </a:r>
           </a:p>
           <a:p xmlns:a="http://schemas.openxmlformats.org/drawingml/2006/main">
@@ -1338,11 +1534,6 @@
           <a:p xmlns:a="http://schemas.openxmlformats.org/drawingml/2006/main">
             <a:r>
               <a:t>https://github.com/JBRARAPARK/HBF_zNAND_Research/blob/22d9b33f085991f33d5273fdd9ce5688fb429fa4/results/znand/saturation/RESULTS_KO.md</a:t>
-            </a:r>
-          </a:p>
-          <a:p xmlns:a="http://schemas.openxmlformats.org/drawingml/2006/main">
-            <a:r>
-              <a:t>https://github.com/JBRARAPARK/HBF_zNAND_Research/blob/22d9b33f085991f33d5273fdd9ce5688fb429fa4/results/znand/partial_saturation/RESULTS_KO.md</a:t>
             </a:r>
           </a:p>
         </p:txBody>
@@ -1412,7 +1603,7 @@
           <a:lstStyle xmlns:a="http://schemas.openxmlformats.org/drawingml/2006/main"/>
           <a:p xmlns:a="http://schemas.openxmlformats.org/drawingml/2006/main">
             <a:r>
-              <a:t>증거 목록과 원문은 아래 고정 커밋 URL로 제공한다. 본 자료는 제품 실측 성능이나 HBF 사양의 공식 보장이 아니다. 모델은 4개의 독립 Port가 4채널 전체를 공유하며, Plane당 page buffer 1개와 물리 16KiB page를 사용한다. 가용률 85%는 100µs 주기의 명목 15µs Plane 휴지 구간으로 모델링했다. 실제 GC 쓰기/erase trace를 실행한 것은 아니다. 이전 maintenance OFF 실험은 B 패턴 낙폭 원인 확인을 위한 대조군이며, 성능 개선 기준으로 채택하지 않았다. Controller cache 및 64B 물리 분산도 채택하지 않았다. 후속 후보는 Port별 수락의 공정성, 주소 편향 및 동적 매핑에서의 재현성 검증이다. 이번 정리는 기존 결과만 사용했으며 성능 엔진이나 입력 tR을 수정하지 않았다.</a:t>
+              <a:t>이 표는 버퍼별 QD를 함께 선택한 결과다. 4MiB는 측정 조합 중 A1/A2가 모두 200GB/s를 넘긴 최소 용량이며, 모든 슬롯 수와 QD를 전수 탐색한 절대 하한은 아니다. 8MiB와 16MiB의 QD512 쌍은 같은 QD에서 버퍼를 비교할 수 있다. A1은 255.365922/255.371651, A2는 255.058330/255.211219GB/s다. 최고 500µs 값과 고정 2ms 값을 혼용하지 않는다. PF OFF이므로 Host 요청만으로 이 수치를 관측했다. Controller buffer는 16KiB 작업 단위로 예약하며 마지막 연결 응답 후 해제하는 임시 버퍼다. 지속적인 demand cache나 LRU를 새로 도입한 결과가 아니다. B1/B2는 연속된 64B 모두를 읽는 패턴이 아니고, 각 4KiB 논리 페이지의 64B만 읽는다. 16KiB 물리 페이지당 4개 64B, 즉 256B를 사용하므로 명목 효율은 1/64이다. 모델 내 NAND 부분 전송은 없다.</a:t>
             </a:r>
           </a:p>
           <a:p xmlns:a="http://schemas.openxmlformats.org/drawingml/2006/main">
@@ -1427,21 +1618,6 @@
           </a:p>
           <a:p xmlns:a="http://schemas.openxmlformats.org/drawingml/2006/main">
             <a:r>
-              <a:t>https://github.com/JBRARAPARK/HBF_zNAND_Research/blob/22d9b33f085991f33d5273fdd9ce5688fb429fa4/results/znand/locality/matched_comparison.csv</a:t>
-            </a:r>
-          </a:p>
-          <a:p xmlns:a="http://schemas.openxmlformats.org/drawingml/2006/main">
-            <a:r>
-              <a:t>https://github.com/JBRARAPARK/HBF_zNAND_Research/blob/22d9b33f085991f33d5273fdd9ce5688fb429fa4/results/znand/host_ceiling/sweep.csv</a:t>
-            </a:r>
-          </a:p>
-          <a:p xmlns:a="http://schemas.openxmlformats.org/drawingml/2006/main">
-            <a:r>
-              <a:t>https://github.com/JBRARAPARK/HBF_zNAND_Research/blob/22d9b33f085991f33d5273fdd9ce5688fb429fa4/results/znand/host_ceiling/timing_validation.json</a:t>
-            </a:r>
-          </a:p>
-          <a:p xmlns:a="http://schemas.openxmlformats.org/drawingml/2006/main">
-            <a:r>
               <a:t>https://github.com/JBRARAPARK/HBF_zNAND_Research/blob/22d9b33f085991f33d5273fdd9ce5688fb429fa4/results/znand/saturation/sweep.csv</a:t>
             </a:r>
           </a:p>
@@ -1452,12 +1628,7 @@
           </a:p>
           <a:p xmlns:a="http://schemas.openxmlformats.org/drawingml/2006/main">
             <a:r>
-              <a:t>https://github.com/JBRARAPARK/HBF_zNAND_Research/blob/22d9b33f085991f33d5273fdd9ce5688fb429fa4/results/znand/partial_dips/RESULTS_KO.md</a:t>
-            </a:r>
-          </a:p>
-          <a:p xmlns:a="http://schemas.openxmlformats.org/drawingml/2006/main">
-            <a:r>
-              <a:t>https://github.com/JBRARAPARK/HBF_zNAND_Research/blob/22d9b33f085991f33d5273fdd9ce5688fb429fa4/docs/07_prefetch_tuning_ko.md</a:t>
+              <a:t>https://github.com/JBRARAPARK/HBF_zNAND_Research/blob/22d9b33f085991f33d5273fdd9ce5688fb429fa4/results/znand/partial_saturation/RESULTS_KO.md</a:t>
             </a:r>
           </a:p>
         </p:txBody>
@@ -1504,7 +1675,7 @@
           <p:cNvPr id="3" name="Title">
             <a:extLst xmlns:a="http://schemas.openxmlformats.org/drawingml/2006/main">
               <a:ext uri="{FF2B5EF4-FFF2-40B4-BE49-F238E27FC236}">
-                <a16:creationId xmlns:a16="http://schemas.microsoft.com/office/drawing/2014/main" id="{1825B06E-3E50-4486-84C1-46550697CB8E}"/>
+                <a16:creationId xmlns:a16="http://schemas.microsoft.com/office/drawing/2014/main" id="{CF1A63AD-EA1E-44E0-A076-FA46B664F4F4}"/>
               </a:ext>
             </a:extLst>
           </p:cNvPr>
@@ -1661,7 +1832,7 @@
           <p:cNvPr id="2" name="Subtitle">
             <a:extLst xmlns:a="http://schemas.openxmlformats.org/drawingml/2006/main">
               <a:ext uri="{FF2B5EF4-FFF2-40B4-BE49-F238E27FC236}">
-                <a16:creationId xmlns:a16="http://schemas.microsoft.com/office/drawing/2014/main" id="{1D37495F-B5C4-4B4D-8467-872207EEB74C}"/>
+                <a16:creationId xmlns:a16="http://schemas.microsoft.com/office/drawing/2014/main" id="{83D90AC0-6405-42AC-88BC-F3152CE76DD5}"/>
               </a:ext>
             </a:extLst>
           </p:cNvPr>
@@ -1835,7 +2006,7 @@
           <p:cNvPr id="2" name="Section title">
             <a:extLst xmlns:a="http://schemas.openxmlformats.org/drawingml/2006/main">
               <a:ext uri="{FF2B5EF4-FFF2-40B4-BE49-F238E27FC236}">
-                <a16:creationId xmlns:a16="http://schemas.microsoft.com/office/drawing/2014/main" id="{DBACE49A-A511-4CA0-89CE-84C28121A5F0}"/>
+                <a16:creationId xmlns:a16="http://schemas.microsoft.com/office/drawing/2014/main" id="{67C94E9E-11D7-4AB9-B849-FA29761A567F}"/>
               </a:ext>
             </a:extLst>
           </p:cNvPr>
@@ -2009,7 +2180,7 @@
           <p:cNvPr id="3" name="Title">
             <a:extLst xmlns:a="http://schemas.openxmlformats.org/drawingml/2006/main">
               <a:ext uri="{FF2B5EF4-FFF2-40B4-BE49-F238E27FC236}">
-                <a16:creationId xmlns:a16="http://schemas.microsoft.com/office/drawing/2014/main" id="{E44DC6D0-1AD3-4442-B080-2A81DF4B0FD8}"/>
+                <a16:creationId xmlns:a16="http://schemas.microsoft.com/office/drawing/2014/main" id="{CADEF622-A6AC-49CA-89D6-5225312FDA7A}"/>
               </a:ext>
             </a:extLst>
           </p:cNvPr>
@@ -2166,7 +2337,7 @@
           <p:cNvPr id="2" name="Body">
             <a:extLst xmlns:a="http://schemas.openxmlformats.org/drawingml/2006/main">
               <a:ext uri="{FF2B5EF4-FFF2-40B4-BE49-F238E27FC236}">
-                <a16:creationId xmlns:a16="http://schemas.microsoft.com/office/drawing/2014/main" id="{3453D93D-7EA4-4A91-90D2-B95EC0C05A50}"/>
+                <a16:creationId xmlns:a16="http://schemas.microsoft.com/office/drawing/2014/main" id="{EC33AF85-3690-4F62-824B-FF627E7143E1}"/>
               </a:ext>
             </a:extLst>
           </p:cNvPr>
@@ -2340,7 +2511,7 @@
           <p:cNvPr id="4" name="Title">
             <a:extLst xmlns:a="http://schemas.openxmlformats.org/drawingml/2006/main">
               <a:ext uri="{FF2B5EF4-FFF2-40B4-BE49-F238E27FC236}">
-                <a16:creationId xmlns:a16="http://schemas.microsoft.com/office/drawing/2014/main" id="{49FF37B7-E3DB-49C8-8CA3-E75D4015D0D6}"/>
+                <a16:creationId xmlns:a16="http://schemas.microsoft.com/office/drawing/2014/main" id="{6FF5E243-B437-4F8B-8CF8-989D00A8D348}"/>
               </a:ext>
             </a:extLst>
           </p:cNvPr>
@@ -2497,7 +2668,7 @@
           <p:cNvPr id="2" name="Left column">
             <a:extLst xmlns:a="http://schemas.openxmlformats.org/drawingml/2006/main">
               <a:ext uri="{FF2B5EF4-FFF2-40B4-BE49-F238E27FC236}">
-                <a16:creationId xmlns:a16="http://schemas.microsoft.com/office/drawing/2014/main" id="{55AA70AF-7262-47FA-A74B-8A16812D4643}"/>
+                <a16:creationId xmlns:a16="http://schemas.microsoft.com/office/drawing/2014/main" id="{8A6AEB37-920C-4538-8EA5-F8039613D8CA}"/>
               </a:ext>
             </a:extLst>
           </p:cNvPr>
@@ -2654,7 +2825,7 @@
           <p:cNvPr id="3" name="Right column">
             <a:extLst xmlns:a="http://schemas.openxmlformats.org/drawingml/2006/main">
               <a:ext uri="{FF2B5EF4-FFF2-40B4-BE49-F238E27FC236}">
-                <a16:creationId xmlns:a16="http://schemas.microsoft.com/office/drawing/2014/main" id="{68F2D319-9894-4EB6-B4C9-9F8EA5016F95}"/>
+                <a16:creationId xmlns:a16="http://schemas.microsoft.com/office/drawing/2014/main" id="{C339BEAB-FF7F-42A9-A819-1C637E2955DD}"/>
               </a:ext>
             </a:extLst>
           </p:cNvPr>
@@ -2828,7 +2999,7 @@
           <p:cNvPr id="3" name="Title">
             <a:extLst xmlns:a="http://schemas.openxmlformats.org/drawingml/2006/main">
               <a:ext uri="{FF2B5EF4-FFF2-40B4-BE49-F238E27FC236}">
-                <a16:creationId xmlns:a16="http://schemas.microsoft.com/office/drawing/2014/main" id="{92B06B2C-F254-4321-B592-4A742A01BF97}"/>
+                <a16:creationId xmlns:a16="http://schemas.microsoft.com/office/drawing/2014/main" id="{65362DF1-8E32-477C-8328-24B76989A873}"/>
               </a:ext>
             </a:extLst>
           </p:cNvPr>
@@ -2985,7 +3156,7 @@
           <p:cNvPr id="2" name="Left column">
             <a:extLst xmlns:a="http://schemas.openxmlformats.org/drawingml/2006/main">
               <a:ext uri="{FF2B5EF4-FFF2-40B4-BE49-F238E27FC236}">
-                <a16:creationId xmlns:a16="http://schemas.microsoft.com/office/drawing/2014/main" id="{DFCABDA1-9375-47B3-ACC5-C042B9DC6622}"/>
+                <a16:creationId xmlns:a16="http://schemas.microsoft.com/office/drawing/2014/main" id="{D26780A9-8FB3-473B-8AEE-9D0DF0F7800A}"/>
               </a:ext>
             </a:extLst>
           </p:cNvPr>
@@ -3180,12 +3351,12 @@
   </p:cSld>
   <p:clrMap bg1="lt1" tx1="dk1" bg2="lt2" tx2="dk2" accent1="accent1" accent2="accent2" accent3="accent3" accent4="accent4" accent5="accent5" accent6="accent6" hlink="hlink" folHlink="folHlink"/>
   <p:sldLayoutIdLst>
-    <p:sldLayoutId xmlns:r="http://schemas.openxmlformats.org/officeDocument/2006/relationships" id="2147483649" r:id="Rff4f6778bc1d4ce5"/>
-    <p:sldLayoutId xmlns:r="http://schemas.openxmlformats.org/officeDocument/2006/relationships" id="2147483650" r:id="Rf5e6e906c9184aa4"/>
-    <p:sldLayoutId xmlns:r="http://schemas.openxmlformats.org/officeDocument/2006/relationships" id="2147483651" r:id="Rc391d428aa61435e"/>
-    <p:sldLayoutId xmlns:r="http://schemas.openxmlformats.org/officeDocument/2006/relationships" id="2147483652" r:id="R69713828b0894374"/>
-    <p:sldLayoutId xmlns:r="http://schemas.openxmlformats.org/officeDocument/2006/relationships" id="2147483653" r:id="Rbd4199100d2e4576"/>
-    <p:sldLayoutId xmlns:r="http://schemas.openxmlformats.org/officeDocument/2006/relationships" id="2147483654" r:id="R5ce9ebb4079149b4"/>
+    <p:sldLayoutId xmlns:r="http://schemas.openxmlformats.org/officeDocument/2006/relationships" id="2147483649" r:id="R08cc338235ba4e31"/>
+    <p:sldLayoutId xmlns:r="http://schemas.openxmlformats.org/officeDocument/2006/relationships" id="2147483650" r:id="R2bd1854bb4164131"/>
+    <p:sldLayoutId xmlns:r="http://schemas.openxmlformats.org/officeDocument/2006/relationships" id="2147483651" r:id="Rc89db9660cb849ae"/>
+    <p:sldLayoutId xmlns:r="http://schemas.openxmlformats.org/officeDocument/2006/relationships" id="2147483652" r:id="R300f830840d64666"/>
+    <p:sldLayoutId xmlns:r="http://schemas.openxmlformats.org/officeDocument/2006/relationships" id="2147483653" r:id="Rbb238497f3124f53"/>
+    <p:sldLayoutId xmlns:r="http://schemas.openxmlformats.org/officeDocument/2006/relationships" id="2147483654" r:id="R8635d2a38c174b45"/>
   </p:sldLayoutIdLst>
   <p:txStyles>
     <p:titleStyle>
@@ -4540,7 +4711,7 @@
           <p:cNvPr id="78" name="title">
             <a:extLst xmlns:a="http://schemas.openxmlformats.org/drawingml/2006/main">
               <a:ext uri="{FF2B5EF4-FFF2-40B4-BE49-F238E27FC236}">
-                <a16:creationId xmlns:a16="http://schemas.microsoft.com/office/drawing/2014/main" id="{D9E00FE3-5013-466B-8555-02BC26F5CBB3}"/>
+                <a16:creationId xmlns:a16="http://schemas.microsoft.com/office/drawing/2014/main" id="{907DF1FA-3F18-46B5-8070-E043A2C6A503}"/>
               </a:ext>
             </a:extLst>
           </p:cNvPr>
@@ -4608,7 +4779,7 @@
           <p:cNvPr id="2" name="subtitle">
             <a:extLst xmlns:a="http://schemas.openxmlformats.org/drawingml/2006/main">
               <a:ext uri="{FF2B5EF4-FFF2-40B4-BE49-F238E27FC236}">
-                <a16:creationId xmlns:a16="http://schemas.microsoft.com/office/drawing/2014/main" id="{2B5B8EA2-D595-4592-9578-5A8F0C6FCC44}"/>
+                <a16:creationId xmlns:a16="http://schemas.microsoft.com/office/drawing/2014/main" id="{E77BC36C-60A7-4BC4-BEF0-0521C54B4F27}"/>
               </a:ext>
             </a:extLst>
           </p:cNvPr>
@@ -4676,7 +4847,7 @@
           <p:cNvPr id="3" name="footer">
             <a:extLst xmlns:a="http://schemas.openxmlformats.org/drawingml/2006/main">
               <a:ext uri="{FF2B5EF4-FFF2-40B4-BE49-F238E27FC236}">
-                <a16:creationId xmlns:a16="http://schemas.microsoft.com/office/drawing/2014/main" id="{4720FE11-3766-47A1-93DE-6467F723E790}"/>
+                <a16:creationId xmlns:a16="http://schemas.microsoft.com/office/drawing/2014/main" id="{B96F4CCF-C2CC-429D-AC07-6ED1243C2459}"/>
               </a:ext>
             </a:extLst>
           </p:cNvPr>
@@ -4744,7 +4915,7 @@
           <p:cNvPr id="4" name="page">
             <a:extLst xmlns:a="http://schemas.openxmlformats.org/drawingml/2006/main">
               <a:ext uri="{FF2B5EF4-FFF2-40B4-BE49-F238E27FC236}">
-                <a16:creationId xmlns:a16="http://schemas.microsoft.com/office/drawing/2014/main" id="{A438CD55-6BF6-48C9-A469-8C79F3376806}"/>
+                <a16:creationId xmlns:a16="http://schemas.microsoft.com/office/drawing/2014/main" id="{4741B04C-CC6B-4568-AA4D-28E582863543}"/>
               </a:ext>
             </a:extLst>
           </p:cNvPr>
@@ -4812,7 +4983,7 @@
           <p:cNvPr id="5" name="host-container">
             <a:extLst xmlns:a="http://schemas.openxmlformats.org/drawingml/2006/main">
               <a:ext uri="{FF2B5EF4-FFF2-40B4-BE49-F238E27FC236}">
-                <a16:creationId xmlns:a16="http://schemas.microsoft.com/office/drawing/2014/main" id="{243BD4DC-D35E-4BC9-AD22-A4F7A34B3815}"/>
+                <a16:creationId xmlns:a16="http://schemas.microsoft.com/office/drawing/2014/main" id="{677CE444-EA35-4333-B7F9-4A1391241446}"/>
               </a:ext>
             </a:extLst>
           </p:cNvPr>
@@ -4845,7 +5016,7 @@
           <p:cNvPr id="6" name="controller-container">
             <a:extLst xmlns:a="http://schemas.openxmlformats.org/drawingml/2006/main">
               <a:ext uri="{FF2B5EF4-FFF2-40B4-BE49-F238E27FC236}">
-                <a16:creationId xmlns:a16="http://schemas.microsoft.com/office/drawing/2014/main" id="{2C1EA5BD-128E-414C-B4D2-CE762CEFA015}"/>
+                <a16:creationId xmlns:a16="http://schemas.microsoft.com/office/drawing/2014/main" id="{DB1B58D5-60D5-4883-BC7F-7F4760869CE8}"/>
               </a:ext>
             </a:extLst>
           </p:cNvPr>
@@ -4878,7 +5049,7 @@
           <p:cNvPr id="7" name="nand-container">
             <a:extLst xmlns:a="http://schemas.openxmlformats.org/drawingml/2006/main">
               <a:ext uri="{FF2B5EF4-FFF2-40B4-BE49-F238E27FC236}">
-                <a16:creationId xmlns:a16="http://schemas.microsoft.com/office/drawing/2014/main" id="{80F83DB6-AF83-4B87-A96F-8F0847EEB6A6}"/>
+                <a16:creationId xmlns:a16="http://schemas.microsoft.com/office/drawing/2014/main" id="{F1DAAAD4-1F53-48EB-B157-5466C1B1D27D}"/>
               </a:ext>
             </a:extLst>
           </p:cNvPr>
@@ -4911,7 +5082,7 @@
           <p:cNvPr id="8" name="host-heading">
             <a:extLst xmlns:a="http://schemas.openxmlformats.org/drawingml/2006/main">
               <a:ext uri="{FF2B5EF4-FFF2-40B4-BE49-F238E27FC236}">
-                <a16:creationId xmlns:a16="http://schemas.microsoft.com/office/drawing/2014/main" id="{172F9B44-1528-436F-B89F-50A5D5BE58E9}"/>
+                <a16:creationId xmlns:a16="http://schemas.microsoft.com/office/drawing/2014/main" id="{9363D402-162A-48DF-8597-4CA501FE1F15}"/>
               </a:ext>
             </a:extLst>
           </p:cNvPr>
@@ -4979,7 +5150,7 @@
           <p:cNvPr id="9" name="host-ports-setting">
             <a:extLst xmlns:a="http://schemas.openxmlformats.org/drawingml/2006/main">
               <a:ext uri="{FF2B5EF4-FFF2-40B4-BE49-F238E27FC236}">
-                <a16:creationId xmlns:a16="http://schemas.microsoft.com/office/drawing/2014/main" id="{A439D93C-8FCF-4BFF-B083-3C024417857A}"/>
+                <a16:creationId xmlns:a16="http://schemas.microsoft.com/office/drawing/2014/main" id="{E7010A1C-4816-4286-BBC7-BD5D6FB43AF9}"/>
               </a:ext>
             </a:extLst>
           </p:cNvPr>
@@ -5070,7 +5241,7 @@
           <p:cNvPr id="10" name="host-port-0">
             <a:extLst xmlns:a="http://schemas.openxmlformats.org/drawingml/2006/main">
               <a:ext uri="{FF2B5EF4-FFF2-40B4-BE49-F238E27FC236}">
-                <a16:creationId xmlns:a16="http://schemas.microsoft.com/office/drawing/2014/main" id="{CD0EC547-D112-415E-93A4-AEAA6FE32A0F}"/>
+                <a16:creationId xmlns:a16="http://schemas.microsoft.com/office/drawing/2014/main" id="{B7416687-5271-4E12-AB07-C0521B00EB94}"/>
               </a:ext>
             </a:extLst>
           </p:cNvPr>
@@ -5103,7 +5274,7 @@
           <p:cNvPr id="11" name="host-port-label-0">
             <a:extLst xmlns:a="http://schemas.openxmlformats.org/drawingml/2006/main">
               <a:ext uri="{FF2B5EF4-FFF2-40B4-BE49-F238E27FC236}">
-                <a16:creationId xmlns:a16="http://schemas.microsoft.com/office/drawing/2014/main" id="{61400943-790E-4532-AC11-4F047C6B50ED}"/>
+                <a16:creationId xmlns:a16="http://schemas.microsoft.com/office/drawing/2014/main" id="{790A3B72-C0D6-4624-BC49-724EE2DAAEE0}"/>
               </a:ext>
             </a:extLst>
           </p:cNvPr>
@@ -5171,7 +5342,7 @@
           <p:cNvPr id="12" name="host-port-1">
             <a:extLst xmlns:a="http://schemas.openxmlformats.org/drawingml/2006/main">
               <a:ext uri="{FF2B5EF4-FFF2-40B4-BE49-F238E27FC236}">
-                <a16:creationId xmlns:a16="http://schemas.microsoft.com/office/drawing/2014/main" id="{A5CE71DD-E4E7-4B6C-A84D-55E711FBD651}"/>
+                <a16:creationId xmlns:a16="http://schemas.microsoft.com/office/drawing/2014/main" id="{A4C2F9BE-A2F6-4A66-8D6F-557C6374697B}"/>
               </a:ext>
             </a:extLst>
           </p:cNvPr>
@@ -5204,7 +5375,7 @@
           <p:cNvPr id="13" name="host-port-label-1">
             <a:extLst xmlns:a="http://schemas.openxmlformats.org/drawingml/2006/main">
               <a:ext uri="{FF2B5EF4-FFF2-40B4-BE49-F238E27FC236}">
-                <a16:creationId xmlns:a16="http://schemas.microsoft.com/office/drawing/2014/main" id="{94EB49AA-CAF4-42FC-9E35-4939BFBB53A8}"/>
+                <a16:creationId xmlns:a16="http://schemas.microsoft.com/office/drawing/2014/main" id="{B0AB2CC1-8C4B-4EB2-B66B-8D309BE518A8}"/>
               </a:ext>
             </a:extLst>
           </p:cNvPr>
@@ -5272,7 +5443,7 @@
           <p:cNvPr id="14" name="host-port-2">
             <a:extLst xmlns:a="http://schemas.openxmlformats.org/drawingml/2006/main">
               <a:ext uri="{FF2B5EF4-FFF2-40B4-BE49-F238E27FC236}">
-                <a16:creationId xmlns:a16="http://schemas.microsoft.com/office/drawing/2014/main" id="{34002547-40F9-47A9-8409-0DDDFD7DEE0D}"/>
+                <a16:creationId xmlns:a16="http://schemas.microsoft.com/office/drawing/2014/main" id="{50C4A938-7261-4809-A83A-F74E164C02FE}"/>
               </a:ext>
             </a:extLst>
           </p:cNvPr>
@@ -5305,7 +5476,7 @@
           <p:cNvPr id="15" name="host-port-label-2">
             <a:extLst xmlns:a="http://schemas.openxmlformats.org/drawingml/2006/main">
               <a:ext uri="{FF2B5EF4-FFF2-40B4-BE49-F238E27FC236}">
-                <a16:creationId xmlns:a16="http://schemas.microsoft.com/office/drawing/2014/main" id="{7BD7D0F6-238D-4403-8290-1249E1EDAA49}"/>
+                <a16:creationId xmlns:a16="http://schemas.microsoft.com/office/drawing/2014/main" id="{45E8A8AD-7AE7-44E4-90DB-08E459D5FBB6}"/>
               </a:ext>
             </a:extLst>
           </p:cNvPr>
@@ -5373,7 +5544,7 @@
           <p:cNvPr id="16" name="host-port-3">
             <a:extLst xmlns:a="http://schemas.openxmlformats.org/drawingml/2006/main">
               <a:ext uri="{FF2B5EF4-FFF2-40B4-BE49-F238E27FC236}">
-                <a16:creationId xmlns:a16="http://schemas.microsoft.com/office/drawing/2014/main" id="{846FB3AA-948F-42E8-AA45-DA4E1D6B36EA}"/>
+                <a16:creationId xmlns:a16="http://schemas.microsoft.com/office/drawing/2014/main" id="{2809C3BD-1D9E-4C39-8FD0-98F26197C827}"/>
               </a:ext>
             </a:extLst>
           </p:cNvPr>
@@ -5406,7 +5577,7 @@
           <p:cNvPr id="17" name="host-port-label-3">
             <a:extLst xmlns:a="http://schemas.openxmlformats.org/drawingml/2006/main">
               <a:ext uri="{FF2B5EF4-FFF2-40B4-BE49-F238E27FC236}">
-                <a16:creationId xmlns:a16="http://schemas.microsoft.com/office/drawing/2014/main" id="{413BF584-B497-492C-A1AB-A46F0A010130}"/>
+                <a16:creationId xmlns:a16="http://schemas.microsoft.com/office/drawing/2014/main" id="{E7F5BE57-1EC2-4D93-9E75-286B72733224}"/>
               </a:ext>
             </a:extLst>
           </p:cNvPr>
@@ -5474,7 +5645,7 @@
           <p:cNvPr id="18" name="host-workload">
             <a:extLst xmlns:a="http://schemas.openxmlformats.org/drawingml/2006/main">
               <a:ext uri="{FF2B5EF4-FFF2-40B4-BE49-F238E27FC236}">
-                <a16:creationId xmlns:a16="http://schemas.microsoft.com/office/drawing/2014/main" id="{B0A132C2-BE9E-4B54-9C0F-BE2F7F10A5E6}"/>
+                <a16:creationId xmlns:a16="http://schemas.microsoft.com/office/drawing/2014/main" id="{628A15B6-0D6E-4322-8585-181F339B04EB}"/>
               </a:ext>
             </a:extLst>
           </p:cNvPr>
@@ -5565,7 +5736,7 @@
           <p:cNvPr id="19" name="host-return-order">
             <a:extLst xmlns:a="http://schemas.openxmlformats.org/drawingml/2006/main">
               <a:ext uri="{FF2B5EF4-FFF2-40B4-BE49-F238E27FC236}">
-                <a16:creationId xmlns:a16="http://schemas.microsoft.com/office/drawing/2014/main" id="{41FBAE03-570A-4248-A0E0-EDAB85B06A8D}"/>
+                <a16:creationId xmlns:a16="http://schemas.microsoft.com/office/drawing/2014/main" id="{BD3A39F5-1EFC-408E-8806-E5BC57735843}"/>
               </a:ext>
             </a:extLst>
           </p:cNvPr>
@@ -5633,7 +5804,7 @@
           <p:cNvPr id="20" name="controller-heading">
             <a:extLst xmlns:a="http://schemas.openxmlformats.org/drawingml/2006/main">
               <a:ext uri="{FF2B5EF4-FFF2-40B4-BE49-F238E27FC236}">
-                <a16:creationId xmlns:a16="http://schemas.microsoft.com/office/drawing/2014/main" id="{22F8E2DE-7DD6-47B6-82B1-546526E6C4CE}"/>
+                <a16:creationId xmlns:a16="http://schemas.microsoft.com/office/drawing/2014/main" id="{BF975806-3E06-422D-A7D4-653A0BB962E3}"/>
               </a:ext>
             </a:extLst>
           </p:cNvPr>
@@ -5701,7 +5872,7 @@
           <p:cNvPr id="21" name="request-legend">
             <a:extLst xmlns:a="http://schemas.openxmlformats.org/drawingml/2006/main">
               <a:ext uri="{FF2B5EF4-FFF2-40B4-BE49-F238E27FC236}">
-                <a16:creationId xmlns:a16="http://schemas.microsoft.com/office/drawing/2014/main" id="{08866094-8EA5-444E-84B0-B23F0EABFC6E}"/>
+                <a16:creationId xmlns:a16="http://schemas.microsoft.com/office/drawing/2014/main" id="{865EDC78-C52E-4C4B-BC6E-785DEAB08B36}"/>
               </a:ext>
             </a:extLst>
           </p:cNvPr>
@@ -5769,7 +5940,7 @@
           <p:cNvPr id="22" name="data-legend">
             <a:extLst xmlns:a="http://schemas.openxmlformats.org/drawingml/2006/main">
               <a:ext uri="{FF2B5EF4-FFF2-40B4-BE49-F238E27FC236}">
-                <a16:creationId xmlns:a16="http://schemas.microsoft.com/office/drawing/2014/main" id="{199846C5-D347-4D75-8DEB-47D888D55F1B}"/>
+                <a16:creationId xmlns:a16="http://schemas.microsoft.com/office/drawing/2014/main" id="{08403599-BF8E-44C7-A2DD-517A77E6C7B0}"/>
               </a:ext>
             </a:extLst>
           </p:cNvPr>
@@ -5837,7 +6008,7 @@
           <p:cNvPr id="23" name="admission">
             <a:extLst xmlns:a="http://schemas.openxmlformats.org/drawingml/2006/main">
               <a:ext uri="{FF2B5EF4-FFF2-40B4-BE49-F238E27FC236}">
-                <a16:creationId xmlns:a16="http://schemas.microsoft.com/office/drawing/2014/main" id="{7A8E5303-3FE2-4D05-B5BE-02D03DE30956}"/>
+                <a16:creationId xmlns:a16="http://schemas.microsoft.com/office/drawing/2014/main" id="{D24E4E19-F20A-433B-A3C9-C15FF6E401A2}"/>
               </a:ext>
             </a:extLst>
           </p:cNvPr>
@@ -5870,7 +6041,7 @@
           <p:cNvPr id="24" name="l2p-mapping">
             <a:extLst xmlns:a="http://schemas.openxmlformats.org/drawingml/2006/main">
               <a:ext uri="{FF2B5EF4-FFF2-40B4-BE49-F238E27FC236}">
-                <a16:creationId xmlns:a16="http://schemas.microsoft.com/office/drawing/2014/main" id="{08543CCE-47EA-4985-8BF9-B072730586ED}"/>
+                <a16:creationId xmlns:a16="http://schemas.microsoft.com/office/drawing/2014/main" id="{55F3A4B2-DC47-4CAD-9B8D-98EF5F363123}"/>
               </a:ext>
             </a:extLst>
           </p:cNvPr>
@@ -5903,7 +6074,7 @@
           <p:cNvPr id="25" name="ca-scheduler">
             <a:extLst xmlns:a="http://schemas.openxmlformats.org/drawingml/2006/main">
               <a:ext uri="{FF2B5EF4-FFF2-40B4-BE49-F238E27FC236}">
-                <a16:creationId xmlns:a16="http://schemas.microsoft.com/office/drawing/2014/main" id="{1808A654-07A7-48A1-BCF2-2FFA23BE5842}"/>
+                <a16:creationId xmlns:a16="http://schemas.microsoft.com/office/drawing/2014/main" id="{583ABCBC-92D0-41BA-A413-7137CF36E5FF}"/>
               </a:ext>
             </a:extLst>
           </p:cNvPr>
@@ -5936,7 +6107,7 @@
           <p:cNvPr id="26" name="admission-heading">
             <a:extLst xmlns:a="http://schemas.openxmlformats.org/drawingml/2006/main">
               <a:ext uri="{FF2B5EF4-FFF2-40B4-BE49-F238E27FC236}">
-                <a16:creationId xmlns:a16="http://schemas.microsoft.com/office/drawing/2014/main" id="{85FC01E2-77F5-46EC-A968-039071E55E1C}"/>
+                <a16:creationId xmlns:a16="http://schemas.microsoft.com/office/drawing/2014/main" id="{B90A018F-D897-476A-BCA4-41C6E3A36D48}"/>
               </a:ext>
             </a:extLst>
           </p:cNvPr>
@@ -6004,7 +6175,7 @@
           <p:cNvPr id="27" name="admission-parameters">
             <a:extLst xmlns:a="http://schemas.openxmlformats.org/drawingml/2006/main">
               <a:ext uri="{FF2B5EF4-FFF2-40B4-BE49-F238E27FC236}">
-                <a16:creationId xmlns:a16="http://schemas.microsoft.com/office/drawing/2014/main" id="{F7326913-19B8-4952-9593-882059BEB68B}"/>
+                <a16:creationId xmlns:a16="http://schemas.microsoft.com/office/drawing/2014/main" id="{D75C412A-F1BF-4F01-8863-49839813D53C}"/>
               </a:ext>
             </a:extLst>
           </p:cNvPr>
@@ -6095,7 +6266,7 @@
           <p:cNvPr id="28" name="mapping-heading">
             <a:extLst xmlns:a="http://schemas.openxmlformats.org/drawingml/2006/main">
               <a:ext uri="{FF2B5EF4-FFF2-40B4-BE49-F238E27FC236}">
-                <a16:creationId xmlns:a16="http://schemas.microsoft.com/office/drawing/2014/main" id="{0245B864-5225-486E-A095-2549FC1F6F7C}"/>
+                <a16:creationId xmlns:a16="http://schemas.microsoft.com/office/drawing/2014/main" id="{9762D0F8-57AB-4492-9B5A-36647F12A49C}"/>
               </a:ext>
             </a:extLst>
           </p:cNvPr>
@@ -6163,7 +6334,7 @@
           <p:cNvPr id="29" name="mapping-parameters">
             <a:extLst xmlns:a="http://schemas.openxmlformats.org/drawingml/2006/main">
               <a:ext uri="{FF2B5EF4-FFF2-40B4-BE49-F238E27FC236}">
-                <a16:creationId xmlns:a16="http://schemas.microsoft.com/office/drawing/2014/main" id="{E4142E42-39E1-4E0C-B095-B4ED090E2120}"/>
+                <a16:creationId xmlns:a16="http://schemas.microsoft.com/office/drawing/2014/main" id="{99E08D20-D352-4FB4-BCBA-1B0D98DBEEB5}"/>
               </a:ext>
             </a:extLst>
           </p:cNvPr>
@@ -6254,7 +6425,7 @@
           <p:cNvPr id="30" name="ca-heading">
             <a:extLst xmlns:a="http://schemas.openxmlformats.org/drawingml/2006/main">
               <a:ext uri="{FF2B5EF4-FFF2-40B4-BE49-F238E27FC236}">
-                <a16:creationId xmlns:a16="http://schemas.microsoft.com/office/drawing/2014/main" id="{0339C053-EC02-4CA2-A70D-38DB52649DD0}"/>
+                <a16:creationId xmlns:a16="http://schemas.microsoft.com/office/drawing/2014/main" id="{D0B9C019-C263-4A7D-9E61-529B14A14C52}"/>
               </a:ext>
             </a:extLst>
           </p:cNvPr>
@@ -6322,7 +6493,7 @@
           <p:cNvPr id="31" name="ca-parameters">
             <a:extLst xmlns:a="http://schemas.openxmlformats.org/drawingml/2006/main">
               <a:ext uri="{FF2B5EF4-FFF2-40B4-BE49-F238E27FC236}">
-                <a16:creationId xmlns:a16="http://schemas.microsoft.com/office/drawing/2014/main" id="{2BAC5CB1-32BE-4298-A23C-344629B1A24B}"/>
+                <a16:creationId xmlns:a16="http://schemas.microsoft.com/office/drawing/2014/main" id="{DC979835-C742-4E69-A63C-FBAD850EB3FB}"/>
               </a:ext>
             </a:extLst>
           </p:cNvPr>
@@ -6413,7 +6584,7 @@
           <p:cNvPr id="32" name="current-ca-policy">
             <a:extLst xmlns:a="http://schemas.openxmlformats.org/drawingml/2006/main">
               <a:ext uri="{FF2B5EF4-FFF2-40B4-BE49-F238E27FC236}">
-                <a16:creationId xmlns:a16="http://schemas.microsoft.com/office/drawing/2014/main" id="{E8C31D55-772C-4465-B363-EF50A97EA510}"/>
+                <a16:creationId xmlns:a16="http://schemas.microsoft.com/office/drawing/2014/main" id="{84E30CB4-C0B9-4F49-B8DC-2719BA73849A}"/>
               </a:ext>
             </a:extLst>
           </p:cNvPr>
@@ -6481,7 +6652,7 @@
           <p:cNvPr id="33" name="current-ca-parameters">
             <a:extLst xmlns:a="http://schemas.openxmlformats.org/drawingml/2006/main">
               <a:ext uri="{FF2B5EF4-FFF2-40B4-BE49-F238E27FC236}">
-                <a16:creationId xmlns:a16="http://schemas.microsoft.com/office/drawing/2014/main" id="{A7D7A5B5-9115-44D6-B48D-72B5645AD28C}"/>
+                <a16:creationId xmlns:a16="http://schemas.microsoft.com/office/drawing/2014/main" id="{BFC42FF8-8CBA-4834-90E9-5718E88ED793}"/>
               </a:ext>
             </a:extLst>
           </p:cNvPr>
@@ -6549,7 +6720,7 @@
           <p:cNvPr id="34" name="shared-controller-buffer">
             <a:extLst xmlns:a="http://schemas.openxmlformats.org/drawingml/2006/main">
               <a:ext uri="{FF2B5EF4-FFF2-40B4-BE49-F238E27FC236}">
-                <a16:creationId xmlns:a16="http://schemas.microsoft.com/office/drawing/2014/main" id="{AC2C89F5-1817-458A-AA26-31215A213491}"/>
+                <a16:creationId xmlns:a16="http://schemas.microsoft.com/office/drawing/2014/main" id="{57837C42-BF42-41D0-A07A-64CF54BF7AA0}"/>
               </a:ext>
             </a:extLst>
           </p:cNvPr>
@@ -6582,7 +6753,7 @@
           <p:cNvPr id="35" name="buffer-heading">
             <a:extLst xmlns:a="http://schemas.openxmlformats.org/drawingml/2006/main">
               <a:ext uri="{FF2B5EF4-FFF2-40B4-BE49-F238E27FC236}">
-                <a16:creationId xmlns:a16="http://schemas.microsoft.com/office/drawing/2014/main" id="{FD8852DD-F009-4B78-B111-82A75C2DC7E1}"/>
+                <a16:creationId xmlns:a16="http://schemas.microsoft.com/office/drawing/2014/main" id="{91816855-8663-40AD-A8CA-E8CDA10DCD98}"/>
               </a:ext>
             </a:extLst>
           </p:cNvPr>
@@ -6650,7 +6821,7 @@
           <p:cNvPr id="36" name="buffer-parameters">
             <a:extLst xmlns:a="http://schemas.openxmlformats.org/drawingml/2006/main">
               <a:ext uri="{FF2B5EF4-FFF2-40B4-BE49-F238E27FC236}">
-                <a16:creationId xmlns:a16="http://schemas.microsoft.com/office/drawing/2014/main" id="{EE64C6BE-9624-4369-B004-BAE1036AA885}"/>
+                <a16:creationId xmlns:a16="http://schemas.microsoft.com/office/drawing/2014/main" id="{35851713-0BA8-4712-BBAB-11C02604FB9C}"/>
               </a:ext>
             </a:extLst>
           </p:cNvPr>
@@ -6718,7 +6889,7 @@
           <p:cNvPr id="37" name="ecc">
             <a:extLst xmlns:a="http://schemas.openxmlformats.org/drawingml/2006/main">
               <a:ext uri="{FF2B5EF4-FFF2-40B4-BE49-F238E27FC236}">
-                <a16:creationId xmlns:a16="http://schemas.microsoft.com/office/drawing/2014/main" id="{4154891C-E7EA-4D8D-9ECB-99BC1F53BB7A}"/>
+                <a16:creationId xmlns:a16="http://schemas.microsoft.com/office/drawing/2014/main" id="{AD4E4CB3-27B7-4167-8DFC-490CA2E55F21}"/>
               </a:ext>
             </a:extLst>
           </p:cNvPr>
@@ -6751,7 +6922,7 @@
           <p:cNvPr id="38" name="ecc-label">
             <a:extLst xmlns:a="http://schemas.openxmlformats.org/drawingml/2006/main">
               <a:ext uri="{FF2B5EF4-FFF2-40B4-BE49-F238E27FC236}">
-                <a16:creationId xmlns:a16="http://schemas.microsoft.com/office/drawing/2014/main" id="{A376B9E9-5BAE-43D5-AD2F-4E3A6203EB7F}"/>
+                <a16:creationId xmlns:a16="http://schemas.microsoft.com/office/drawing/2014/main" id="{24D5911C-3CB2-4946-A42E-69AE562D9BBC}"/>
               </a:ext>
             </a:extLst>
           </p:cNvPr>
@@ -6819,7 +6990,7 @@
           <p:cNvPr id="39" name="nand-heading">
             <a:extLst xmlns:a="http://schemas.openxmlformats.org/drawingml/2006/main">
               <a:ext uri="{FF2B5EF4-FFF2-40B4-BE49-F238E27FC236}">
-                <a16:creationId xmlns:a16="http://schemas.microsoft.com/office/drawing/2014/main" id="{041E65C2-2A74-4D44-85F7-CF6D6EE360AA}"/>
+                <a16:creationId xmlns:a16="http://schemas.microsoft.com/office/drawing/2014/main" id="{63D88EBA-ABA1-4B8B-B4CD-2462EA1A8A62}"/>
               </a:ext>
             </a:extLst>
           </p:cNvPr>
@@ -6887,7 +7058,7 @@
           <p:cNvPr id="40" name="plane-setting">
             <a:extLst xmlns:a="http://schemas.openxmlformats.org/drawingml/2006/main">
               <a:ext uri="{FF2B5EF4-FFF2-40B4-BE49-F238E27FC236}">
-                <a16:creationId xmlns:a16="http://schemas.microsoft.com/office/drawing/2014/main" id="{98A20F6A-E7D9-4984-BC88-AF7B649EF4FB}"/>
+                <a16:creationId xmlns:a16="http://schemas.microsoft.com/office/drawing/2014/main" id="{A258ABDD-A7CE-4031-9465-BB0010BBE5DF}"/>
               </a:ext>
             </a:extLst>
           </p:cNvPr>
@@ -6955,7 +7126,7 @@
           <p:cNvPr id="41" name="channel-0">
             <a:extLst xmlns:a="http://schemas.openxmlformats.org/drawingml/2006/main">
               <a:ext uri="{FF2B5EF4-FFF2-40B4-BE49-F238E27FC236}">
-                <a16:creationId xmlns:a16="http://schemas.microsoft.com/office/drawing/2014/main" id="{2128A15A-D0AD-45BB-8506-AB5EDE01EC99}"/>
+                <a16:creationId xmlns:a16="http://schemas.microsoft.com/office/drawing/2014/main" id="{7D7A6B9F-FC9C-4BB1-8246-C6083AEFF301}"/>
               </a:ext>
             </a:extLst>
           </p:cNvPr>
@@ -6988,7 +7159,7 @@
           <p:cNvPr id="42" name="channel-label-bg-0">
             <a:extLst xmlns:a="http://schemas.openxmlformats.org/drawingml/2006/main">
               <a:ext uri="{FF2B5EF4-FFF2-40B4-BE49-F238E27FC236}">
-                <a16:creationId xmlns:a16="http://schemas.microsoft.com/office/drawing/2014/main" id="{8CFB26E6-C738-4757-8B1B-50DECE41A7E4}"/>
+                <a16:creationId xmlns:a16="http://schemas.microsoft.com/office/drawing/2014/main" id="{61BA05E6-9D3C-4215-B70F-6C316310394A}"/>
               </a:ext>
             </a:extLst>
           </p:cNvPr>
@@ -7021,7 +7192,7 @@
           <p:cNvPr id="43" name="channel-label-0">
             <a:extLst xmlns:a="http://schemas.openxmlformats.org/drawingml/2006/main">
               <a:ext uri="{FF2B5EF4-FFF2-40B4-BE49-F238E27FC236}">
-                <a16:creationId xmlns:a16="http://schemas.microsoft.com/office/drawing/2014/main" id="{A93A83CB-DED3-415D-B996-5B5549D0BA4C}"/>
+                <a16:creationId xmlns:a16="http://schemas.microsoft.com/office/drawing/2014/main" id="{8457E234-EF91-4430-BF10-46069584B443}"/>
               </a:ext>
             </a:extLst>
           </p:cNvPr>
@@ -7089,7 +7260,7 @@
           <p:cNvPr id="44" name="plane-array-0">
             <a:extLst xmlns:a="http://schemas.openxmlformats.org/drawingml/2006/main">
               <a:ext uri="{FF2B5EF4-FFF2-40B4-BE49-F238E27FC236}">
-                <a16:creationId xmlns:a16="http://schemas.microsoft.com/office/drawing/2014/main" id="{ACA06A9D-17B4-4DFF-B813-95F8B6F4D155}"/>
+                <a16:creationId xmlns:a16="http://schemas.microsoft.com/office/drawing/2014/main" id="{BE85B62B-2779-462D-86C5-D156B35CD17D}"/>
               </a:ext>
             </a:extLst>
           </p:cNvPr>
@@ -7157,7 +7328,7 @@
           <p:cNvPr id="45" name="channel-1">
             <a:extLst xmlns:a="http://schemas.openxmlformats.org/drawingml/2006/main">
               <a:ext uri="{FF2B5EF4-FFF2-40B4-BE49-F238E27FC236}">
-                <a16:creationId xmlns:a16="http://schemas.microsoft.com/office/drawing/2014/main" id="{23C1730C-CCEE-4888-A474-B553B517E84A}"/>
+                <a16:creationId xmlns:a16="http://schemas.microsoft.com/office/drawing/2014/main" id="{F9D01E51-AD98-4EFA-93D4-2C1EC3005BBE}"/>
               </a:ext>
             </a:extLst>
           </p:cNvPr>
@@ -7190,7 +7361,7 @@
           <p:cNvPr id="46" name="channel-label-bg-1">
             <a:extLst xmlns:a="http://schemas.openxmlformats.org/drawingml/2006/main">
               <a:ext uri="{FF2B5EF4-FFF2-40B4-BE49-F238E27FC236}">
-                <a16:creationId xmlns:a16="http://schemas.microsoft.com/office/drawing/2014/main" id="{56C282F8-8616-47EF-9E7F-9B970B287699}"/>
+                <a16:creationId xmlns:a16="http://schemas.microsoft.com/office/drawing/2014/main" id="{DC99A1E0-B770-4C8A-9A22-B9A3633B16EF}"/>
               </a:ext>
             </a:extLst>
           </p:cNvPr>
@@ -7223,7 +7394,7 @@
           <p:cNvPr id="47" name="channel-label-1">
             <a:extLst xmlns:a="http://schemas.openxmlformats.org/drawingml/2006/main">
               <a:ext uri="{FF2B5EF4-FFF2-40B4-BE49-F238E27FC236}">
-                <a16:creationId xmlns:a16="http://schemas.microsoft.com/office/drawing/2014/main" id="{5306845F-8548-4530-B172-6DF2440ECF2A}"/>
+                <a16:creationId xmlns:a16="http://schemas.microsoft.com/office/drawing/2014/main" id="{F5DA36E8-B82A-4C89-8445-BCEBA4040675}"/>
               </a:ext>
             </a:extLst>
           </p:cNvPr>
@@ -7291,7 +7462,7 @@
           <p:cNvPr id="48" name="plane-array-1">
             <a:extLst xmlns:a="http://schemas.openxmlformats.org/drawingml/2006/main">
               <a:ext uri="{FF2B5EF4-FFF2-40B4-BE49-F238E27FC236}">
-                <a16:creationId xmlns:a16="http://schemas.microsoft.com/office/drawing/2014/main" id="{25C312A5-5248-4273-83FE-D10D44FAD6FA}"/>
+                <a16:creationId xmlns:a16="http://schemas.microsoft.com/office/drawing/2014/main" id="{DA6B69E5-76D4-437E-B0E4-EA794CDF3BB7}"/>
               </a:ext>
             </a:extLst>
           </p:cNvPr>
@@ -7359,7 +7530,7 @@
           <p:cNvPr id="49" name="channel-2">
             <a:extLst xmlns:a="http://schemas.openxmlformats.org/drawingml/2006/main">
               <a:ext uri="{FF2B5EF4-FFF2-40B4-BE49-F238E27FC236}">
-                <a16:creationId xmlns:a16="http://schemas.microsoft.com/office/drawing/2014/main" id="{2301CFB4-0333-42CC-ACD9-951E151EAE7C}"/>
+                <a16:creationId xmlns:a16="http://schemas.microsoft.com/office/drawing/2014/main" id="{57B6A76E-1E48-42F2-A2A2-BE4B3B64B789}"/>
               </a:ext>
             </a:extLst>
           </p:cNvPr>
@@ -7392,7 +7563,7 @@
           <p:cNvPr id="50" name="channel-label-bg-2">
             <a:extLst xmlns:a="http://schemas.openxmlformats.org/drawingml/2006/main">
               <a:ext uri="{FF2B5EF4-FFF2-40B4-BE49-F238E27FC236}">
-                <a16:creationId xmlns:a16="http://schemas.microsoft.com/office/drawing/2014/main" id="{D0021518-9106-4252-B2D4-27EDDCB5C43D}"/>
+                <a16:creationId xmlns:a16="http://schemas.microsoft.com/office/drawing/2014/main" id="{05567DD9-1C58-4B92-9F31-3E733219EA2E}"/>
               </a:ext>
             </a:extLst>
           </p:cNvPr>
@@ -7425,7 +7596,7 @@
           <p:cNvPr id="51" name="channel-label-2">
             <a:extLst xmlns:a="http://schemas.openxmlformats.org/drawingml/2006/main">
               <a:ext uri="{FF2B5EF4-FFF2-40B4-BE49-F238E27FC236}">
-                <a16:creationId xmlns:a16="http://schemas.microsoft.com/office/drawing/2014/main" id="{5A149129-92A4-4DB7-90CF-004B6EA270D6}"/>
+                <a16:creationId xmlns:a16="http://schemas.microsoft.com/office/drawing/2014/main" id="{7B676752-4C60-41AB-A720-841E2660CFA9}"/>
               </a:ext>
             </a:extLst>
           </p:cNvPr>
@@ -7493,7 +7664,7 @@
           <p:cNvPr id="52" name="plane-array-2">
             <a:extLst xmlns:a="http://schemas.openxmlformats.org/drawingml/2006/main">
               <a:ext uri="{FF2B5EF4-FFF2-40B4-BE49-F238E27FC236}">
-                <a16:creationId xmlns:a16="http://schemas.microsoft.com/office/drawing/2014/main" id="{D911F4AF-7959-43B0-8328-740FAF341A86}"/>
+                <a16:creationId xmlns:a16="http://schemas.microsoft.com/office/drawing/2014/main" id="{D0336527-DEA5-479B-82CD-BD0F0E21424E}"/>
               </a:ext>
             </a:extLst>
           </p:cNvPr>
@@ -7561,7 +7732,7 @@
           <p:cNvPr id="53" name="channel-3">
             <a:extLst xmlns:a="http://schemas.openxmlformats.org/drawingml/2006/main">
               <a:ext uri="{FF2B5EF4-FFF2-40B4-BE49-F238E27FC236}">
-                <a16:creationId xmlns:a16="http://schemas.microsoft.com/office/drawing/2014/main" id="{21F43DAF-B3B6-43B2-B41B-49D76E514EF2}"/>
+                <a16:creationId xmlns:a16="http://schemas.microsoft.com/office/drawing/2014/main" id="{1DBD6323-F5FC-483C-BB2E-2F82FD1824B0}"/>
               </a:ext>
             </a:extLst>
           </p:cNvPr>
@@ -7594,7 +7765,7 @@
           <p:cNvPr id="54" name="channel-label-bg-3">
             <a:extLst xmlns:a="http://schemas.openxmlformats.org/drawingml/2006/main">
               <a:ext uri="{FF2B5EF4-FFF2-40B4-BE49-F238E27FC236}">
-                <a16:creationId xmlns:a16="http://schemas.microsoft.com/office/drawing/2014/main" id="{C1031FAE-9C25-40B2-BFCA-A774F13467C0}"/>
+                <a16:creationId xmlns:a16="http://schemas.microsoft.com/office/drawing/2014/main" id="{BC74AE87-4A3A-4798-81FC-06603B432107}"/>
               </a:ext>
             </a:extLst>
           </p:cNvPr>
@@ -7627,7 +7798,7 @@
           <p:cNvPr id="55" name="channel-label-3">
             <a:extLst xmlns:a="http://schemas.openxmlformats.org/drawingml/2006/main">
               <a:ext uri="{FF2B5EF4-FFF2-40B4-BE49-F238E27FC236}">
-                <a16:creationId xmlns:a16="http://schemas.microsoft.com/office/drawing/2014/main" id="{75B0ED5B-7121-44A8-BDA4-354201BB6421}"/>
+                <a16:creationId xmlns:a16="http://schemas.microsoft.com/office/drawing/2014/main" id="{DA2DB5D1-1046-4E92-A783-1C3E63C681DD}"/>
               </a:ext>
             </a:extLst>
           </p:cNvPr>
@@ -7695,7 +7866,7 @@
           <p:cNvPr id="56" name="plane-array-3">
             <a:extLst xmlns:a="http://schemas.openxmlformats.org/drawingml/2006/main">
               <a:ext uri="{FF2B5EF4-FFF2-40B4-BE49-F238E27FC236}">
-                <a16:creationId xmlns:a16="http://schemas.microsoft.com/office/drawing/2014/main" id="{A622739F-AE91-4C68-A2AA-B41B785E85A4}"/>
+                <a16:creationId xmlns:a16="http://schemas.microsoft.com/office/drawing/2014/main" id="{F7E914A3-ABEA-4BB0-A765-BF5AC53FF5C2}"/>
               </a:ext>
             </a:extLst>
           </p:cNvPr>
@@ -7763,7 +7934,7 @@
           <p:cNvPr id="57" name="nand-output-unit">
             <a:extLst xmlns:a="http://schemas.openxmlformats.org/drawingml/2006/main">
               <a:ext uri="{FF2B5EF4-FFF2-40B4-BE49-F238E27FC236}">
-                <a16:creationId xmlns:a16="http://schemas.microsoft.com/office/drawing/2014/main" id="{681A7588-8297-47CB-A143-0327BBB8002C}"/>
+                <a16:creationId xmlns:a16="http://schemas.microsoft.com/office/drawing/2014/main" id="{4494B652-2A13-4C24-996A-E4BA56844694}"/>
               </a:ext>
             </a:extLst>
           </p:cNvPr>
@@ -7831,7 +8002,7 @@
           <p:cNvPr id="58" name="host-request">
             <a:extLst xmlns:a="http://schemas.openxmlformats.org/drawingml/2006/main">
               <a:ext uri="{FF2B5EF4-FFF2-40B4-BE49-F238E27FC236}">
-                <a16:creationId xmlns:a16="http://schemas.microsoft.com/office/drawing/2014/main" id="{B8D82409-DA80-41A1-AC67-682021E13003}"/>
+                <a16:creationId xmlns:a16="http://schemas.microsoft.com/office/drawing/2014/main" id="{9A7C7EF7-8608-4D48-AFD8-242B84C86D80}"/>
               </a:ext>
             </a:extLst>
           </p:cNvPr>
@@ -7860,7 +8031,7 @@
           <p:cNvPr id="59" name="request-to-mapping">
             <a:extLst xmlns:a="http://schemas.openxmlformats.org/drawingml/2006/main">
               <a:ext uri="{FF2B5EF4-FFF2-40B4-BE49-F238E27FC236}">
-                <a16:creationId xmlns:a16="http://schemas.microsoft.com/office/drawing/2014/main" id="{41D1D99D-BD31-4D06-B98A-BBC9CA78F794}"/>
+                <a16:creationId xmlns:a16="http://schemas.microsoft.com/office/drawing/2014/main" id="{34D8AE39-1B9B-43C3-A980-741AAAF65179}"/>
               </a:ext>
             </a:extLst>
           </p:cNvPr>
@@ -7889,7 +8060,7 @@
           <p:cNvPr id="60" name="request-to-scheduler">
             <a:extLst xmlns:a="http://schemas.openxmlformats.org/drawingml/2006/main">
               <a:ext uri="{FF2B5EF4-FFF2-40B4-BE49-F238E27FC236}">
-                <a16:creationId xmlns:a16="http://schemas.microsoft.com/office/drawing/2014/main" id="{678CE037-3EB2-4F1B-B6D9-65A938090276}"/>
+                <a16:creationId xmlns:a16="http://schemas.microsoft.com/office/drawing/2014/main" id="{17DB2E99-CEBF-4AAE-BE20-6D26B27BA6E0}"/>
               </a:ext>
             </a:extLst>
           </p:cNvPr>
@@ -7918,7 +8089,7 @@
           <p:cNvPr id="61" name="ca-to-shared-channel-bus">
             <a:extLst xmlns:a="http://schemas.openxmlformats.org/drawingml/2006/main">
               <a:ext uri="{FF2B5EF4-FFF2-40B4-BE49-F238E27FC236}">
-                <a16:creationId xmlns:a16="http://schemas.microsoft.com/office/drawing/2014/main" id="{544D60D5-E628-4B66-B329-BE4A4C3445FD}"/>
+                <a16:creationId xmlns:a16="http://schemas.microsoft.com/office/drawing/2014/main" id="{91ED767B-FC03-4D17-9DED-798D07D3508E}"/>
               </a:ext>
             </a:extLst>
           </p:cNvPr>
@@ -7946,7 +8117,7 @@
           <p:cNvPr id="62" name="shared-ca-bus">
             <a:extLst xmlns:a="http://schemas.openxmlformats.org/drawingml/2006/main">
               <a:ext uri="{FF2B5EF4-FFF2-40B4-BE49-F238E27FC236}">
-                <a16:creationId xmlns:a16="http://schemas.microsoft.com/office/drawing/2014/main" id="{A2B22BB7-9DFA-47B3-A996-FDD50B410C05}"/>
+                <a16:creationId xmlns:a16="http://schemas.microsoft.com/office/drawing/2014/main" id="{85311CBB-6E1D-4400-B675-A1C0E00DDA8C}"/>
               </a:ext>
             </a:extLst>
           </p:cNvPr>
@@ -7974,7 +8145,7 @@
           <p:cNvPr id="63" name="ca-to-channel-0">
             <a:extLst xmlns:a="http://schemas.openxmlformats.org/drawingml/2006/main">
               <a:ext uri="{FF2B5EF4-FFF2-40B4-BE49-F238E27FC236}">
-                <a16:creationId xmlns:a16="http://schemas.microsoft.com/office/drawing/2014/main" id="{E0B185B1-68FC-46B4-B5EB-7F1108D7588B}"/>
+                <a16:creationId xmlns:a16="http://schemas.microsoft.com/office/drawing/2014/main" id="{0F62637D-1F9B-48D9-BE5A-A783BABE8EDE}"/>
               </a:ext>
             </a:extLst>
           </p:cNvPr>
@@ -8003,7 +8174,7 @@
           <p:cNvPr id="64" name="ca-to-channel-1">
             <a:extLst xmlns:a="http://schemas.openxmlformats.org/drawingml/2006/main">
               <a:ext uri="{FF2B5EF4-FFF2-40B4-BE49-F238E27FC236}">
-                <a16:creationId xmlns:a16="http://schemas.microsoft.com/office/drawing/2014/main" id="{5BB3EF3E-1B96-454A-A9B8-D4327B45E797}"/>
+                <a16:creationId xmlns:a16="http://schemas.microsoft.com/office/drawing/2014/main" id="{41281273-92C4-45C4-AEB3-CE0DEF7F7190}"/>
               </a:ext>
             </a:extLst>
           </p:cNvPr>
@@ -8032,7 +8203,7 @@
           <p:cNvPr id="65" name="ca-to-channel-2">
             <a:extLst xmlns:a="http://schemas.openxmlformats.org/drawingml/2006/main">
               <a:ext uri="{FF2B5EF4-FFF2-40B4-BE49-F238E27FC236}">
-                <a16:creationId xmlns:a16="http://schemas.microsoft.com/office/drawing/2014/main" id="{367E6A2C-30CE-444A-B783-3BB5072E8F5E}"/>
+                <a16:creationId xmlns:a16="http://schemas.microsoft.com/office/drawing/2014/main" id="{D8B88EC9-507D-4279-9B3D-34D206F07179}"/>
               </a:ext>
             </a:extLst>
           </p:cNvPr>
@@ -8061,7 +8232,7 @@
           <p:cNvPr id="66" name="ca-to-channel-3">
             <a:extLst xmlns:a="http://schemas.openxmlformats.org/drawingml/2006/main">
               <a:ext uri="{FF2B5EF4-FFF2-40B4-BE49-F238E27FC236}">
-                <a16:creationId xmlns:a16="http://schemas.microsoft.com/office/drawing/2014/main" id="{235F5B14-CBD4-41CD-96B8-9FE9C1C8A49F}"/>
+                <a16:creationId xmlns:a16="http://schemas.microsoft.com/office/drawing/2014/main" id="{DF475098-ACE1-4581-8917-150F888CE9F0}"/>
               </a:ext>
             </a:extLst>
           </p:cNvPr>
@@ -8090,7 +8261,7 @@
           <p:cNvPr id="67" name="channel-data-0">
             <a:extLst xmlns:a="http://schemas.openxmlformats.org/drawingml/2006/main">
               <a:ext uri="{FF2B5EF4-FFF2-40B4-BE49-F238E27FC236}">
-                <a16:creationId xmlns:a16="http://schemas.microsoft.com/office/drawing/2014/main" id="{CE825540-491F-4697-994F-C5CF6C3D77C8}"/>
+                <a16:creationId xmlns:a16="http://schemas.microsoft.com/office/drawing/2014/main" id="{61866CFF-A8A7-46B7-B366-3F2EC4035F36}"/>
               </a:ext>
             </a:extLst>
           </p:cNvPr>
@@ -8118,7 +8289,7 @@
           <p:cNvPr id="68" name="channel-data-1">
             <a:extLst xmlns:a="http://schemas.openxmlformats.org/drawingml/2006/main">
               <a:ext uri="{FF2B5EF4-FFF2-40B4-BE49-F238E27FC236}">
-                <a16:creationId xmlns:a16="http://schemas.microsoft.com/office/drawing/2014/main" id="{A9BEF4C8-D712-4F3A-B403-26AB58F93AF0}"/>
+                <a16:creationId xmlns:a16="http://schemas.microsoft.com/office/drawing/2014/main" id="{E6AC5DE5-432B-4374-8A71-39D1805EC769}"/>
               </a:ext>
             </a:extLst>
           </p:cNvPr>
@@ -8146,7 +8317,7 @@
           <p:cNvPr id="69" name="channel-data-2">
             <a:extLst xmlns:a="http://schemas.openxmlformats.org/drawingml/2006/main">
               <a:ext uri="{FF2B5EF4-FFF2-40B4-BE49-F238E27FC236}">
-                <a16:creationId xmlns:a16="http://schemas.microsoft.com/office/drawing/2014/main" id="{2F626745-E289-42FA-A823-D005B3E3A180}"/>
+                <a16:creationId xmlns:a16="http://schemas.microsoft.com/office/drawing/2014/main" id="{A97CD490-2692-46F3-A3E1-D9E1D4E1510D}"/>
               </a:ext>
             </a:extLst>
           </p:cNvPr>
@@ -8174,7 +8345,7 @@
           <p:cNvPr id="70" name="channel-data-3">
             <a:extLst xmlns:a="http://schemas.openxmlformats.org/drawingml/2006/main">
               <a:ext uri="{FF2B5EF4-FFF2-40B4-BE49-F238E27FC236}">
-                <a16:creationId xmlns:a16="http://schemas.microsoft.com/office/drawing/2014/main" id="{0671FDE5-E3E5-46B4-8D0D-33FD8A48292B}"/>
+                <a16:creationId xmlns:a16="http://schemas.microsoft.com/office/drawing/2014/main" id="{B2ADF3B3-24DA-4042-A453-34E25335FB8B}"/>
               </a:ext>
             </a:extLst>
           </p:cNvPr>
@@ -8202,7 +8373,7 @@
           <p:cNvPr id="71" name="shared-data-bus">
             <a:extLst xmlns:a="http://schemas.openxmlformats.org/drawingml/2006/main">
               <a:ext uri="{FF2B5EF4-FFF2-40B4-BE49-F238E27FC236}">
-                <a16:creationId xmlns:a16="http://schemas.microsoft.com/office/drawing/2014/main" id="{BBA84AC4-D16F-443A-979F-78C61556CB82}"/>
+                <a16:creationId xmlns:a16="http://schemas.microsoft.com/office/drawing/2014/main" id="{AAA686F7-DE03-4620-B416-2A7CDB992C56}"/>
               </a:ext>
             </a:extLst>
           </p:cNvPr>
@@ -8230,7 +8401,7 @@
           <p:cNvPr id="72" name="nand-data-to-ecc">
             <a:extLst xmlns:a="http://schemas.openxmlformats.org/drawingml/2006/main">
               <a:ext uri="{FF2B5EF4-FFF2-40B4-BE49-F238E27FC236}">
-                <a16:creationId xmlns:a16="http://schemas.microsoft.com/office/drawing/2014/main" id="{7FBFCE38-83A0-463D-AF12-4CF3E4D093B3}"/>
+                <a16:creationId xmlns:a16="http://schemas.microsoft.com/office/drawing/2014/main" id="{A2ECED16-59B6-4FAF-AE5B-98C34F5EDB12}"/>
               </a:ext>
             </a:extLst>
           </p:cNvPr>
@@ -8259,7 +8430,7 @@
           <p:cNvPr id="73" name="ecc-to-buffer">
             <a:extLst xmlns:a="http://schemas.openxmlformats.org/drawingml/2006/main">
               <a:ext uri="{FF2B5EF4-FFF2-40B4-BE49-F238E27FC236}">
-                <a16:creationId xmlns:a16="http://schemas.microsoft.com/office/drawing/2014/main" id="{06E141A8-F0AC-4007-B526-8AF250133AA8}"/>
+                <a16:creationId xmlns:a16="http://schemas.microsoft.com/office/drawing/2014/main" id="{E15DCA19-F331-4345-981B-47D925BFE439}"/>
               </a:ext>
             </a:extLst>
           </p:cNvPr>
@@ -8288,7 +8459,7 @@
           <p:cNvPr id="74" name="buffer-to-host">
             <a:extLst xmlns:a="http://schemas.openxmlformats.org/drawingml/2006/main">
               <a:ext uri="{FF2B5EF4-FFF2-40B4-BE49-F238E27FC236}">
-                <a16:creationId xmlns:a16="http://schemas.microsoft.com/office/drawing/2014/main" id="{45545210-B78D-4DC1-B6A7-D3E226683951}"/>
+                <a16:creationId xmlns:a16="http://schemas.microsoft.com/office/drawing/2014/main" id="{38377C50-F8A9-422E-85CF-30EC51A76098}"/>
               </a:ext>
             </a:extLst>
           </p:cNvPr>
@@ -8317,7 +8488,7 @@
           <p:cNvPr id="75" name="all-to-all">
             <a:extLst xmlns:a="http://schemas.openxmlformats.org/drawingml/2006/main">
               <a:ext uri="{FF2B5EF4-FFF2-40B4-BE49-F238E27FC236}">
-                <a16:creationId xmlns:a16="http://schemas.microsoft.com/office/drawing/2014/main" id="{A21F3871-935E-404F-8478-C0A0338F8345}"/>
+                <a16:creationId xmlns:a16="http://schemas.microsoft.com/office/drawing/2014/main" id="{E668405B-41FB-489A-9C95-2BF44F1E3774}"/>
               </a:ext>
             </a:extLst>
           </p:cNvPr>
@@ -8385,7 +8556,7 @@
           <p:cNvPr id="76" name="fixed-timing">
             <a:extLst xmlns:a="http://schemas.openxmlformats.org/drawingml/2006/main">
               <a:ext uri="{FF2B5EF4-FFF2-40B4-BE49-F238E27FC236}">
-                <a16:creationId xmlns:a16="http://schemas.microsoft.com/office/drawing/2014/main" id="{64111D52-FC24-4A2E-B48B-160435AFA00E}"/>
+                <a16:creationId xmlns:a16="http://schemas.microsoft.com/office/drawing/2014/main" id="{45522483-239C-4C31-8EDE-B0471B777D60}"/>
               </a:ext>
             </a:extLst>
           </p:cNvPr>
@@ -8453,7 +8624,7 @@
           <p:cNvPr id="77" name="fixed-geometry">
             <a:extLst xmlns:a="http://schemas.openxmlformats.org/drawingml/2006/main">
               <a:ext uri="{FF2B5EF4-FFF2-40B4-BE49-F238E27FC236}">
-                <a16:creationId xmlns:a16="http://schemas.microsoft.com/office/drawing/2014/main" id="{0BF6989D-2324-4069-8E7F-93FEC66ED4DC}"/>
+                <a16:creationId xmlns:a16="http://schemas.microsoft.com/office/drawing/2014/main" id="{B2F3EBA2-97ED-4ADB-9C8D-C54A772819EC}"/>
               </a:ext>
             </a:extLst>
           </p:cNvPr>
@@ -8519,7 +8690,7 @@
     </p:spTree>
     <p:extLst>
       <p:ext uri="{BB962C8B-B14F-4D97-AF65-F5344CB8AC3E}">
-        <p14:creationId xmlns:p14="http://schemas.microsoft.com/office/powerpoint/2010/main" val="1002649899"/>
+        <p14:creationId xmlns:p14="http://schemas.microsoft.com/office/powerpoint/2010/main" val="691242547"/>
       </p:ext>
     </p:extLst>
   </p:cSld>
@@ -8547,10 +8718,10 @@
       </p:grpSpPr>
       <p:sp>
         <p:nvSpPr>
-          <p:cNvPr id="7" name="title">
+          <p:cNvPr id="9" name="title">
             <a:extLst xmlns:a="http://schemas.openxmlformats.org/drawingml/2006/main">
               <a:ext uri="{FF2B5EF4-FFF2-40B4-BE49-F238E27FC236}">
-                <a16:creationId xmlns:a16="http://schemas.microsoft.com/office/drawing/2014/main" id="{51179317-B243-4CEE-9F30-9CE38FFDCB63}"/>
+                <a16:creationId xmlns:a16="http://schemas.microsoft.com/office/drawing/2014/main" id="{5B98603F-4FA5-4550-A9C0-5D4A3891EAD3}"/>
               </a:ext>
             </a:extLst>
           </p:cNvPr>
@@ -8608,7 +8779,7 @@
                 <a:ea typeface="Apple SD Gothic Neo"/>
                 <a:cs typeface="Apple SD Gothic Neo"/>
               </a:rPr>
-              <a:t>A·B 워크로드의 요청 크기와 접근 순서</a:t>
+              <a:t>비교 조건과 적용 범위</a:t>
             </a:r>
           </a:p>
         </p:txBody>
@@ -8618,7 +8789,7 @@
           <p:cNvPr id="2" name="subtitle">
             <a:extLst xmlns:a="http://schemas.openxmlformats.org/drawingml/2006/main">
               <a:ext uri="{FF2B5EF4-FFF2-40B4-BE49-F238E27FC236}">
-                <a16:creationId xmlns:a16="http://schemas.microsoft.com/office/drawing/2014/main" id="{6E0D3C89-FB6B-4B5A-8093-EBC9D7B8C166}"/>
+                <a16:creationId xmlns:a16="http://schemas.microsoft.com/office/drawing/2014/main" id="{A5A136F3-B891-4CD0-8973-08F1113DEB5F}"/>
               </a:ext>
             </a:extLst>
           </p:cNvPr>
@@ -8676,7 +8847,7 @@
                 <a:ea typeface="Apple SD Gothic Neo"/>
                 <a:cs typeface="Apple SD Gothic Neo"/>
               </a:rPr>
-              <a:t>아래 P1, P2는 각각 4KiB 논리 페이지입니다. NAND의 16KiB 물리 페이지와 구분합니다.</a:t>
+              <a:t>각 실험 안의 전후 비교로 효과를 판단하고, 서로 다른 실험의 증가율은 합산하지 않습니다.</a:t>
             </a:r>
           </a:p>
         </p:txBody>
@@ -8686,7 +8857,7 @@
           <p:cNvPr id="3" name="footer">
             <a:extLst xmlns:a="http://schemas.openxmlformats.org/drawingml/2006/main">
               <a:ext uri="{FF2B5EF4-FFF2-40B4-BE49-F238E27FC236}">
-                <a16:creationId xmlns:a16="http://schemas.microsoft.com/office/drawing/2014/main" id="{00327178-9401-4380-B5C1-EB55084D2787}"/>
+                <a16:creationId xmlns:a16="http://schemas.microsoft.com/office/drawing/2014/main" id="{ABBE99A8-B812-4539-91DC-74FE17E88CBB}"/>
               </a:ext>
             </a:extLst>
           </p:cNvPr>
@@ -8744,7 +8915,7 @@
                 <a:ea typeface="Apple SD Gothic Neo"/>
                 <a:cs typeface="Apple SD Gothic Neo"/>
               </a:rPr>
-              <a:t>근거: model.py의 workload(), A/B 지속 부하 생성기. A2/B2는 3개 단위의 국소 순열</a:t>
+              <a:t>원자료 기준 커밋: 22d9b33    상세 경로와 설명은 슬라이드 노트 및 동봉 문서 참조</a:t>
             </a:r>
           </a:p>
         </p:txBody>
@@ -8754,7 +8925,7 @@
           <p:cNvPr id="4" name="page">
             <a:extLst xmlns:a="http://schemas.openxmlformats.org/drawingml/2006/main">
               <a:ext uri="{FF2B5EF4-FFF2-40B4-BE49-F238E27FC236}">
-                <a16:creationId xmlns:a16="http://schemas.microsoft.com/office/drawing/2014/main" id="{060C20A2-457B-41E3-9022-7C711B02DBD4}"/>
+                <a16:creationId xmlns:a16="http://schemas.microsoft.com/office/drawing/2014/main" id="{F4F07F75-D99F-425A-8E70-D718CED82392}"/>
               </a:ext>
             </a:extLst>
           </p:cNvPr>
@@ -8819,10 +8990,863 @@
       </p:sp>
       <p:graphicFrame>
         <p:nvGraphicFramePr>
+          <p:cNvPr id="5" name="comparison-contract">
+            <a:extLst xmlns:a="http://schemas.openxmlformats.org/drawingml/2006/main">
+              <a:ext uri="{FF2B5EF4-FFF2-40B4-BE49-F238E27FC236}">
+                <a16:creationId xmlns:a16="http://schemas.microsoft.com/office/drawing/2014/main" id="{63D3F826-B4EE-4613-A6DC-083B2AB17340}"/>
+              </a:ext>
+            </a:extLst>
+          </p:cNvPr>
+          <p:cNvGraphicFramePr/>
+          <p:nvPr/>
+        </p:nvGraphicFramePr>
+        <p:xfrm>
+          <a:off xmlns:a="http://schemas.openxmlformats.org/drawingml/2006/main" x="533400" y="1866900"/>
+          <a:ext xmlns:a="http://schemas.openxmlformats.org/drawingml/2006/main" cx="11125200" cy="2171700"/>
+        </p:xfrm>
+        <a:graphic xmlns:a="http://schemas.openxmlformats.org/drawingml/2006/main">
+          <a:graphicData uri="http://schemas.openxmlformats.org/drawingml/2006/table">
+            <a:tbl>
+              <a:tblPr/>
+              <a:tblGrid>
+                <a:gridCol w="2590800"/>
+                <a:gridCol w="4457700"/>
+                <a:gridCol w="4076700"/>
+              </a:tblGrid>
+              <a:tr h="542925">
+                <a:tc>
+                  <a:txBody>
+                    <a:bodyPr lIns="114300" tIns="114300" rIns="114300" bIns="114300"/>
+                    <a:lstStyle/>
+                    <a:p>
+                      <a:r>
+                        <a:rPr sz="1725" b="1">
+                          <a:solidFill>
+                            <a:srgbClr val="FFFFFF"/>
+                          </a:solidFill>
+                          <a:latin typeface="Apple SD Gothic Neo"/>
+                          <a:ea typeface="Apple SD Gothic Neo"/>
+                          <a:cs typeface="Apple SD Gothic Neo"/>
+                        </a:rPr>
+                        <a:t>자료의 비교</a:t>
+                      </a:r>
+                    </a:p>
+                  </a:txBody>
+                  <a:tcPr marL="133350" marR="133350" marT="95250" marB="95250" anchor="ctr">
+                    <a:solidFill>
+                      <a:srgbClr val="122C40"/>
+                    </a:solidFill>
+                  </a:tcPr>
+                </a:tc>
+                <a:tc>
+                  <a:txBody>
+                    <a:bodyPr lIns="114300" tIns="114300" rIns="114300" bIns="114300"/>
+                    <a:lstStyle/>
+                    <a:p>
+                      <a:r>
+                        <a:rPr sz="1725" b="1">
+                          <a:solidFill>
+                            <a:srgbClr val="FFFFFF"/>
+                          </a:solidFill>
+                          <a:latin typeface="Apple SD Gothic Neo"/>
+                          <a:ea typeface="Apple SD Gothic Neo"/>
+                          <a:cs typeface="Apple SD Gothic Neo"/>
+                        </a:rPr>
+                        <a:t>측정 방식</a:t>
+                      </a:r>
+                    </a:p>
+                  </a:txBody>
+                  <a:tcPr marL="133350" marR="133350" marT="95250" marB="95250" anchor="ctr">
+                    <a:solidFill>
+                      <a:srgbClr val="122C40"/>
+                    </a:solidFill>
+                  </a:tcPr>
+                </a:tc>
+                <a:tc>
+                  <a:txBody>
+                    <a:bodyPr lIns="114300" tIns="114300" rIns="114300" bIns="114300"/>
+                    <a:lstStyle/>
+                    <a:p>
+                      <a:r>
+                        <a:rPr sz="1725" b="1">
+                          <a:solidFill>
+                            <a:srgbClr val="FFFFFF"/>
+                          </a:solidFill>
+                          <a:latin typeface="Apple SD Gothic Neo"/>
+                          <a:ea typeface="Apple SD Gothic Neo"/>
+                          <a:cs typeface="Apple SD Gothic Neo"/>
+                        </a:rPr>
+                        <a:t>구분할 조건</a:t>
+                      </a:r>
+                    </a:p>
+                  </a:txBody>
+                  <a:tcPr marL="133350" marR="133350" marT="95250" marB="95250" anchor="ctr">
+                    <a:solidFill>
+                      <a:srgbClr val="122C40"/>
+                    </a:solidFill>
+                  </a:tcPr>
+                </a:tc>
+              </a:tr>
+              <a:tr h="542925">
+                <a:tc>
+                  <a:txBody>
+                    <a:bodyPr lIns="114300" tIns="114300" rIns="114300" bIns="114300"/>
+                    <a:lstStyle/>
+                    <a:p>
+                      <a:r>
+                        <a:rPr sz="1725" b="0">
+                          <a:solidFill>
+                            <a:srgbClr val="172738"/>
+                          </a:solidFill>
+                          <a:latin typeface="Apple SD Gothic Neo"/>
+                          <a:ea typeface="Apple SD Gothic Neo"/>
+                          <a:cs typeface="Apple SD Gothic Neo"/>
+                        </a:rPr>
+                        <a:t>1. CA 스케줄링</a:t>
+                      </a:r>
+                    </a:p>
+                  </a:txBody>
+                  <a:tcPr marL="133350" marR="133350" marT="95250" marB="95250" anchor="ctr">
+                    <a:solidFill>
+                      <a:srgbClr val="FFFFFF"/>
+                    </a:solidFill>
+                  </a:tcPr>
+                </a:tc>
+                <a:tc>
+                  <a:txBody>
+                    <a:bodyPr lIns="114300" tIns="114300" rIns="114300" bIns="114300"/>
+                    <a:lstStyle/>
+                    <a:p>
+                      <a:r>
+                        <a:rPr sz="1725" b="0">
+                          <a:solidFill>
+                            <a:srgbClr val="172738"/>
+                          </a:solidFill>
+                          <a:latin typeface="Apple SD Gothic Neo"/>
+                          <a:ea typeface="Apple SD Gothic Neo"/>
+                          <a:cs typeface="Apple SD Gothic Neo"/>
+                        </a:rPr>
+                        <a:t>8,192요청/Port의 전체 완료 평균</a:t>
+                      </a:r>
+                    </a:p>
+                  </a:txBody>
+                  <a:tcPr marL="133350" marR="133350" marT="95250" marB="95250" anchor="ctr">
+                    <a:solidFill>
+                      <a:srgbClr val="FFFFFF"/>
+                    </a:solidFill>
+                  </a:tcPr>
+                </a:tc>
+                <a:tc>
+                  <a:txBody>
+                    <a:bodyPr lIns="114300" tIns="114300" rIns="114300" bIns="114300"/>
+                    <a:lstStyle/>
+                    <a:p>
+                      <a:r>
+                        <a:rPr sz="1725" b="0">
+                          <a:solidFill>
+                            <a:srgbClr val="172738"/>
+                          </a:solidFill>
+                          <a:latin typeface="Apple SD Gothic Neo"/>
+                          <a:ea typeface="Apple SD Gothic Neo"/>
+                          <a:cs typeface="Apple SD Gothic Neo"/>
+                        </a:rPr>
+                        <a:t>32 Plane, PF ON</a:t>
+                      </a:r>
+                    </a:p>
+                  </a:txBody>
+                  <a:tcPr marL="133350" marR="133350" marT="95250" marB="95250" anchor="ctr">
+                    <a:solidFill>
+                      <a:srgbClr val="FFFFFF"/>
+                    </a:solidFill>
+                  </a:tcPr>
+                </a:tc>
+              </a:tr>
+              <a:tr h="542925">
+                <a:tc>
+                  <a:txBody>
+                    <a:bodyPr lIns="114300" tIns="114300" rIns="114300" bIns="114300"/>
+                    <a:lstStyle/>
+                    <a:p>
+                      <a:r>
+                        <a:rPr sz="1725" b="0">
+                          <a:solidFill>
+                            <a:srgbClr val="172738"/>
+                          </a:solidFill>
+                          <a:latin typeface="Apple SD Gothic Neo"/>
+                          <a:ea typeface="Apple SD Gothic Neo"/>
+                          <a:cs typeface="Apple SD Gothic Neo"/>
+                        </a:rPr>
+                        <a:t>2. Plane과 배치</a:t>
+                      </a:r>
+                    </a:p>
+                  </a:txBody>
+                  <a:tcPr marL="133350" marR="133350" marT="95250" marB="95250" anchor="ctr">
+                    <a:solidFill>
+                      <a:srgbClr val="F1F5F8"/>
+                    </a:solidFill>
+                  </a:tcPr>
+                </a:tc>
+                <a:tc>
+                  <a:txBody>
+                    <a:bodyPr lIns="114300" tIns="114300" rIns="114300" bIns="114300"/>
+                    <a:lstStyle/>
+                    <a:p>
+                      <a:r>
+                        <a:rPr sz="1725" b="0">
+                          <a:solidFill>
+                            <a:srgbClr val="172738"/>
+                          </a:solidFill>
+                          <a:latin typeface="Apple SD Gothic Neo"/>
+                          <a:ea typeface="Apple SD Gothic Neo"/>
+                          <a:cs typeface="Apple SD Gothic Neo"/>
+                        </a:rPr>
+                        <a:t>8,192요청/Port의 전체 완료 평균</a:t>
+                      </a:r>
+                    </a:p>
+                  </a:txBody>
+                  <a:tcPr marL="133350" marR="133350" marT="95250" marB="95250" anchor="ctr">
+                    <a:solidFill>
+                      <a:srgbClr val="F1F5F8"/>
+                    </a:solidFill>
+                  </a:tcPr>
+                </a:tc>
+                <a:tc>
+                  <a:txBody>
+                    <a:bodyPr lIns="114300" tIns="114300" rIns="114300" bIns="114300"/>
+                    <a:lstStyle/>
+                    <a:p>
+                      <a:r>
+                        <a:rPr sz="1725" b="0">
+                          <a:solidFill>
+                            <a:srgbClr val="172738"/>
+                          </a:solidFill>
+                          <a:latin typeface="Apple SD Gothic Neo"/>
+                          <a:ea typeface="Apple SD Gothic Neo"/>
+                          <a:cs typeface="Apple SD Gothic Neo"/>
+                        </a:rPr>
+                        <a:t>32/64 Plane, PF OFF</a:t>
+                      </a:r>
+                    </a:p>
+                  </a:txBody>
+                  <a:tcPr marL="133350" marR="133350" marT="95250" marB="95250" anchor="ctr">
+                    <a:solidFill>
+                      <a:srgbClr val="F1F5F8"/>
+                    </a:solidFill>
+                  </a:tcPr>
+                </a:tc>
+              </a:tr>
+              <a:tr h="542925">
+                <a:tc>
+                  <a:txBody>
+                    <a:bodyPr lIns="114300" tIns="114300" rIns="114300" bIns="114300"/>
+                    <a:lstStyle/>
+                    <a:p>
+                      <a:r>
+                        <a:rPr sz="1725" b="0">
+                          <a:solidFill>
+                            <a:srgbClr val="172738"/>
+                          </a:solidFill>
+                          <a:latin typeface="Apple SD Gothic Neo"/>
+                          <a:ea typeface="Apple SD Gothic Neo"/>
+                          <a:cs typeface="Apple SD Gothic Neo"/>
+                        </a:rPr>
+                        <a:t>3. 버퍼와 QD</a:t>
+                      </a:r>
+                    </a:p>
+                  </a:txBody>
+                  <a:tcPr marL="133350" marR="133350" marT="95250" marB="95250" anchor="ctr">
+                    <a:solidFill>
+                      <a:srgbClr val="FFFFFF"/>
+                    </a:solidFill>
+                  </a:tcPr>
+                </a:tc>
+                <a:tc>
+                  <a:txBody>
+                    <a:bodyPr lIns="114300" tIns="114300" rIns="114300" bIns="114300"/>
+                    <a:lstStyle/>
+                    <a:p>
+                      <a:r>
+                        <a:rPr sz="1725" b="0">
+                          <a:solidFill>
+                            <a:srgbClr val="172738"/>
+                          </a:solidFill>
+                          <a:latin typeface="Apple SD Gothic Neo"/>
+                          <a:ea typeface="Apple SD Gothic Neo"/>
+                          <a:cs typeface="Apple SD Gothic Neo"/>
+                        </a:rPr>
+                        <a:t>지속 공급 중 고정 2ms 평균</a:t>
+                      </a:r>
+                    </a:p>
+                  </a:txBody>
+                  <a:tcPr marL="133350" marR="133350" marT="95250" marB="95250" anchor="ctr">
+                    <a:solidFill>
+                      <a:srgbClr val="FFFFFF"/>
+                    </a:solidFill>
+                  </a:tcPr>
+                </a:tc>
+                <a:tc>
+                  <a:txBody>
+                    <a:bodyPr lIns="114300" tIns="114300" rIns="114300" bIns="114300"/>
+                    <a:lstStyle/>
+                    <a:p>
+                      <a:r>
+                        <a:rPr sz="1725" b="0">
+                          <a:solidFill>
+                            <a:srgbClr val="172738"/>
+                          </a:solidFill>
+                          <a:latin typeface="Apple SD Gothic Neo"/>
+                          <a:ea typeface="Apple SD Gothic Neo"/>
+                          <a:cs typeface="Apple SD Gothic Neo"/>
+                        </a:rPr>
+                        <a:t>64 Plane, PF OFF, 종료 drain 제외</a:t>
+                      </a:r>
+                    </a:p>
+                  </a:txBody>
+                  <a:tcPr marL="133350" marR="133350" marT="95250" marB="95250" anchor="ctr">
+                    <a:solidFill>
+                      <a:srgbClr val="FFFFFF"/>
+                    </a:solidFill>
+                  </a:tcPr>
+                </a:tc>
+              </a:tr>
+            </a:tbl>
+          </a:graphicData>
+        </a:graphic>
+      </p:graphicFrame>
+      <p:sp>
+        <p:nvSpPr>
+          <p:cNvPr id="6" name="tr-preserved">
+            <a:extLst xmlns:a="http://schemas.openxmlformats.org/drawingml/2006/main">
+              <a:ext uri="{FF2B5EF4-FFF2-40B4-BE49-F238E27FC236}">
+                <a16:creationId xmlns:a16="http://schemas.microsoft.com/office/drawing/2014/main" id="{07FF688E-7468-448B-8F76-1EF2BD48A7B6}"/>
+              </a:ext>
+            </a:extLst>
+          </p:cNvPr>
+          <p:cNvSpPr>
+            <a:spLocks xmlns:a="http://schemas.openxmlformats.org/drawingml/2006/main" noGrp="1"/>
+          </p:cNvSpPr>
+          <p:nvPr/>
+        </p:nvSpPr>
+        <p:spPr>
+          <a:xfrm xmlns:a="http://schemas.openxmlformats.org/drawingml/2006/main">
+            <a:off x="571500" y="4381500"/>
+            <a:ext cx="10953750" cy="381000"/>
+          </a:xfrm>
+          <a:prstGeom xmlns:a="http://schemas.openxmlformats.org/drawingml/2006/main" prst="rect">
+            <a:avLst/>
+          </a:prstGeom>
+          <a:noFill xmlns:a="http://schemas.openxmlformats.org/drawingml/2006/main"/>
+          <a:ln xmlns:a="http://schemas.openxmlformats.org/drawingml/2006/main" w="0">
+            <a:noFill/>
+          </a:ln>
+        </p:spPr>
+        <p:txBody>
+          <a:bodyPr xmlns:a="http://schemas.openxmlformats.org/drawingml/2006/main" wrap="square" lIns="0" tIns="0" rIns="0" bIns="0" anchor="t">
+            <a:noAutofit/>
+          </a:bodyPr>
+          <a:lstStyle xmlns:a="http://schemas.openxmlformats.org/drawingml/2006/main">
+            <a:defPPr>
+              <a:defRPr sz="2100" b="1">
+                <a:solidFill>
+                  <a:srgbClr val="126DCA"/>
+                </a:solidFill>
+                <a:latin typeface="Apple SD Gothic Neo"/>
+                <a:ea typeface="Apple SD Gothic Neo"/>
+                <a:cs typeface="Apple SD Gothic Neo"/>
+              </a:defRPr>
+            </a:defPPr>
+          </a:lstStyle>
+          <a:p xmlns:a="http://schemas.openxmlformats.org/drawingml/2006/main">
+            <a:pPr>
+              <a:defRPr sz="2100" b="1">
+                <a:solidFill>
+                  <a:srgbClr val="126DCA"/>
+                </a:solidFill>
+                <a:latin typeface="Apple SD Gothic Neo"/>
+                <a:ea typeface="Apple SD Gothic Neo"/>
+                <a:cs typeface="Apple SD Gothic Neo"/>
+              </a:defRPr>
+            </a:pPr>
+            <a:r>
+              <a:rPr sz="2100" b="1">
+                <a:solidFill>
+                  <a:srgbClr val="126DCA"/>
+                </a:solidFill>
+                <a:latin typeface="Apple SD Gothic Neo"/>
+                <a:ea typeface="Apple SD Gothic Neo"/>
+                <a:cs typeface="Apple SD Gothic Neo"/>
+              </a:rPr>
+              <a:t>유지한 tR 입력값</a:t>
+            </a:r>
+          </a:p>
+        </p:txBody>
+      </p:sp>
+      <p:sp>
+        <p:nvSpPr>
+          <p:cNvPr id="7" name="tr-values">
+            <a:extLst xmlns:a="http://schemas.openxmlformats.org/drawingml/2006/main">
+              <a:ext uri="{FF2B5EF4-FFF2-40B4-BE49-F238E27FC236}">
+                <a16:creationId xmlns:a16="http://schemas.microsoft.com/office/drawing/2014/main" id="{84D17ED2-4E29-44C0-A35E-ED8C4AF40504}"/>
+              </a:ext>
+            </a:extLst>
+          </p:cNvPr>
+          <p:cNvSpPr>
+            <a:spLocks xmlns:a="http://schemas.openxmlformats.org/drawingml/2006/main" noGrp="1"/>
+          </p:cNvSpPr>
+          <p:nvPr/>
+        </p:nvSpPr>
+        <p:spPr>
+          <a:xfrm xmlns:a="http://schemas.openxmlformats.org/drawingml/2006/main">
+            <a:off x="571500" y="4876800"/>
+            <a:ext cx="10953750" cy="381000"/>
+          </a:xfrm>
+          <a:prstGeom xmlns:a="http://schemas.openxmlformats.org/drawingml/2006/main" prst="rect">
+            <a:avLst/>
+          </a:prstGeom>
+          <a:noFill xmlns:a="http://schemas.openxmlformats.org/drawingml/2006/main"/>
+          <a:ln xmlns:a="http://schemas.openxmlformats.org/drawingml/2006/main" w="0">
+            <a:noFill/>
+          </a:ln>
+        </p:spPr>
+        <p:txBody>
+          <a:bodyPr xmlns:a="http://schemas.openxmlformats.org/drawingml/2006/main" wrap="square" lIns="0" tIns="0" rIns="0" bIns="0" anchor="t">
+            <a:noAutofit/>
+          </a:bodyPr>
+          <a:lstStyle xmlns:a="http://schemas.openxmlformats.org/drawingml/2006/main">
+            <a:defPPr>
+              <a:defRPr sz="1800" b="0">
+                <a:solidFill>
+                  <a:srgbClr val="172738"/>
+                </a:solidFill>
+                <a:latin typeface="Apple SD Gothic Neo"/>
+                <a:ea typeface="Apple SD Gothic Neo"/>
+                <a:cs typeface="Apple SD Gothic Neo"/>
+              </a:defRPr>
+            </a:defPPr>
+          </a:lstStyle>
+          <a:p xmlns:a="http://schemas.openxmlformats.org/drawingml/2006/main">
+            <a:pPr>
+              <a:defRPr sz="1800" b="0">
+                <a:solidFill>
+                  <a:srgbClr val="172738"/>
+                </a:solidFill>
+                <a:latin typeface="Apple SD Gothic Neo"/>
+                <a:ea typeface="Apple SD Gothic Neo"/>
+                <a:cs typeface="Apple SD Gothic Neo"/>
+              </a:defRPr>
+            </a:pPr>
+            <a:r>
+              <a:rPr sz="1800" b="0">
+                <a:solidFill>
+                  <a:srgbClr val="172738"/>
+                </a:solidFill>
+                <a:latin typeface="Apple SD Gothic Neo"/>
+                <a:ea typeface="Apple SD Gothic Neo"/>
+                <a:cs typeface="Apple SD Gothic Neo"/>
+              </a:rPr>
+              <a:t>Short 2.00µs    Mid 2.08µs    Long 12.16µs    First / Group 20.69µs</a:t>
+            </a:r>
+          </a:p>
+        </p:txBody>
+      </p:sp>
+      <p:sp>
+        <p:nvSpPr>
+          <p:cNvPr id="8" name="limits">
+            <a:extLst xmlns:a="http://schemas.openxmlformats.org/drawingml/2006/main">
+              <a:ext uri="{FF2B5EF4-FFF2-40B4-BE49-F238E27FC236}">
+                <a16:creationId xmlns:a16="http://schemas.microsoft.com/office/drawing/2014/main" id="{D0B8633B-99F6-4ABA-923A-56A11470E97A}"/>
+              </a:ext>
+            </a:extLst>
+          </p:cNvPr>
+          <p:cNvSpPr>
+            <a:spLocks xmlns:a="http://schemas.openxmlformats.org/drawingml/2006/main" noGrp="1"/>
+          </p:cNvSpPr>
+          <p:nvPr/>
+        </p:nvSpPr>
+        <p:spPr>
+          <a:xfrm xmlns:a="http://schemas.openxmlformats.org/drawingml/2006/main">
+            <a:off x="571500" y="5514975"/>
+            <a:ext cx="10953750" cy="704850"/>
+          </a:xfrm>
+          <a:prstGeom xmlns:a="http://schemas.openxmlformats.org/drawingml/2006/main" prst="rect">
+            <a:avLst/>
+          </a:prstGeom>
+          <a:noFill xmlns:a="http://schemas.openxmlformats.org/drawingml/2006/main"/>
+          <a:ln xmlns:a="http://schemas.openxmlformats.org/drawingml/2006/main" w="0">
+            <a:noFill/>
+          </a:ln>
+        </p:spPr>
+        <p:txBody>
+          <a:bodyPr xmlns:a="http://schemas.openxmlformats.org/drawingml/2006/main" wrap="square" lIns="0" tIns="0" rIns="0" bIns="0" anchor="t">
+            <a:noAutofit/>
+          </a:bodyPr>
+          <a:lstStyle xmlns:a="http://schemas.openxmlformats.org/drawingml/2006/main">
+            <a:defPPr>
+              <a:defRPr sz="1800" b="0">
+                <a:solidFill>
+                  <a:srgbClr val="586875"/>
+                </a:solidFill>
+                <a:latin typeface="Apple SD Gothic Neo"/>
+                <a:ea typeface="Apple SD Gothic Neo"/>
+                <a:cs typeface="Apple SD Gothic Neo"/>
+              </a:defRPr>
+            </a:defPPr>
+          </a:lstStyle>
+          <a:p xmlns:a="http://schemas.openxmlformats.org/drawingml/2006/main">
+            <a:pPr>
+              <a:defRPr sz="1800" b="0">
+                <a:solidFill>
+                  <a:srgbClr val="586875"/>
+                </a:solidFill>
+                <a:latin typeface="Apple SD Gothic Neo"/>
+                <a:ea typeface="Apple SD Gothic Neo"/>
+                <a:cs typeface="Apple SD Gothic Neo"/>
+              </a:defRPr>
+            </a:pPr>
+            <a:r>
+              <a:rPr sz="1800" b="0">
+                <a:solidFill>
+                  <a:srgbClr val="586875"/>
+                </a:solidFill>
+                <a:latin typeface="Apple SD Gothic Neo"/>
+                <a:ea typeface="Apple SD Gothic Neo"/>
+                <a:cs typeface="Apple SD Gothic Neo"/>
+              </a:rPr>
+              <a:t>가용률 85%와 Port 내부 순서 제약을 유지한 모델 결과입니다.</a:t>
+            </a:r>
+          </a:p>
+          <a:p xmlns:a="http://schemas.openxmlformats.org/drawingml/2006/main">
+            <a:pPr>
+              <a:defRPr sz="1800" b="0">
+                <a:solidFill>
+                  <a:srgbClr val="586875"/>
+                </a:solidFill>
+                <a:latin typeface="Apple SD Gothic Neo"/>
+                <a:ea typeface="Apple SD Gothic Neo"/>
+                <a:cs typeface="Apple SD Gothic Neo"/>
+              </a:defRPr>
+            </a:pPr>
+            <a:r>
+              <a:rPr sz="1800" b="0">
+                <a:solidFill>
+                  <a:srgbClr val="586875"/>
+                </a:solidFill>
+                <a:latin typeface="Apple SD Gothic Neo"/>
+                <a:ea typeface="Apple SD Gothic Neo"/>
+                <a:cs typeface="Apple SD Gothic Neo"/>
+              </a:rPr>
+              <a:t>다른 주소 편향, 동적 L2P, 실제 GC 및 Die/LUN 공유 자원은 별도 검증이 필요합니다.</a:t>
+            </a:r>
+          </a:p>
+        </p:txBody>
+      </p:sp>
+    </p:spTree>
+    <p:extLst>
+      <p:ext uri="{BB962C8B-B14F-4D97-AF65-F5344CB8AC3E}">
+        <p14:creationId xmlns:p14="http://schemas.microsoft.com/office/powerpoint/2010/main" val="91184080"/>
+      </p:ext>
+    </p:extLst>
+  </p:cSld>
+</p:sld>
+</file>
+
+<file path=ppt/slides/slide11.xml><?xml version="1.0" encoding="utf-8"?>
+<p:sld xmlns:p="http://schemas.openxmlformats.org/presentationml/2006/main">
+  <p:cSld>
+    <p:bg>
+      <p:bgPr>
+        <a:solidFill xmlns:a="http://schemas.openxmlformats.org/drawingml/2006/main">
+          <a:srgbClr val="FFFFFF"/>
+        </a:solidFill>
+      </p:bgPr>
+    </p:bg>
+    <p:spTree>
+      <p:nvGrpSpPr>
+        <p:cNvPr id="1" name=""/>
+        <p:cNvGrpSpPr/>
+        <p:nvPr/>
+      </p:nvGrpSpPr>
+      <p:grpSpPr>
+        <a:xfrm xmlns:a="http://schemas.openxmlformats.org/drawingml/2006/main"/>
+      </p:grpSpPr>
+      <p:sp>
+        <p:nvSpPr>
+          <p:cNvPr id="7" name="title">
+            <a:extLst xmlns:a="http://schemas.openxmlformats.org/drawingml/2006/main">
+              <a:ext uri="{FF2B5EF4-FFF2-40B4-BE49-F238E27FC236}">
+                <a16:creationId xmlns:a16="http://schemas.microsoft.com/office/drawing/2014/main" id="{B6EC20D6-B52A-438D-A094-39F5D9CEC2E4}"/>
+              </a:ext>
+            </a:extLst>
+          </p:cNvPr>
+          <p:cNvSpPr>
+            <a:spLocks xmlns:a="http://schemas.openxmlformats.org/drawingml/2006/main" noGrp="1"/>
+          </p:cNvSpPr>
+          <p:nvPr/>
+        </p:nvSpPr>
+        <p:spPr>
+          <a:xfrm xmlns:a="http://schemas.openxmlformats.org/drawingml/2006/main">
+            <a:off x="533400" y="438150"/>
+            <a:ext cx="11125200" cy="628650"/>
+          </a:xfrm>
+          <a:prstGeom xmlns:a="http://schemas.openxmlformats.org/drawingml/2006/main" prst="rect">
+            <a:avLst/>
+          </a:prstGeom>
+          <a:noFill xmlns:a="http://schemas.openxmlformats.org/drawingml/2006/main"/>
+          <a:ln xmlns:a="http://schemas.openxmlformats.org/drawingml/2006/main" w="0">
+            <a:noFill/>
+          </a:ln>
+        </p:spPr>
+        <p:txBody>
+          <a:bodyPr xmlns:a="http://schemas.openxmlformats.org/drawingml/2006/main" wrap="square" lIns="0" tIns="0" rIns="0" bIns="0" anchor="t">
+            <a:noAutofit/>
+          </a:bodyPr>
+          <a:lstStyle xmlns:a="http://schemas.openxmlformats.org/drawingml/2006/main">
+            <a:defPPr>
+              <a:defRPr sz="3300" b="1">
+                <a:solidFill>
+                  <a:srgbClr val="172738"/>
+                </a:solidFill>
+                <a:latin typeface="Apple SD Gothic Neo"/>
+                <a:ea typeface="Apple SD Gothic Neo"/>
+                <a:cs typeface="Apple SD Gothic Neo"/>
+              </a:defRPr>
+            </a:defPPr>
+          </a:lstStyle>
+          <a:p xmlns:a="http://schemas.openxmlformats.org/drawingml/2006/main">
+            <a:pPr>
+              <a:defRPr sz="3300" b="1">
+                <a:solidFill>
+                  <a:srgbClr val="172738"/>
+                </a:solidFill>
+                <a:latin typeface="Apple SD Gothic Neo"/>
+                <a:ea typeface="Apple SD Gothic Neo"/>
+                <a:cs typeface="Apple SD Gothic Neo"/>
+              </a:defRPr>
+            </a:pPr>
+            <a:r>
+              <a:rPr sz="3300" b="1">
+                <a:solidFill>
+                  <a:srgbClr val="172738"/>
+                </a:solidFill>
+                <a:latin typeface="Apple SD Gothic Neo"/>
+                <a:ea typeface="Apple SD Gothic Neo"/>
+                <a:cs typeface="Apple SD Gothic Neo"/>
+              </a:rPr>
+              <a:t>A·B 워크로드의 요청 크기와 접근 순서</a:t>
+            </a:r>
+          </a:p>
+        </p:txBody>
+      </p:sp>
+      <p:sp>
+        <p:nvSpPr>
+          <p:cNvPr id="2" name="subtitle">
+            <a:extLst xmlns:a="http://schemas.openxmlformats.org/drawingml/2006/main">
+              <a:ext uri="{FF2B5EF4-FFF2-40B4-BE49-F238E27FC236}">
+                <a16:creationId xmlns:a16="http://schemas.microsoft.com/office/drawing/2014/main" id="{9B36F259-5003-4445-95B8-01E784142CD3}"/>
+              </a:ext>
+            </a:extLst>
+          </p:cNvPr>
+          <p:cNvSpPr>
+            <a:spLocks xmlns:a="http://schemas.openxmlformats.org/drawingml/2006/main" noGrp="1"/>
+          </p:cNvSpPr>
+          <p:nvPr/>
+        </p:nvSpPr>
+        <p:spPr>
+          <a:xfrm xmlns:a="http://schemas.openxmlformats.org/drawingml/2006/main">
+            <a:off x="552450" y="1104900"/>
+            <a:ext cx="11087100" cy="571500"/>
+          </a:xfrm>
+          <a:prstGeom xmlns:a="http://schemas.openxmlformats.org/drawingml/2006/main" prst="rect">
+            <a:avLst/>
+          </a:prstGeom>
+          <a:noFill xmlns:a="http://schemas.openxmlformats.org/drawingml/2006/main"/>
+          <a:ln xmlns:a="http://schemas.openxmlformats.org/drawingml/2006/main" w="0">
+            <a:noFill/>
+          </a:ln>
+        </p:spPr>
+        <p:txBody>
+          <a:bodyPr xmlns:a="http://schemas.openxmlformats.org/drawingml/2006/main" wrap="square" lIns="0" tIns="0" rIns="0" bIns="0" anchor="t">
+            <a:noAutofit/>
+          </a:bodyPr>
+          <a:lstStyle xmlns:a="http://schemas.openxmlformats.org/drawingml/2006/main">
+            <a:defPPr>
+              <a:defRPr sz="1800" b="0">
+                <a:solidFill>
+                  <a:srgbClr val="586875"/>
+                </a:solidFill>
+                <a:latin typeface="Apple SD Gothic Neo"/>
+                <a:ea typeface="Apple SD Gothic Neo"/>
+                <a:cs typeface="Apple SD Gothic Neo"/>
+              </a:defRPr>
+            </a:defPPr>
+          </a:lstStyle>
+          <a:p xmlns:a="http://schemas.openxmlformats.org/drawingml/2006/main">
+            <a:pPr>
+              <a:defRPr sz="1800" b="0">
+                <a:solidFill>
+                  <a:srgbClr val="586875"/>
+                </a:solidFill>
+                <a:latin typeface="Apple SD Gothic Neo"/>
+                <a:ea typeface="Apple SD Gothic Neo"/>
+                <a:cs typeface="Apple SD Gothic Neo"/>
+              </a:defRPr>
+            </a:pPr>
+            <a:r>
+              <a:rPr sz="1800" b="0">
+                <a:solidFill>
+                  <a:srgbClr val="586875"/>
+                </a:solidFill>
+                <a:latin typeface="Apple SD Gothic Neo"/>
+                <a:ea typeface="Apple SD Gothic Neo"/>
+                <a:cs typeface="Apple SD Gothic Neo"/>
+              </a:rPr>
+              <a:t>아래 P1, P2는 각각 4KiB 논리 페이지입니다. NAND의 16KiB 물리 페이지와 구분합니다.</a:t>
+            </a:r>
+          </a:p>
+        </p:txBody>
+      </p:sp>
+      <p:sp>
+        <p:nvSpPr>
+          <p:cNvPr id="3" name="footer">
+            <a:extLst xmlns:a="http://schemas.openxmlformats.org/drawingml/2006/main">
+              <a:ext uri="{FF2B5EF4-FFF2-40B4-BE49-F238E27FC236}">
+                <a16:creationId xmlns:a16="http://schemas.microsoft.com/office/drawing/2014/main" id="{D342EDAC-D236-4518-9959-3AC0A4331123}"/>
+              </a:ext>
+            </a:extLst>
+          </p:cNvPr>
+          <p:cNvSpPr>
+            <a:spLocks xmlns:a="http://schemas.openxmlformats.org/drawingml/2006/main" noGrp="1"/>
+          </p:cNvSpPr>
+          <p:nvPr/>
+        </p:nvSpPr>
+        <p:spPr>
+          <a:xfrm xmlns:a="http://schemas.openxmlformats.org/drawingml/2006/main">
+            <a:off x="533400" y="6419850"/>
+            <a:ext cx="10477500" cy="257175"/>
+          </a:xfrm>
+          <a:prstGeom xmlns:a="http://schemas.openxmlformats.org/drawingml/2006/main" prst="rect">
+            <a:avLst/>
+          </a:prstGeom>
+          <a:noFill xmlns:a="http://schemas.openxmlformats.org/drawingml/2006/main"/>
+          <a:ln xmlns:a="http://schemas.openxmlformats.org/drawingml/2006/main" w="0">
+            <a:noFill/>
+          </a:ln>
+        </p:spPr>
+        <p:txBody>
+          <a:bodyPr xmlns:a="http://schemas.openxmlformats.org/drawingml/2006/main" wrap="square" lIns="0" tIns="0" rIns="0" bIns="0" anchor="t">
+            <a:noAutofit/>
+          </a:bodyPr>
+          <a:lstStyle xmlns:a="http://schemas.openxmlformats.org/drawingml/2006/main">
+            <a:defPPr>
+              <a:defRPr sz="1200" b="0">
+                <a:solidFill>
+                  <a:srgbClr val="586875"/>
+                </a:solidFill>
+                <a:latin typeface="Apple SD Gothic Neo"/>
+                <a:ea typeface="Apple SD Gothic Neo"/>
+                <a:cs typeface="Apple SD Gothic Neo"/>
+              </a:defRPr>
+            </a:defPPr>
+          </a:lstStyle>
+          <a:p xmlns:a="http://schemas.openxmlformats.org/drawingml/2006/main">
+            <a:pPr>
+              <a:defRPr sz="1200" b="0">
+                <a:solidFill>
+                  <a:srgbClr val="586875"/>
+                </a:solidFill>
+                <a:latin typeface="Apple SD Gothic Neo"/>
+                <a:ea typeface="Apple SD Gothic Neo"/>
+                <a:cs typeface="Apple SD Gothic Neo"/>
+              </a:defRPr>
+            </a:pPr>
+            <a:r>
+              <a:rPr sz="1200" b="0">
+                <a:solidFill>
+                  <a:srgbClr val="586875"/>
+                </a:solidFill>
+                <a:latin typeface="Apple SD Gothic Neo"/>
+                <a:ea typeface="Apple SD Gothic Neo"/>
+                <a:cs typeface="Apple SD Gothic Neo"/>
+              </a:rPr>
+              <a:t>근거: model.py의 workload(), A/B 지속 부하 생성기. A2/B2는 3개 단위의 국소 순열</a:t>
+            </a:r>
+          </a:p>
+        </p:txBody>
+      </p:sp>
+      <p:sp>
+        <p:nvSpPr>
+          <p:cNvPr id="4" name="page">
+            <a:extLst xmlns:a="http://schemas.openxmlformats.org/drawingml/2006/main">
+              <a:ext uri="{FF2B5EF4-FFF2-40B4-BE49-F238E27FC236}">
+                <a16:creationId xmlns:a16="http://schemas.microsoft.com/office/drawing/2014/main" id="{7C8697D8-AD75-478C-AFC9-1010B739AD5A}"/>
+              </a:ext>
+            </a:extLst>
+          </p:cNvPr>
+          <p:cNvSpPr>
+            <a:spLocks xmlns:a="http://schemas.openxmlformats.org/drawingml/2006/main" noGrp="1"/>
+          </p:cNvSpPr>
+          <p:nvPr/>
+        </p:nvSpPr>
+        <p:spPr>
+          <a:xfrm xmlns:a="http://schemas.openxmlformats.org/drawingml/2006/main">
+            <a:off x="11144250" y="6419850"/>
+            <a:ext cx="495300" cy="257175"/>
+          </a:xfrm>
+          <a:prstGeom xmlns:a="http://schemas.openxmlformats.org/drawingml/2006/main" prst="rect">
+            <a:avLst/>
+          </a:prstGeom>
+          <a:noFill xmlns:a="http://schemas.openxmlformats.org/drawingml/2006/main"/>
+          <a:ln xmlns:a="http://schemas.openxmlformats.org/drawingml/2006/main" w="0">
+            <a:noFill/>
+          </a:ln>
+        </p:spPr>
+        <p:txBody>
+          <a:bodyPr xmlns:a="http://schemas.openxmlformats.org/drawingml/2006/main" wrap="square" lIns="0" tIns="0" rIns="0" bIns="0" anchor="t">
+            <a:noAutofit/>
+          </a:bodyPr>
+          <a:lstStyle xmlns:a="http://schemas.openxmlformats.org/drawingml/2006/main">
+            <a:defPPr>
+              <a:defRPr sz="1200" b="0">
+                <a:solidFill>
+                  <a:srgbClr val="586875"/>
+                </a:solidFill>
+                <a:latin typeface="Apple SD Gothic Neo"/>
+                <a:ea typeface="Apple SD Gothic Neo"/>
+                <a:cs typeface="Apple SD Gothic Neo"/>
+              </a:defRPr>
+            </a:defPPr>
+          </a:lstStyle>
+          <a:p xmlns:a="http://schemas.openxmlformats.org/drawingml/2006/main">
+            <a:pPr>
+              <a:defRPr sz="1200" b="0">
+                <a:solidFill>
+                  <a:srgbClr val="586875"/>
+                </a:solidFill>
+                <a:latin typeface="Apple SD Gothic Neo"/>
+                <a:ea typeface="Apple SD Gothic Neo"/>
+                <a:cs typeface="Apple SD Gothic Neo"/>
+              </a:defRPr>
+            </a:pPr>
+            <a:r>
+              <a:rPr sz="1200" b="0">
+                <a:solidFill>
+                  <a:srgbClr val="586875"/>
+                </a:solidFill>
+                <a:latin typeface="Apple SD Gothic Neo"/>
+                <a:ea typeface="Apple SD Gothic Neo"/>
+                <a:cs typeface="Apple SD Gothic Neo"/>
+              </a:rPr>
+              <a:t>11</a:t>
+            </a:r>
+          </a:p>
+        </p:txBody>
+      </p:sp>
+      <p:graphicFrame>
+        <p:nvGraphicFramePr>
           <p:cNvPr id="5" name="workload-patterns">
             <a:extLst xmlns:a="http://schemas.openxmlformats.org/drawingml/2006/main">
               <a:ext uri="{FF2B5EF4-FFF2-40B4-BE49-F238E27FC236}">
-                <a16:creationId xmlns:a16="http://schemas.microsoft.com/office/drawing/2014/main" id="{2DFA2179-6378-47E0-B841-4C5676B00E9C}"/>
+                <a16:creationId xmlns:a16="http://schemas.microsoft.com/office/drawing/2014/main" id="{60C0A9C2-2137-4BB5-AF0A-5945DDE44B84}"/>
               </a:ext>
             </a:extLst>
           </p:cNvPr>
@@ -9440,7 +10464,7 @@
           <p:cNvPr id="6" name="logical-not-physical">
             <a:extLst xmlns:a="http://schemas.openxmlformats.org/drawingml/2006/main">
               <a:ext uri="{FF2B5EF4-FFF2-40B4-BE49-F238E27FC236}">
-                <a16:creationId xmlns:a16="http://schemas.microsoft.com/office/drawing/2014/main" id="{00191EE2-0343-4519-8701-817D71EB40BB}"/>
+                <a16:creationId xmlns:a16="http://schemas.microsoft.com/office/drawing/2014/main" id="{BD7B3E66-1AF3-473C-9E92-F7DA699C61F9}"/>
               </a:ext>
             </a:extLst>
           </p:cNvPr>
@@ -9529,14 +10553,14 @@
     </p:spTree>
     <p:extLst>
       <p:ext uri="{BB962C8B-B14F-4D97-AF65-F5344CB8AC3E}">
-        <p14:creationId xmlns:p14="http://schemas.microsoft.com/office/powerpoint/2010/main" val="117419565"/>
+        <p14:creationId xmlns:p14="http://schemas.microsoft.com/office/powerpoint/2010/main" val="1999210628"/>
       </p:ext>
     </p:extLst>
   </p:cSld>
 </p:sld>
 </file>
 
-<file path=ppt/slides/slide11.xml><?xml version="1.0" encoding="utf-8"?>
+<file path=ppt/slides/slide12.xml><?xml version="1.0" encoding="utf-8"?>
 <p:sld xmlns:p="http://schemas.openxmlformats.org/presentationml/2006/main">
   <p:cSld>
     <p:bg>
@@ -9560,7 +10584,7 @@
           <p:cNvPr id="8" name="title">
             <a:extLst xmlns:a="http://schemas.openxmlformats.org/drawingml/2006/main">
               <a:ext uri="{FF2B5EF4-FFF2-40B4-BE49-F238E27FC236}">
-                <a16:creationId xmlns:a16="http://schemas.microsoft.com/office/drawing/2014/main" id="{87AC4753-EE3C-435F-8847-A189908FC897}"/>
+                <a16:creationId xmlns:a16="http://schemas.microsoft.com/office/drawing/2014/main" id="{70CEC17B-1606-43BD-A426-9BC38FEABEF9}"/>
               </a:ext>
             </a:extLst>
           </p:cNvPr>
@@ -9628,7 +10652,7 @@
           <p:cNvPr id="2" name="subtitle">
             <a:extLst xmlns:a="http://schemas.openxmlformats.org/drawingml/2006/main">
               <a:ext uri="{FF2B5EF4-FFF2-40B4-BE49-F238E27FC236}">
-                <a16:creationId xmlns:a16="http://schemas.microsoft.com/office/drawing/2014/main" id="{54454F09-B838-4A5E-BEEA-7E2AC82334EE}"/>
+                <a16:creationId xmlns:a16="http://schemas.microsoft.com/office/drawing/2014/main" id="{FCDAA4E2-4F3A-4441-A199-4DD03BD9A9D1}"/>
               </a:ext>
             </a:extLst>
           </p:cNvPr>
@@ -9696,7 +10720,7 @@
           <p:cNvPr id="3" name="footer">
             <a:extLst xmlns:a="http://schemas.openxmlformats.org/drawingml/2006/main">
               <a:ext uri="{FF2B5EF4-FFF2-40B4-BE49-F238E27FC236}">
-                <a16:creationId xmlns:a16="http://schemas.microsoft.com/office/drawing/2014/main" id="{3B03C86F-2B8B-49E9-AA1D-FBA2D6619CE0}"/>
+                <a16:creationId xmlns:a16="http://schemas.microsoft.com/office/drawing/2014/main" id="{C80E04DF-B1D4-4350-80E7-6E4263C3A6FC}"/>
               </a:ext>
             </a:extLst>
           </p:cNvPr>
@@ -9764,7 +10788,7 @@
           <p:cNvPr id="4" name="page">
             <a:extLst xmlns:a="http://schemas.openxmlformats.org/drawingml/2006/main">
               <a:ext uri="{FF2B5EF4-FFF2-40B4-BE49-F238E27FC236}">
-                <a16:creationId xmlns:a16="http://schemas.microsoft.com/office/drawing/2014/main" id="{0E801C75-7BA6-45AF-BB5C-CEF334B0A1BE}"/>
+                <a16:creationId xmlns:a16="http://schemas.microsoft.com/office/drawing/2014/main" id="{7DF30F15-04BE-4227-BBA1-889471EE4840}"/>
               </a:ext>
             </a:extLst>
           </p:cNvPr>
@@ -9822,7 +10846,7 @@
                 <a:ea typeface="Apple SD Gothic Neo"/>
                 <a:cs typeface="Apple SD Gothic Neo"/>
               </a:rPr>
-              <a:t>11</a:t>
+              <a:t>12</a:t>
             </a:r>
           </a:p>
         </p:txBody>
@@ -9832,7 +10856,7 @@
           <p:cNvPr id="5" name="workload-byte-efficiency">
             <a:extLst xmlns:a="http://schemas.openxmlformats.org/drawingml/2006/main">
               <a:ext uri="{FF2B5EF4-FFF2-40B4-BE49-F238E27FC236}">
-                <a16:creationId xmlns:a16="http://schemas.microsoft.com/office/drawing/2014/main" id="{6A6E2E70-2E18-4293-9103-5EBA9C0EEB3B}"/>
+                <a16:creationId xmlns:a16="http://schemas.microsoft.com/office/drawing/2014/main" id="{F670F651-2837-44AA-8F46-FC5440F6FC11}"/>
               </a:ext>
             </a:extLst>
           </p:cNvPr>
@@ -10231,7 +11255,7 @@
           <p:cNvPr id="6" name="partial-read-meaning">
             <a:extLst xmlns:a="http://schemas.openxmlformats.org/drawingml/2006/main">
               <a:ext uri="{FF2B5EF4-FFF2-40B4-BE49-F238E27FC236}">
-                <a16:creationId xmlns:a16="http://schemas.microsoft.com/office/drawing/2014/main" id="{816E74A8-FFE1-4C81-A676-2A895649F999}"/>
+                <a16:creationId xmlns:a16="http://schemas.microsoft.com/office/drawing/2014/main" id="{8E404385-7C33-4029-A77F-C064080A3A9A}"/>
               </a:ext>
             </a:extLst>
           </p:cNvPr>
@@ -10322,7 +11346,7 @@
           <p:cNvPr id="7" name="comparison-limits">
             <a:extLst xmlns:a="http://schemas.openxmlformats.org/drawingml/2006/main">
               <a:ext uri="{FF2B5EF4-FFF2-40B4-BE49-F238E27FC236}">
-                <a16:creationId xmlns:a16="http://schemas.microsoft.com/office/drawing/2014/main" id="{1195B5DC-B2D9-42BA-A19D-135D0027793C}"/>
+                <a16:creationId xmlns:a16="http://schemas.microsoft.com/office/drawing/2014/main" id="{4349D173-DED6-4585-BBAA-7765D71E78D6}"/>
               </a:ext>
             </a:extLst>
           </p:cNvPr>
@@ -10411,7 +11435,7 @@
     </p:spTree>
     <p:extLst>
       <p:ext uri="{BB962C8B-B14F-4D97-AF65-F5344CB8AC3E}">
-        <p14:creationId xmlns:p14="http://schemas.microsoft.com/office/powerpoint/2010/main" val="1469369330"/>
+        <p14:creationId xmlns:p14="http://schemas.microsoft.com/office/powerpoint/2010/main" val="900168079"/>
       </p:ext>
     </p:extLst>
   </p:cSld>
@@ -10439,10 +11463,10 @@
       </p:grpSpPr>
       <p:sp>
         <p:nvSpPr>
-          <p:cNvPr id="7" name="title">
+          <p:cNvPr id="9" name="title">
             <a:extLst xmlns:a="http://schemas.openxmlformats.org/drawingml/2006/main">
               <a:ext uri="{FF2B5EF4-FFF2-40B4-BE49-F238E27FC236}">
-                <a16:creationId xmlns:a16="http://schemas.microsoft.com/office/drawing/2014/main" id="{6272D75B-4162-4D21-A516-E361F17CAE72}"/>
+                <a16:creationId xmlns:a16="http://schemas.microsoft.com/office/drawing/2014/main" id="{5DA6D788-71CA-40F4-8402-BBC5948F3142}"/>
               </a:ext>
             </a:extLst>
           </p:cNvPr>
@@ -10500,7 +11524,7 @@
                 <a:ea typeface="Apple SD Gothic Neo"/>
                 <a:cs typeface="Apple SD Gothic Neo"/>
               </a:rPr>
-              <a:t>전체 구조와 데이터 흐름</a:t>
+              <a:t>zNAND의 tR 특성과 선택 조건</a:t>
             </a:r>
           </a:p>
         </p:txBody>
@@ -10510,7 +11534,7 @@
           <p:cNvPr id="2" name="subtitle">
             <a:extLst xmlns:a="http://schemas.openxmlformats.org/drawingml/2006/main">
               <a:ext uri="{FF2B5EF4-FFF2-40B4-BE49-F238E27FC236}">
-                <a16:creationId xmlns:a16="http://schemas.microsoft.com/office/drawing/2014/main" id="{032EDA08-FFCC-4B19-B7F2-AC48FBAA3B76}"/>
+                <a16:creationId xmlns:a16="http://schemas.microsoft.com/office/drawing/2014/main" id="{6147B477-2FC8-41DF-9CC0-7A750A49A4AE}"/>
               </a:ext>
             </a:extLst>
           </p:cNvPr>
@@ -10568,7 +11592,7 @@
                 <a:ea typeface="Apple SD Gothic Neo"/>
                 <a:cs typeface="Apple SD Gothic Neo"/>
               </a:rPr>
-              <a:t>4개의 독립 Port가 4채널 전체를 공유하며, 읽기 주소가 Channel과 Plane을 결정합니다.</a:t>
+              <a:t>tR은 NAND sensing 시간입니다. 같은 Plane의 직전 sensing 주소와 다음 물리 주소로 판정합니다.</a:t>
             </a:r>
           </a:p>
         </p:txBody>
@@ -10578,7 +11602,7 @@
           <p:cNvPr id="3" name="footer">
             <a:extLst xmlns:a="http://schemas.openxmlformats.org/drawingml/2006/main">
               <a:ext uri="{FF2B5EF4-FFF2-40B4-BE49-F238E27FC236}">
-                <a16:creationId xmlns:a16="http://schemas.microsoft.com/office/drawing/2014/main" id="{180071D7-B725-45A6-8E7E-36BB49C148B2}"/>
+                <a16:creationId xmlns:a16="http://schemas.microsoft.com/office/drawing/2014/main" id="{C19C8B94-191B-4660-A373-CBEB9E6B8EC9}"/>
               </a:ext>
             </a:extLst>
           </p:cNvPr>
@@ -10636,7 +11660,7 @@
                 <a:ea typeface="Apple SD Gothic Neo"/>
                 <a:cs typeface="Apple SD Gothic Neo"/>
               </a:rPr>
-              <a:t>성능 개선 핵심 3가지    2026-10-11    현재 대표 실행 기준: 총 64 Plane, PF OFF</a:t>
+              <a:t>현재 모델 입력값    성능 개선 실험에서 tR 상수는 유지    근거: model.py와 튜닝 문서</a:t>
             </a:r>
           </a:p>
         </p:txBody>
@@ -10646,7 +11670,7 @@
           <p:cNvPr id="4" name="page">
             <a:extLst xmlns:a="http://schemas.openxmlformats.org/drawingml/2006/main">
               <a:ext uri="{FF2B5EF4-FFF2-40B4-BE49-F238E27FC236}">
-                <a16:creationId xmlns:a16="http://schemas.microsoft.com/office/drawing/2014/main" id="{BD28B51E-B5E5-4E04-B774-E414AB5EB9BF}"/>
+                <a16:creationId xmlns:a16="http://schemas.microsoft.com/office/drawing/2014/main" id="{F0D13118-E90D-4265-A3CA-11E20B31AD11}"/>
               </a:ext>
             </a:extLst>
           </p:cNvPr>
@@ -10711,10 +11735,1156 @@
       </p:sp>
       <p:graphicFrame>
         <p:nvGraphicFramePr>
+          <p:cNvPr id="5" name="tr-classification">
+            <a:extLst xmlns:a="http://schemas.openxmlformats.org/drawingml/2006/main">
+              <a:ext uri="{FF2B5EF4-FFF2-40B4-BE49-F238E27FC236}">
+                <a16:creationId xmlns:a16="http://schemas.microsoft.com/office/drawing/2014/main" id="{AB6B1A4B-D527-44C5-8BC9-DF0BA8AD48C1}"/>
+              </a:ext>
+            </a:extLst>
+          </p:cNvPr>
+          <p:cNvGraphicFramePr/>
+          <p:nvPr/>
+        </p:nvGraphicFramePr>
+        <p:xfrm>
+          <a:off xmlns:a="http://schemas.openxmlformats.org/drawingml/2006/main" x="533400" y="1790700"/>
+          <a:ext xmlns:a="http://schemas.openxmlformats.org/drawingml/2006/main" cx="11125200" cy="2914650"/>
+        </p:xfrm>
+        <a:graphic xmlns:a="http://schemas.openxmlformats.org/drawingml/2006/main">
+          <a:graphicData uri="http://schemas.openxmlformats.org/drawingml/2006/table">
+            <a:tbl>
+              <a:tblPr/>
+              <a:tblGrid>
+                <a:gridCol w="1238250"/>
+                <a:gridCol w="1276350"/>
+                <a:gridCol w="4953000"/>
+                <a:gridCol w="3657600"/>
+              </a:tblGrid>
+              <a:tr h="485775">
+                <a:tc>
+                  <a:txBody>
+                    <a:bodyPr lIns="114300" tIns="114300" rIns="114300" bIns="114300"/>
+                    <a:lstStyle/>
+                    <a:p>
+                      <a:r>
+                        <a:rPr sz="1650" b="1">
+                          <a:solidFill>
+                            <a:srgbClr val="FFFFFF"/>
+                          </a:solidFill>
+                          <a:latin typeface="Apple SD Gothic Neo"/>
+                          <a:ea typeface="Apple SD Gothic Neo"/>
+                          <a:cs typeface="Apple SD Gothic Neo"/>
+                        </a:rPr>
+                        <a:t>종류</a:t>
+                      </a:r>
+                    </a:p>
+                  </a:txBody>
+                  <a:tcPr marL="133350" marR="133350" marT="95250" marB="95250" anchor="ctr">
+                    <a:solidFill>
+                      <a:srgbClr val="122C40"/>
+                    </a:solidFill>
+                  </a:tcPr>
+                </a:tc>
+                <a:tc>
+                  <a:txBody>
+                    <a:bodyPr lIns="114300" tIns="114300" rIns="114300" bIns="114300"/>
+                    <a:lstStyle/>
+                    <a:p>
+                      <a:r>
+                        <a:rPr sz="1650" b="1">
+                          <a:solidFill>
+                            <a:srgbClr val="FFFFFF"/>
+                          </a:solidFill>
+                          <a:latin typeface="Apple SD Gothic Neo"/>
+                          <a:ea typeface="Apple SD Gothic Neo"/>
+                          <a:cs typeface="Apple SD Gothic Neo"/>
+                        </a:rPr>
+                        <a:t>tR (µs)</a:t>
+                      </a:r>
+                    </a:p>
+                  </a:txBody>
+                  <a:tcPr marL="133350" marR="133350" marT="95250" marB="95250" anchor="ctr">
+                    <a:solidFill>
+                      <a:srgbClr val="122C40"/>
+                    </a:solidFill>
+                  </a:tcPr>
+                </a:tc>
+                <a:tc>
+                  <a:txBody>
+                    <a:bodyPr lIns="114300" tIns="114300" rIns="114300" bIns="114300"/>
+                    <a:lstStyle/>
+                    <a:p>
+                      <a:r>
+                        <a:rPr sz="1650" b="1">
+                          <a:solidFill>
+                            <a:srgbClr val="FFFFFF"/>
+                          </a:solidFill>
+                          <a:latin typeface="Apple SD Gothic Neo"/>
+                          <a:ea typeface="Apple SD Gothic Neo"/>
+                          <a:cs typeface="Apple SD Gothic Neo"/>
+                        </a:rPr>
+                        <a:t>현재 모델의 적용 조건</a:t>
+                      </a:r>
+                    </a:p>
+                  </a:txBody>
+                  <a:tcPr marL="133350" marR="133350" marT="95250" marB="95250" anchor="ctr">
+                    <a:solidFill>
+                      <a:srgbClr val="122C40"/>
+                    </a:solidFill>
+                  </a:tcPr>
+                </a:tc>
+                <a:tc>
+                  <a:txBody>
+                    <a:bodyPr lIns="114300" tIns="114300" rIns="114300" bIns="114300"/>
+                    <a:lstStyle/>
+                    <a:p>
+                      <a:r>
+                        <a:rPr sz="1650" b="1">
+                          <a:solidFill>
+                            <a:srgbClr val="FFFFFF"/>
+                          </a:solidFill>
+                          <a:latin typeface="Apple SD Gothic Neo"/>
+                          <a:ea typeface="Apple SD Gothic Neo"/>
+                          <a:cs typeface="Apple SD Gothic Neo"/>
+                        </a:rPr>
+                        <a:t>예시: Plane 내부 물리 순번 q</a:t>
+                      </a:r>
+                    </a:p>
+                  </a:txBody>
+                  <a:tcPr marL="133350" marR="133350" marT="95250" marB="95250" anchor="ctr">
+                    <a:solidFill>
+                      <a:srgbClr val="122C40"/>
+                    </a:solidFill>
+                  </a:tcPr>
+                </a:tc>
+              </a:tr>
+              <a:tr h="485775">
+                <a:tc>
+                  <a:txBody>
+                    <a:bodyPr lIns="114300" tIns="114300" rIns="114300" bIns="114300"/>
+                    <a:lstStyle/>
+                    <a:p>
+                      <a:r>
+                        <a:rPr sz="1650" b="0">
+                          <a:solidFill>
+                            <a:srgbClr val="172738"/>
+                          </a:solidFill>
+                          <a:latin typeface="Apple SD Gothic Neo"/>
+                          <a:ea typeface="Apple SD Gothic Neo"/>
+                          <a:cs typeface="Apple SD Gothic Neo"/>
+                        </a:rPr>
+                        <a:t>First</a:t>
+                      </a:r>
+                    </a:p>
+                  </a:txBody>
+                  <a:tcPr marL="133350" marR="133350" marT="95250" marB="95250" anchor="ctr">
+                    <a:solidFill>
+                      <a:srgbClr val="FFFFFF"/>
+                    </a:solidFill>
+                  </a:tcPr>
+                </a:tc>
+                <a:tc>
+                  <a:txBody>
+                    <a:bodyPr lIns="114300" tIns="114300" rIns="114300" bIns="114300"/>
+                    <a:lstStyle/>
+                    <a:p>
+                      <a:r>
+                        <a:rPr sz="1650" b="0">
+                          <a:solidFill>
+                            <a:srgbClr val="172738"/>
+                          </a:solidFill>
+                          <a:latin typeface="Apple SD Gothic Neo"/>
+                          <a:ea typeface="Apple SD Gothic Neo"/>
+                          <a:cs typeface="Apple SD Gothic Neo"/>
+                        </a:rPr>
+                        <a:t>20.69</a:t>
+                      </a:r>
+                    </a:p>
+                  </a:txBody>
+                  <a:tcPr marL="133350" marR="133350" marT="95250" marB="95250" anchor="ctr">
+                    <a:solidFill>
+                      <a:srgbClr val="FFFFFF"/>
+                    </a:solidFill>
+                  </a:tcPr>
+                </a:tc>
+                <a:tc>
+                  <a:txBody>
+                    <a:bodyPr lIns="114300" tIns="114300" rIns="114300" bIns="114300"/>
+                    <a:lstStyle/>
+                    <a:p>
+                      <a:r>
+                        <a:rPr sz="1650" b="0">
+                          <a:solidFill>
+                            <a:srgbClr val="172738"/>
+                          </a:solidFill>
+                          <a:latin typeface="Apple SD Gothic Neo"/>
+                          <a:ea typeface="Apple SD Gothic Neo"/>
+                          <a:cs typeface="Apple SD Gothic Neo"/>
+                        </a:rPr>
+                        <a:t>해당 Plane의 이전 sensing 이력이 없음</a:t>
+                      </a:r>
+                    </a:p>
+                  </a:txBody>
+                  <a:tcPr marL="133350" marR="133350" marT="95250" marB="95250" anchor="ctr">
+                    <a:solidFill>
+                      <a:srgbClr val="FFFFFF"/>
+                    </a:solidFill>
+                  </a:tcPr>
+                </a:tc>
+                <a:tc>
+                  <a:txBody>
+                    <a:bodyPr lIns="114300" tIns="114300" rIns="114300" bIns="114300"/>
+                    <a:lstStyle/>
+                    <a:p>
+                      <a:r>
+                        <a:rPr sz="1650" b="0">
+                          <a:solidFill>
+                            <a:srgbClr val="172738"/>
+                          </a:solidFill>
+                          <a:latin typeface="Apple SD Gothic Neo"/>
+                          <a:ea typeface="Apple SD Gothic Neo"/>
+                          <a:cs typeface="Apple SD Gothic Neo"/>
+                        </a:rPr>
+                        <a:t>그 Plane의 최초 sensing</a:t>
+                      </a:r>
+                    </a:p>
+                  </a:txBody>
+                  <a:tcPr marL="133350" marR="133350" marT="95250" marB="95250" anchor="ctr">
+                    <a:solidFill>
+                      <a:srgbClr val="FFFFFF"/>
+                    </a:solidFill>
+                  </a:tcPr>
+                </a:tc>
+              </a:tr>
+              <a:tr h="485775">
+                <a:tc>
+                  <a:txBody>
+                    <a:bodyPr lIns="114300" tIns="114300" rIns="114300" bIns="114300"/>
+                    <a:lstStyle/>
+                    <a:p>
+                      <a:r>
+                        <a:rPr sz="1650" b="0">
+                          <a:solidFill>
+                            <a:srgbClr val="172738"/>
+                          </a:solidFill>
+                          <a:latin typeface="Apple SD Gothic Neo"/>
+                          <a:ea typeface="Apple SD Gothic Neo"/>
+                          <a:cs typeface="Apple SD Gothic Neo"/>
+                        </a:rPr>
+                        <a:t>Short</a:t>
+                      </a:r>
+                    </a:p>
+                  </a:txBody>
+                  <a:tcPr marL="133350" marR="133350" marT="95250" marB="95250" anchor="ctr">
+                    <a:solidFill>
+                      <a:srgbClr val="F1F5F8"/>
+                    </a:solidFill>
+                  </a:tcPr>
+                </a:tc>
+                <a:tc>
+                  <a:txBody>
+                    <a:bodyPr lIns="114300" tIns="114300" rIns="114300" bIns="114300"/>
+                    <a:lstStyle/>
+                    <a:p>
+                      <a:r>
+                        <a:rPr sz="1650" b="0">
+                          <a:solidFill>
+                            <a:srgbClr val="172738"/>
+                          </a:solidFill>
+                          <a:latin typeface="Apple SD Gothic Neo"/>
+                          <a:ea typeface="Apple SD Gothic Neo"/>
+                          <a:cs typeface="Apple SD Gothic Neo"/>
+                        </a:rPr>
+                        <a:t>2.00</a:t>
+                      </a:r>
+                    </a:p>
+                  </a:txBody>
+                  <a:tcPr marL="133350" marR="133350" marT="95250" marB="95250" anchor="ctr">
+                    <a:solidFill>
+                      <a:srgbClr val="F1F5F8"/>
+                    </a:solidFill>
+                  </a:tcPr>
+                </a:tc>
+                <a:tc>
+                  <a:txBody>
+                    <a:bodyPr lIns="114300" tIns="114300" rIns="114300" bIns="114300"/>
+                    <a:lstStyle/>
+                    <a:p>
+                      <a:r>
+                        <a:rPr sz="1650" b="0">
+                          <a:solidFill>
+                            <a:srgbClr val="172738"/>
+                          </a:solidFill>
+                          <a:latin typeface="Apple SD Gothic Neo"/>
+                          <a:ea typeface="Apple SD Gothic Neo"/>
+                          <a:cs typeface="Apple SD Gothic Neo"/>
+                        </a:rPr>
+                        <a:t>같은 Group의 q+1, 목적지 q가 홀수</a:t>
+                      </a:r>
+                    </a:p>
+                  </a:txBody>
+                  <a:tcPr marL="133350" marR="133350" marT="95250" marB="95250" anchor="ctr">
+                    <a:solidFill>
+                      <a:srgbClr val="F1F5F8"/>
+                    </a:solidFill>
+                  </a:tcPr>
+                </a:tc>
+                <a:tc>
+                  <a:txBody>
+                    <a:bodyPr lIns="114300" tIns="114300" rIns="114300" bIns="114300"/>
+                    <a:lstStyle/>
+                    <a:p>
+                      <a:r>
+                        <a:rPr sz="1650" b="0">
+                          <a:solidFill>
+                            <a:srgbClr val="172738"/>
+                          </a:solidFill>
+                          <a:latin typeface="Apple SD Gothic Neo"/>
+                          <a:ea typeface="Apple SD Gothic Neo"/>
+                          <a:cs typeface="Apple SD Gothic Neo"/>
+                        </a:rPr>
+                        <a:t>q0→1: 같은 SSL의 E/O 0→1</a:t>
+                      </a:r>
+                    </a:p>
+                  </a:txBody>
+                  <a:tcPr marL="133350" marR="133350" marT="95250" marB="95250" anchor="ctr">
+                    <a:solidFill>
+                      <a:srgbClr val="F1F5F8"/>
+                    </a:solidFill>
+                  </a:tcPr>
+                </a:tc>
+              </a:tr>
+              <a:tr h="485775">
+                <a:tc>
+                  <a:txBody>
+                    <a:bodyPr lIns="114300" tIns="114300" rIns="114300" bIns="114300"/>
+                    <a:lstStyle/>
+                    <a:p>
+                      <a:r>
+                        <a:rPr sz="1650" b="0">
+                          <a:solidFill>
+                            <a:srgbClr val="172738"/>
+                          </a:solidFill>
+                          <a:latin typeface="Apple SD Gothic Neo"/>
+                          <a:ea typeface="Apple SD Gothic Neo"/>
+                          <a:cs typeface="Apple SD Gothic Neo"/>
+                        </a:rPr>
+                        <a:t>Mid</a:t>
+                      </a:r>
+                    </a:p>
+                  </a:txBody>
+                  <a:tcPr marL="133350" marR="133350" marT="95250" marB="95250" anchor="ctr">
+                    <a:solidFill>
+                      <a:srgbClr val="FFFFFF"/>
+                    </a:solidFill>
+                  </a:tcPr>
+                </a:tc>
+                <a:tc>
+                  <a:txBody>
+                    <a:bodyPr lIns="114300" tIns="114300" rIns="114300" bIns="114300"/>
+                    <a:lstStyle/>
+                    <a:p>
+                      <a:r>
+                        <a:rPr sz="1650" b="0">
+                          <a:solidFill>
+                            <a:srgbClr val="172738"/>
+                          </a:solidFill>
+                          <a:latin typeface="Apple SD Gothic Neo"/>
+                          <a:ea typeface="Apple SD Gothic Neo"/>
+                          <a:cs typeface="Apple SD Gothic Neo"/>
+                        </a:rPr>
+                        <a:t>2.08</a:t>
+                      </a:r>
+                    </a:p>
+                  </a:txBody>
+                  <a:tcPr marL="133350" marR="133350" marT="95250" marB="95250" anchor="ctr">
+                    <a:solidFill>
+                      <a:srgbClr val="FFFFFF"/>
+                    </a:solidFill>
+                  </a:tcPr>
+                </a:tc>
+                <a:tc>
+                  <a:txBody>
+                    <a:bodyPr lIns="114300" tIns="114300" rIns="114300" bIns="114300"/>
+                    <a:lstStyle/>
+                    <a:p>
+                      <a:r>
+                        <a:rPr sz="1650" b="0">
+                          <a:solidFill>
+                            <a:srgbClr val="172738"/>
+                          </a:solidFill>
+                          <a:latin typeface="Apple SD Gothic Neo"/>
+                          <a:ea typeface="Apple SD Gothic Neo"/>
+                          <a:cs typeface="Apple SD Gothic Neo"/>
+                        </a:rPr>
+                        <a:t>같은 Group의 q+1, 목적지 q가 짝수</a:t>
+                      </a:r>
+                    </a:p>
+                  </a:txBody>
+                  <a:tcPr marL="133350" marR="133350" marT="95250" marB="95250" anchor="ctr">
+                    <a:solidFill>
+                      <a:srgbClr val="FFFFFF"/>
+                    </a:solidFill>
+                  </a:tcPr>
+                </a:tc>
+                <a:tc>
+                  <a:txBody>
+                    <a:bodyPr lIns="114300" tIns="114300" rIns="114300" bIns="114300"/>
+                    <a:lstStyle/>
+                    <a:p>
+                      <a:r>
+                        <a:rPr sz="1650" b="0">
+                          <a:solidFill>
+                            <a:srgbClr val="172738"/>
+                          </a:solidFill>
+                          <a:latin typeface="Apple SD Gothic Neo"/>
+                          <a:ea typeface="Apple SD Gothic Neo"/>
+                          <a:cs typeface="Apple SD Gothic Neo"/>
+                        </a:rPr>
+                        <a:t>q1→2: SSL / q23→24: WL</a:t>
+                      </a:r>
+                    </a:p>
+                  </a:txBody>
+                  <a:tcPr marL="133350" marR="133350" marT="95250" marB="95250" anchor="ctr">
+                    <a:solidFill>
+                      <a:srgbClr val="FFFFFF"/>
+                    </a:solidFill>
+                  </a:tcPr>
+                </a:tc>
+              </a:tr>
+              <a:tr h="485775">
+                <a:tc>
+                  <a:txBody>
+                    <a:bodyPr lIns="114300" tIns="114300" rIns="114300" bIns="114300"/>
+                    <a:lstStyle/>
+                    <a:p>
+                      <a:r>
+                        <a:rPr sz="1650" b="0">
+                          <a:solidFill>
+                            <a:srgbClr val="172738"/>
+                          </a:solidFill>
+                          <a:latin typeface="Apple SD Gothic Neo"/>
+                          <a:ea typeface="Apple SD Gothic Neo"/>
+                          <a:cs typeface="Apple SD Gothic Neo"/>
+                        </a:rPr>
+                        <a:t>Long</a:t>
+                      </a:r>
+                    </a:p>
+                  </a:txBody>
+                  <a:tcPr marL="133350" marR="133350" marT="95250" marB="95250" anchor="ctr">
+                    <a:solidFill>
+                      <a:srgbClr val="F1F5F8"/>
+                    </a:solidFill>
+                  </a:tcPr>
+                </a:tc>
+                <a:tc>
+                  <a:txBody>
+                    <a:bodyPr lIns="114300" tIns="114300" rIns="114300" bIns="114300"/>
+                    <a:lstStyle/>
+                    <a:p>
+                      <a:r>
+                        <a:rPr sz="1650" b="0">
+                          <a:solidFill>
+                            <a:srgbClr val="172738"/>
+                          </a:solidFill>
+                          <a:latin typeface="Apple SD Gothic Neo"/>
+                          <a:ea typeface="Apple SD Gothic Neo"/>
+                          <a:cs typeface="Apple SD Gothic Neo"/>
+                        </a:rPr>
+                        <a:t>12.16</a:t>
+                      </a:r>
+                    </a:p>
+                  </a:txBody>
+                  <a:tcPr marL="133350" marR="133350" marT="95250" marB="95250" anchor="ctr">
+                    <a:solidFill>
+                      <a:srgbClr val="F1F5F8"/>
+                    </a:solidFill>
+                  </a:tcPr>
+                </a:tc>
+                <a:tc>
+                  <a:txBody>
+                    <a:bodyPr lIns="114300" tIns="114300" rIns="114300" bIns="114300"/>
+                    <a:lstStyle/>
+                    <a:p>
+                      <a:r>
+                        <a:rPr sz="1650" b="0">
+                          <a:solidFill>
+                            <a:srgbClr val="172738"/>
+                          </a:solidFill>
+                          <a:latin typeface="Apple SD Gothic Neo"/>
+                          <a:ea typeface="Apple SD Gothic Neo"/>
+                          <a:cs typeface="Apple SD Gothic Neo"/>
+                        </a:rPr>
+                        <a:t>같은 Group에서 q+1이 아닌 주소로 이동</a:t>
+                      </a:r>
+                    </a:p>
+                  </a:txBody>
+                  <a:tcPr marL="133350" marR="133350" marT="95250" marB="95250" anchor="ctr">
+                    <a:solidFill>
+                      <a:srgbClr val="F1F5F8"/>
+                    </a:solidFill>
+                  </a:tcPr>
+                </a:tc>
+                <a:tc>
+                  <a:txBody>
+                    <a:bodyPr lIns="114300" tIns="114300" rIns="114300" bIns="114300"/>
+                    <a:lstStyle/>
+                    <a:p>
+                      <a:r>
+                        <a:rPr sz="1650" b="0">
+                          <a:solidFill>
+                            <a:srgbClr val="172738"/>
+                          </a:solidFill>
+                          <a:latin typeface="Apple SD Gothic Neo"/>
+                          <a:ea typeface="Apple SD Gothic Neo"/>
+                          <a:cs typeface="Apple SD Gothic Neo"/>
+                        </a:rPr>
+                        <a:t>q0→2 또는 q3→1</a:t>
+                      </a:r>
+                    </a:p>
+                  </a:txBody>
+                  <a:tcPr marL="133350" marR="133350" marT="95250" marB="95250" anchor="ctr">
+                    <a:solidFill>
+                      <a:srgbClr val="F1F5F8"/>
+                    </a:solidFill>
+                  </a:tcPr>
+                </a:tc>
+              </a:tr>
+              <a:tr h="485775">
+                <a:tc>
+                  <a:txBody>
+                    <a:bodyPr lIns="114300" tIns="114300" rIns="114300" bIns="114300"/>
+                    <a:lstStyle/>
+                    <a:p>
+                      <a:r>
+                        <a:rPr sz="1650" b="0">
+                          <a:solidFill>
+                            <a:srgbClr val="172738"/>
+                          </a:solidFill>
+                          <a:latin typeface="Apple SD Gothic Neo"/>
+                          <a:ea typeface="Apple SD Gothic Neo"/>
+                          <a:cs typeface="Apple SD Gothic Neo"/>
+                        </a:rPr>
+                        <a:t>Group</a:t>
+                      </a:r>
+                    </a:p>
+                  </a:txBody>
+                  <a:tcPr marL="133350" marR="133350" marT="95250" marB="95250" anchor="ctr">
+                    <a:solidFill>
+                      <a:srgbClr val="FFFFFF"/>
+                    </a:solidFill>
+                  </a:tcPr>
+                </a:tc>
+                <a:tc>
+                  <a:txBody>
+                    <a:bodyPr lIns="114300" tIns="114300" rIns="114300" bIns="114300"/>
+                    <a:lstStyle/>
+                    <a:p>
+                      <a:r>
+                        <a:rPr sz="1650" b="0">
+                          <a:solidFill>
+                            <a:srgbClr val="172738"/>
+                          </a:solidFill>
+                          <a:latin typeface="Apple SD Gothic Neo"/>
+                          <a:ea typeface="Apple SD Gothic Neo"/>
+                          <a:cs typeface="Apple SD Gothic Neo"/>
+                        </a:rPr>
+                        <a:t>20.69</a:t>
+                      </a:r>
+                    </a:p>
+                  </a:txBody>
+                  <a:tcPr marL="133350" marR="133350" marT="95250" marB="95250" anchor="ctr">
+                    <a:solidFill>
+                      <a:srgbClr val="FFFFFF"/>
+                    </a:solidFill>
+                  </a:tcPr>
+                </a:tc>
+                <a:tc>
+                  <a:txBody>
+                    <a:bodyPr lIns="114300" tIns="114300" rIns="114300" bIns="114300"/>
+                    <a:lstStyle/>
+                    <a:p>
+                      <a:r>
+                        <a:rPr sz="1650" b="0">
+                          <a:solidFill>
+                            <a:srgbClr val="172738"/>
+                          </a:solidFill>
+                          <a:latin typeface="Apple SD Gothic Neo"/>
+                          <a:ea typeface="Apple SD Gothic Neo"/>
+                          <a:cs typeface="Apple SD Gothic Neo"/>
+                        </a:rPr>
+                        <a:t>직전 sensing과 다른 Group으로 이동</a:t>
+                      </a:r>
+                    </a:p>
+                  </a:txBody>
+                  <a:tcPr marL="133350" marR="133350" marT="95250" marB="95250" anchor="ctr">
+                    <a:solidFill>
+                      <a:srgbClr val="FFFFFF"/>
+                    </a:solidFill>
+                  </a:tcPr>
+                </a:tc>
+                <a:tc>
+                  <a:txBody>
+                    <a:bodyPr lIns="114300" tIns="114300" rIns="114300" bIns="114300"/>
+                    <a:lstStyle/>
+                    <a:p>
+                      <a:r>
+                        <a:rPr sz="1650" b="0">
+                          <a:solidFill>
+                            <a:srgbClr val="172738"/>
+                          </a:solidFill>
+                          <a:latin typeface="Apple SD Gothic Neo"/>
+                          <a:ea typeface="Apple SD Gothic Neo"/>
+                          <a:cs typeface="Apple SD Gothic Neo"/>
+                        </a:rPr>
+                        <a:t>q10103→10104: Group 0→1</a:t>
+                      </a:r>
+                    </a:p>
+                  </a:txBody>
+                  <a:tcPr marL="133350" marR="133350" marT="95250" marB="95250" anchor="ctr">
+                    <a:solidFill>
+                      <a:srgbClr val="FFFFFF"/>
+                    </a:solidFill>
+                  </a:tcPr>
+                </a:tc>
+              </a:tr>
+            </a:tbl>
+          </a:graphicData>
+        </a:graphic>
+      </p:graphicFrame>
+      <p:sp>
+        <p:nvSpPr>
+          <p:cNvPr id="6" name="tr-sequence">
+            <a:extLst xmlns:a="http://schemas.openxmlformats.org/drawingml/2006/main">
+              <a:ext uri="{FF2B5EF4-FFF2-40B4-BE49-F238E27FC236}">
+                <a16:creationId xmlns:a16="http://schemas.microsoft.com/office/drawing/2014/main" id="{1090B18F-6246-4E06-BA63-F47380D168AE}"/>
+              </a:ext>
+            </a:extLst>
+          </p:cNvPr>
+          <p:cNvSpPr>
+            <a:spLocks xmlns:a="http://schemas.openxmlformats.org/drawingml/2006/main" noGrp="1"/>
+          </p:cNvSpPr>
+          <p:nvPr/>
+        </p:nvSpPr>
+        <p:spPr>
+          <a:xfrm xmlns:a="http://schemas.openxmlformats.org/drawingml/2006/main">
+            <a:off x="571500" y="4914900"/>
+            <a:ext cx="11049000" cy="323850"/>
+          </a:xfrm>
+          <a:prstGeom xmlns:a="http://schemas.openxmlformats.org/drawingml/2006/main" prst="rect">
+            <a:avLst/>
+          </a:prstGeom>
+          <a:noFill xmlns:a="http://schemas.openxmlformats.org/drawingml/2006/main"/>
+          <a:ln xmlns:a="http://schemas.openxmlformats.org/drawingml/2006/main" w="0">
+            <a:noFill/>
+          </a:ln>
+        </p:spPr>
+        <p:txBody>
+          <a:bodyPr xmlns:a="http://schemas.openxmlformats.org/drawingml/2006/main" wrap="square" lIns="0" tIns="0" rIns="0" bIns="0" anchor="t">
+            <a:noAutofit/>
+          </a:bodyPr>
+          <a:lstStyle xmlns:a="http://schemas.openxmlformats.org/drawingml/2006/main">
+            <a:defPPr>
+              <a:defRPr sz="1950" b="1">
+                <a:solidFill>
+                  <a:srgbClr val="126DCA"/>
+                </a:solidFill>
+                <a:latin typeface="Apple SD Gothic Neo"/>
+                <a:ea typeface="Apple SD Gothic Neo"/>
+                <a:cs typeface="Apple SD Gothic Neo"/>
+              </a:defRPr>
+            </a:defPPr>
+          </a:lstStyle>
+          <a:p xmlns:a="http://schemas.openxmlformats.org/drawingml/2006/main">
+            <a:pPr>
+              <a:defRPr sz="1950" b="1">
+                <a:solidFill>
+                  <a:srgbClr val="126DCA"/>
+                </a:solidFill>
+                <a:latin typeface="Apple SD Gothic Neo"/>
+                <a:ea typeface="Apple SD Gothic Neo"/>
+                <a:cs typeface="Apple SD Gothic Neo"/>
+              </a:defRPr>
+            </a:pPr>
+            <a:r>
+              <a:rPr sz="1950" b="1">
+                <a:solidFill>
+                  <a:srgbClr val="126DCA"/>
+                </a:solidFill>
+                <a:latin typeface="Apple SD Gothic Neo"/>
+                <a:ea typeface="Apple SD Gothic Neo"/>
+                <a:cs typeface="Apple SD Gothic Neo"/>
+              </a:rPr>
+              <a:t>연속 예: q0 (First) → q1 (Short) → q2 (Mid) → q3 (Short) → …</a:t>
+            </a:r>
+          </a:p>
+        </p:txBody>
+      </p:sp>
+      <p:sp>
+        <p:nvSpPr>
+          <p:cNvPr id="7" name="tr-initial-cost">
+            <a:extLst xmlns:a="http://schemas.openxmlformats.org/drawingml/2006/main">
+              <a:ext uri="{FF2B5EF4-FFF2-40B4-BE49-F238E27FC236}">
+                <a16:creationId xmlns:a16="http://schemas.microsoft.com/office/drawing/2014/main" id="{76DCA64D-6986-4539-A0A6-5C3362CDBC6C}"/>
+              </a:ext>
+            </a:extLst>
+          </p:cNvPr>
+          <p:cNvSpPr>
+            <a:spLocks xmlns:a="http://schemas.openxmlformats.org/drawingml/2006/main" noGrp="1"/>
+          </p:cNvSpPr>
+          <p:nvPr/>
+        </p:nvSpPr>
+        <p:spPr>
+          <a:xfrm xmlns:a="http://schemas.openxmlformats.org/drawingml/2006/main">
+            <a:off x="571500" y="5343525"/>
+            <a:ext cx="11049000" cy="295275"/>
+          </a:xfrm>
+          <a:prstGeom xmlns:a="http://schemas.openxmlformats.org/drawingml/2006/main" prst="rect">
+            <a:avLst/>
+          </a:prstGeom>
+          <a:noFill xmlns:a="http://schemas.openxmlformats.org/drawingml/2006/main"/>
+          <a:ln xmlns:a="http://schemas.openxmlformats.org/drawingml/2006/main" w="0">
+            <a:noFill/>
+          </a:ln>
+        </p:spPr>
+        <p:txBody>
+          <a:bodyPr xmlns:a="http://schemas.openxmlformats.org/drawingml/2006/main" wrap="square" lIns="0" tIns="0" rIns="0" bIns="0" anchor="t">
+            <a:noAutofit/>
+          </a:bodyPr>
+          <a:lstStyle xmlns:a="http://schemas.openxmlformats.org/drawingml/2006/main">
+            <a:defPPr>
+              <a:defRPr sz="1725" b="0">
+                <a:solidFill>
+                  <a:srgbClr val="586875"/>
+                </a:solidFill>
+                <a:latin typeface="Apple SD Gothic Neo"/>
+                <a:ea typeface="Apple SD Gothic Neo"/>
+                <a:cs typeface="Apple SD Gothic Neo"/>
+              </a:defRPr>
+            </a:defPPr>
+          </a:lstStyle>
+          <a:p xmlns:a="http://schemas.openxmlformats.org/drawingml/2006/main">
+            <a:pPr>
+              <a:defRPr sz="1725" b="0">
+                <a:solidFill>
+                  <a:srgbClr val="586875"/>
+                </a:solidFill>
+                <a:latin typeface="Apple SD Gothic Neo"/>
+                <a:ea typeface="Apple SD Gothic Neo"/>
+                <a:cs typeface="Apple SD Gothic Neo"/>
+              </a:defRPr>
+            </a:pPr>
+            <a:r>
+              <a:rPr sz="1725" b="0">
+                <a:solidFill>
+                  <a:srgbClr val="586875"/>
+                </a:solidFill>
+                <a:latin typeface="Apple SD Gothic Neo"/>
+                <a:ea typeface="Apple SD Gothic Neo"/>
+                <a:cs typeface="Apple SD Gothic Neo"/>
+              </a:rPr>
+              <a:t>First / Group = 1st Long 17.52 + tRRC 3.17 = 20.69µs로 설정한 모델입니다.</a:t>
+            </a:r>
+          </a:p>
+        </p:txBody>
+      </p:sp>
+      <p:sp>
+        <p:nvSpPr>
+          <p:cNvPr id="8" name="tr-page-buffer">
+            <a:extLst xmlns:a="http://schemas.openxmlformats.org/drawingml/2006/main">
+              <a:ext uri="{FF2B5EF4-FFF2-40B4-BE49-F238E27FC236}">
+                <a16:creationId xmlns:a16="http://schemas.microsoft.com/office/drawing/2014/main" id="{7CFFB782-43E8-48DC-B74C-DB2EF52C63AB}"/>
+              </a:ext>
+            </a:extLst>
+          </p:cNvPr>
+          <p:cNvSpPr>
+            <a:spLocks xmlns:a="http://schemas.openxmlformats.org/drawingml/2006/main" noGrp="1"/>
+          </p:cNvSpPr>
+          <p:nvPr/>
+        </p:nvSpPr>
+        <p:spPr>
+          <a:xfrm xmlns:a="http://schemas.openxmlformats.org/drawingml/2006/main">
+            <a:off x="571500" y="5686425"/>
+            <a:ext cx="11049000" cy="523875"/>
+          </a:xfrm>
+          <a:prstGeom xmlns:a="http://schemas.openxmlformats.org/drawingml/2006/main" prst="rect">
+            <a:avLst/>
+          </a:prstGeom>
+          <a:noFill xmlns:a="http://schemas.openxmlformats.org/drawingml/2006/main"/>
+          <a:ln xmlns:a="http://schemas.openxmlformats.org/drawingml/2006/main" w="0">
+            <a:noFill/>
+          </a:ln>
+        </p:spPr>
+        <p:txBody>
+          <a:bodyPr xmlns:a="http://schemas.openxmlformats.org/drawingml/2006/main" wrap="square" lIns="0" tIns="0" rIns="0" bIns="0" anchor="t">
+            <a:noAutofit/>
+          </a:bodyPr>
+          <a:lstStyle xmlns:a="http://schemas.openxmlformats.org/drawingml/2006/main">
+            <a:defPPr>
+              <a:defRPr sz="1650" b="0">
+                <a:solidFill>
+                  <a:srgbClr val="172738"/>
+                </a:solidFill>
+                <a:latin typeface="Apple SD Gothic Neo"/>
+                <a:ea typeface="Apple SD Gothic Neo"/>
+                <a:cs typeface="Apple SD Gothic Neo"/>
+              </a:defRPr>
+            </a:defPPr>
+          </a:lstStyle>
+          <a:p xmlns:a="http://schemas.openxmlformats.org/drawingml/2006/main">
+            <a:pPr>
+              <a:defRPr sz="1650" b="0">
+                <a:solidFill>
+                  <a:srgbClr val="172738"/>
+                </a:solidFill>
+                <a:latin typeface="Apple SD Gothic Neo"/>
+                <a:ea typeface="Apple SD Gothic Neo"/>
+                <a:cs typeface="Apple SD Gothic Neo"/>
+              </a:defRPr>
+            </a:pPr>
+            <a:r>
+              <a:rPr sz="1650" b="0">
+                <a:solidFill>
+                  <a:srgbClr val="172738"/>
+                </a:solidFill>
+                <a:latin typeface="Apple SD Gothic Neo"/>
+                <a:ea typeface="Apple SD Gothic Neo"/>
+                <a:cs typeface="Apple SD Gothic Neo"/>
+              </a:rPr>
+              <a:t>Plane page buffer 적중: sensing 생략, 출력 명령·Data·ECC는 수행합니다.</a:t>
+            </a:r>
+          </a:p>
+          <a:p xmlns:a="http://schemas.openxmlformats.org/drawingml/2006/main">
+            <a:pPr>
+              <a:defRPr sz="1650" b="0">
+                <a:solidFill>
+                  <a:srgbClr val="172738"/>
+                </a:solidFill>
+                <a:latin typeface="Apple SD Gothic Neo"/>
+                <a:ea typeface="Apple SD Gothic Neo"/>
+                <a:cs typeface="Apple SD Gothic Neo"/>
+              </a:defRPr>
+            </a:pPr>
+            <a:r>
+              <a:rPr sz="1650" b="0">
+                <a:solidFill>
+                  <a:srgbClr val="172738"/>
+                </a:solidFill>
+                <a:latin typeface="Apple SD Gothic Neo"/>
+                <a:ea typeface="Apple SD Gothic Neo"/>
+                <a:cs typeface="Apple SD Gothic Neo"/>
+              </a:rPr>
+              <a:t>Controller buffer에도 없고 page buffer가 교체되었으면, 재방문 때 tR을 다시 판정합니다.</a:t>
+            </a:r>
+          </a:p>
+        </p:txBody>
+      </p:sp>
+    </p:spTree>
+    <p:extLst>
+      <p:ext uri="{BB962C8B-B14F-4D97-AF65-F5344CB8AC3E}">
+        <p14:creationId xmlns:p14="http://schemas.microsoft.com/office/powerpoint/2010/main" val="989998066"/>
+      </p:ext>
+    </p:extLst>
+  </p:cSld>
+</p:sld>
+</file>
+
+<file path=ppt/slides/slide3.xml><?xml version="1.0" encoding="utf-8"?>
+<p:sld xmlns:p="http://schemas.openxmlformats.org/presentationml/2006/main">
+  <p:cSld>
+    <p:bg>
+      <p:bgPr>
+        <a:solidFill xmlns:a="http://schemas.openxmlformats.org/drawingml/2006/main">
+          <a:srgbClr val="FFFFFF"/>
+        </a:solidFill>
+      </p:bgPr>
+    </p:bg>
+    <p:spTree>
+      <p:nvGrpSpPr>
+        <p:cNvPr id="1" name=""/>
+        <p:cNvGrpSpPr/>
+        <p:nvPr/>
+      </p:nvGrpSpPr>
+      <p:grpSpPr>
+        <a:xfrm xmlns:a="http://schemas.openxmlformats.org/drawingml/2006/main"/>
+      </p:grpSpPr>
+      <p:sp>
+        <p:nvSpPr>
+          <p:cNvPr id="7" name="title">
+            <a:extLst xmlns:a="http://schemas.openxmlformats.org/drawingml/2006/main">
+              <a:ext uri="{FF2B5EF4-FFF2-40B4-BE49-F238E27FC236}">
+                <a16:creationId xmlns:a16="http://schemas.microsoft.com/office/drawing/2014/main" id="{D1B42368-404F-430C-B212-B20EDDEE20B8}"/>
+              </a:ext>
+            </a:extLst>
+          </p:cNvPr>
+          <p:cNvSpPr>
+            <a:spLocks xmlns:a="http://schemas.openxmlformats.org/drawingml/2006/main" noGrp="1"/>
+          </p:cNvSpPr>
+          <p:nvPr/>
+        </p:nvSpPr>
+        <p:spPr>
+          <a:xfrm xmlns:a="http://schemas.openxmlformats.org/drawingml/2006/main">
+            <a:off x="533400" y="438150"/>
+            <a:ext cx="11125200" cy="628650"/>
+          </a:xfrm>
+          <a:prstGeom xmlns:a="http://schemas.openxmlformats.org/drawingml/2006/main" prst="rect">
+            <a:avLst/>
+          </a:prstGeom>
+          <a:noFill xmlns:a="http://schemas.openxmlformats.org/drawingml/2006/main"/>
+          <a:ln xmlns:a="http://schemas.openxmlformats.org/drawingml/2006/main" w="0">
+            <a:noFill/>
+          </a:ln>
+        </p:spPr>
+        <p:txBody>
+          <a:bodyPr xmlns:a="http://schemas.openxmlformats.org/drawingml/2006/main" wrap="square" lIns="0" tIns="0" rIns="0" bIns="0" anchor="t">
+            <a:noAutofit/>
+          </a:bodyPr>
+          <a:lstStyle xmlns:a="http://schemas.openxmlformats.org/drawingml/2006/main">
+            <a:defPPr>
+              <a:defRPr sz="3300" b="1">
+                <a:solidFill>
+                  <a:srgbClr val="172738"/>
+                </a:solidFill>
+                <a:latin typeface="Apple SD Gothic Neo"/>
+                <a:ea typeface="Apple SD Gothic Neo"/>
+                <a:cs typeface="Apple SD Gothic Neo"/>
+              </a:defRPr>
+            </a:defPPr>
+          </a:lstStyle>
+          <a:p xmlns:a="http://schemas.openxmlformats.org/drawingml/2006/main">
+            <a:pPr>
+              <a:defRPr sz="3300" b="1">
+                <a:solidFill>
+                  <a:srgbClr val="172738"/>
+                </a:solidFill>
+                <a:latin typeface="Apple SD Gothic Neo"/>
+                <a:ea typeface="Apple SD Gothic Neo"/>
+                <a:cs typeface="Apple SD Gothic Neo"/>
+              </a:defRPr>
+            </a:pPr>
+            <a:r>
+              <a:rPr sz="3300" b="1">
+                <a:solidFill>
+                  <a:srgbClr val="172738"/>
+                </a:solidFill>
+                <a:latin typeface="Apple SD Gothic Neo"/>
+                <a:ea typeface="Apple SD Gothic Neo"/>
+                <a:cs typeface="Apple SD Gothic Neo"/>
+              </a:rPr>
+              <a:t>전체 구조와 데이터 흐름</a:t>
+            </a:r>
+          </a:p>
+        </p:txBody>
+      </p:sp>
+      <p:sp>
+        <p:nvSpPr>
+          <p:cNvPr id="2" name="subtitle">
+            <a:extLst xmlns:a="http://schemas.openxmlformats.org/drawingml/2006/main">
+              <a:ext uri="{FF2B5EF4-FFF2-40B4-BE49-F238E27FC236}">
+                <a16:creationId xmlns:a16="http://schemas.microsoft.com/office/drawing/2014/main" id="{13D12332-3CAD-4B5D-8617-229613F891C9}"/>
+              </a:ext>
+            </a:extLst>
+          </p:cNvPr>
+          <p:cNvSpPr>
+            <a:spLocks xmlns:a="http://schemas.openxmlformats.org/drawingml/2006/main" noGrp="1"/>
+          </p:cNvSpPr>
+          <p:nvPr/>
+        </p:nvSpPr>
+        <p:spPr>
+          <a:xfrm xmlns:a="http://schemas.openxmlformats.org/drawingml/2006/main">
+            <a:off x="552450" y="1104900"/>
+            <a:ext cx="11087100" cy="571500"/>
+          </a:xfrm>
+          <a:prstGeom xmlns:a="http://schemas.openxmlformats.org/drawingml/2006/main" prst="rect">
+            <a:avLst/>
+          </a:prstGeom>
+          <a:noFill xmlns:a="http://schemas.openxmlformats.org/drawingml/2006/main"/>
+          <a:ln xmlns:a="http://schemas.openxmlformats.org/drawingml/2006/main" w="0">
+            <a:noFill/>
+          </a:ln>
+        </p:spPr>
+        <p:txBody>
+          <a:bodyPr xmlns:a="http://schemas.openxmlformats.org/drawingml/2006/main" wrap="square" lIns="0" tIns="0" rIns="0" bIns="0" anchor="t">
+            <a:noAutofit/>
+          </a:bodyPr>
+          <a:lstStyle xmlns:a="http://schemas.openxmlformats.org/drawingml/2006/main">
+            <a:defPPr>
+              <a:defRPr sz="1800" b="0">
+                <a:solidFill>
+                  <a:srgbClr val="586875"/>
+                </a:solidFill>
+                <a:latin typeface="Apple SD Gothic Neo"/>
+                <a:ea typeface="Apple SD Gothic Neo"/>
+                <a:cs typeface="Apple SD Gothic Neo"/>
+              </a:defRPr>
+            </a:defPPr>
+          </a:lstStyle>
+          <a:p xmlns:a="http://schemas.openxmlformats.org/drawingml/2006/main">
+            <a:pPr>
+              <a:defRPr sz="1800" b="0">
+                <a:solidFill>
+                  <a:srgbClr val="586875"/>
+                </a:solidFill>
+                <a:latin typeface="Apple SD Gothic Neo"/>
+                <a:ea typeface="Apple SD Gothic Neo"/>
+                <a:cs typeface="Apple SD Gothic Neo"/>
+              </a:defRPr>
+            </a:pPr>
+            <a:r>
+              <a:rPr sz="1800" b="0">
+                <a:solidFill>
+                  <a:srgbClr val="586875"/>
+                </a:solidFill>
+                <a:latin typeface="Apple SD Gothic Neo"/>
+                <a:ea typeface="Apple SD Gothic Neo"/>
+                <a:cs typeface="Apple SD Gothic Neo"/>
+              </a:rPr>
+              <a:t>4개의 독립 Port가 4채널 전체를 공유하며, 읽기 주소가 Channel과 Plane을 결정합니다.</a:t>
+            </a:r>
+          </a:p>
+        </p:txBody>
+      </p:sp>
+      <p:sp>
+        <p:nvSpPr>
+          <p:cNvPr id="3" name="footer">
+            <a:extLst xmlns:a="http://schemas.openxmlformats.org/drawingml/2006/main">
+              <a:ext uri="{FF2B5EF4-FFF2-40B4-BE49-F238E27FC236}">
+                <a16:creationId xmlns:a16="http://schemas.microsoft.com/office/drawing/2014/main" id="{DB6EA602-31BF-4BC6-80C3-208BC34BF06E}"/>
+              </a:ext>
+            </a:extLst>
+          </p:cNvPr>
+          <p:cNvSpPr>
+            <a:spLocks xmlns:a="http://schemas.openxmlformats.org/drawingml/2006/main" noGrp="1"/>
+          </p:cNvSpPr>
+          <p:nvPr/>
+        </p:nvSpPr>
+        <p:spPr>
+          <a:xfrm xmlns:a="http://schemas.openxmlformats.org/drawingml/2006/main">
+            <a:off x="533400" y="6419850"/>
+            <a:ext cx="10477500" cy="257175"/>
+          </a:xfrm>
+          <a:prstGeom xmlns:a="http://schemas.openxmlformats.org/drawingml/2006/main" prst="rect">
+            <a:avLst/>
+          </a:prstGeom>
+          <a:noFill xmlns:a="http://schemas.openxmlformats.org/drawingml/2006/main"/>
+          <a:ln xmlns:a="http://schemas.openxmlformats.org/drawingml/2006/main" w="0">
+            <a:noFill/>
+          </a:ln>
+        </p:spPr>
+        <p:txBody>
+          <a:bodyPr xmlns:a="http://schemas.openxmlformats.org/drawingml/2006/main" wrap="square" lIns="0" tIns="0" rIns="0" bIns="0" anchor="t">
+            <a:noAutofit/>
+          </a:bodyPr>
+          <a:lstStyle xmlns:a="http://schemas.openxmlformats.org/drawingml/2006/main">
+            <a:defPPr>
+              <a:defRPr sz="1200" b="0">
+                <a:solidFill>
+                  <a:srgbClr val="586875"/>
+                </a:solidFill>
+                <a:latin typeface="Apple SD Gothic Neo"/>
+                <a:ea typeface="Apple SD Gothic Neo"/>
+                <a:cs typeface="Apple SD Gothic Neo"/>
+              </a:defRPr>
+            </a:defPPr>
+          </a:lstStyle>
+          <a:p xmlns:a="http://schemas.openxmlformats.org/drawingml/2006/main">
+            <a:pPr>
+              <a:defRPr sz="1200" b="0">
+                <a:solidFill>
+                  <a:srgbClr val="586875"/>
+                </a:solidFill>
+                <a:latin typeface="Apple SD Gothic Neo"/>
+                <a:ea typeface="Apple SD Gothic Neo"/>
+                <a:cs typeface="Apple SD Gothic Neo"/>
+              </a:defRPr>
+            </a:pPr>
+            <a:r>
+              <a:rPr sz="1200" b="0">
+                <a:solidFill>
+                  <a:srgbClr val="586875"/>
+                </a:solidFill>
+                <a:latin typeface="Apple SD Gothic Neo"/>
+                <a:ea typeface="Apple SD Gothic Neo"/>
+                <a:cs typeface="Apple SD Gothic Neo"/>
+              </a:rPr>
+              <a:t>성능 개선 핵심 3가지    2026-10-11    현재 대표 실행 기준: 총 64 Plane, PF OFF</a:t>
+            </a:r>
+          </a:p>
+        </p:txBody>
+      </p:sp>
+      <p:sp>
+        <p:nvSpPr>
+          <p:cNvPr id="4" name="page">
+            <a:extLst xmlns:a="http://schemas.openxmlformats.org/drawingml/2006/main">
+              <a:ext uri="{FF2B5EF4-FFF2-40B4-BE49-F238E27FC236}">
+                <a16:creationId xmlns:a16="http://schemas.microsoft.com/office/drawing/2014/main" id="{E1875005-45AD-4592-AA31-E97ED1EA604D}"/>
+              </a:ext>
+            </a:extLst>
+          </p:cNvPr>
+          <p:cNvSpPr>
+            <a:spLocks xmlns:a="http://schemas.openxmlformats.org/drawingml/2006/main" noGrp="1"/>
+          </p:cNvSpPr>
+          <p:nvPr/>
+        </p:nvSpPr>
+        <p:spPr>
+          <a:xfrm xmlns:a="http://schemas.openxmlformats.org/drawingml/2006/main">
+            <a:off x="11144250" y="6419850"/>
+            <a:ext cx="495300" cy="257175"/>
+          </a:xfrm>
+          <a:prstGeom xmlns:a="http://schemas.openxmlformats.org/drawingml/2006/main" prst="rect">
+            <a:avLst/>
+          </a:prstGeom>
+          <a:noFill xmlns:a="http://schemas.openxmlformats.org/drawingml/2006/main"/>
+          <a:ln xmlns:a="http://schemas.openxmlformats.org/drawingml/2006/main" w="0">
+            <a:noFill/>
+          </a:ln>
+        </p:spPr>
+        <p:txBody>
+          <a:bodyPr xmlns:a="http://schemas.openxmlformats.org/drawingml/2006/main" wrap="square" lIns="0" tIns="0" rIns="0" bIns="0" anchor="t">
+            <a:noAutofit/>
+          </a:bodyPr>
+          <a:lstStyle xmlns:a="http://schemas.openxmlformats.org/drawingml/2006/main">
+            <a:defPPr>
+              <a:defRPr sz="1200" b="0">
+                <a:solidFill>
+                  <a:srgbClr val="586875"/>
+                </a:solidFill>
+                <a:latin typeface="Apple SD Gothic Neo"/>
+                <a:ea typeface="Apple SD Gothic Neo"/>
+                <a:cs typeface="Apple SD Gothic Neo"/>
+              </a:defRPr>
+            </a:defPPr>
+          </a:lstStyle>
+          <a:p xmlns:a="http://schemas.openxmlformats.org/drawingml/2006/main">
+            <a:pPr>
+              <a:defRPr sz="1200" b="0">
+                <a:solidFill>
+                  <a:srgbClr val="586875"/>
+                </a:solidFill>
+                <a:latin typeface="Apple SD Gothic Neo"/>
+                <a:ea typeface="Apple SD Gothic Neo"/>
+                <a:cs typeface="Apple SD Gothic Neo"/>
+              </a:defRPr>
+            </a:pPr>
+            <a:r>
+              <a:rPr sz="1200" b="0">
+                <a:solidFill>
+                  <a:srgbClr val="586875"/>
+                </a:solidFill>
+                <a:latin typeface="Apple SD Gothic Neo"/>
+                <a:ea typeface="Apple SD Gothic Neo"/>
+                <a:cs typeface="Apple SD Gothic Neo"/>
+              </a:rPr>
+              <a:t>03</a:t>
+            </a:r>
+          </a:p>
+        </p:txBody>
+      </p:sp>
+      <p:graphicFrame>
+        <p:nvGraphicFramePr>
           <p:cNvPr id="5" name="model-architecture">
             <a:extLst xmlns:a="http://schemas.openxmlformats.org/drawingml/2006/main">
               <a:ext uri="{FF2B5EF4-FFF2-40B4-BE49-F238E27FC236}">
-                <a16:creationId xmlns:a16="http://schemas.microsoft.com/office/drawing/2014/main" id="{C2F6A203-D2B2-453B-88E8-D4987CE29E2E}"/>
+                <a16:creationId xmlns:a16="http://schemas.microsoft.com/office/drawing/2014/main" id="{E0592E11-C8F9-4C77-96E9-AE8776A831BC}"/>
               </a:ext>
             </a:extLst>
           </p:cNvPr>
@@ -11291,7 +13461,7 @@
           <p:cNvPr id="6" name="buffer-distinction">
             <a:extLst xmlns:a="http://schemas.openxmlformats.org/drawingml/2006/main">
               <a:ext uri="{FF2B5EF4-FFF2-40B4-BE49-F238E27FC236}">
-                <a16:creationId xmlns:a16="http://schemas.microsoft.com/office/drawing/2014/main" id="{5A74C47E-D1CE-4FB0-A150-B6B4CC096B88}"/>
+                <a16:creationId xmlns:a16="http://schemas.microsoft.com/office/drawing/2014/main" id="{F0CC5625-43A9-4FDC-B8DE-F108E1F59807}"/>
               </a:ext>
             </a:extLst>
           </p:cNvPr>
@@ -11357,14 +13527,14 @@
     </p:spTree>
     <p:extLst>
       <p:ext uri="{BB962C8B-B14F-4D97-AF65-F5344CB8AC3E}">
-        <p14:creationId xmlns:p14="http://schemas.microsoft.com/office/powerpoint/2010/main" val="1632972338"/>
+        <p14:creationId xmlns:p14="http://schemas.microsoft.com/office/powerpoint/2010/main" val="1025754973"/>
       </p:ext>
     </p:extLst>
   </p:cSld>
 </p:sld>
 </file>
 
-<file path=ppt/slides/slide3.xml><?xml version="1.0" encoding="utf-8"?>
+<file path=ppt/slides/slide4.xml><?xml version="1.0" encoding="utf-8"?>
 <p:sld xmlns:p="http://schemas.openxmlformats.org/presentationml/2006/main">
   <p:cSld>
     <p:bg>
@@ -11388,7 +13558,7 @@
           <p:cNvPr id="7" name="title">
             <a:extLst xmlns:a="http://schemas.openxmlformats.org/drawingml/2006/main">
               <a:ext uri="{FF2B5EF4-FFF2-40B4-BE49-F238E27FC236}">
-                <a16:creationId xmlns:a16="http://schemas.microsoft.com/office/drawing/2014/main" id="{3CB67349-7452-4581-A792-BA622011EF23}"/>
+                <a16:creationId xmlns:a16="http://schemas.microsoft.com/office/drawing/2014/main" id="{00547EAD-797D-4048-B801-4870C5524105}"/>
               </a:ext>
             </a:extLst>
           </p:cNvPr>
@@ -11456,7 +13626,7 @@
           <p:cNvPr id="2" name="subtitle">
             <a:extLst xmlns:a="http://schemas.openxmlformats.org/drawingml/2006/main">
               <a:ext uri="{FF2B5EF4-FFF2-40B4-BE49-F238E27FC236}">
-                <a16:creationId xmlns:a16="http://schemas.microsoft.com/office/drawing/2014/main" id="{9EF4BD88-9FAD-4107-AFDB-B825CFCD85E1}"/>
+                <a16:creationId xmlns:a16="http://schemas.microsoft.com/office/drawing/2014/main" id="{CB53B106-8124-4C1C-909D-069012662FF1}"/>
               </a:ext>
             </a:extLst>
           </p:cNvPr>
@@ -11524,7 +13694,7 @@
           <p:cNvPr id="3" name="footer">
             <a:extLst xmlns:a="http://schemas.openxmlformats.org/drawingml/2006/main">
               <a:ext uri="{FF2B5EF4-FFF2-40B4-BE49-F238E27FC236}">
-                <a16:creationId xmlns:a16="http://schemas.microsoft.com/office/drawing/2014/main" id="{AC68943E-0460-4B09-9F6C-7547501327D8}"/>
+                <a16:creationId xmlns:a16="http://schemas.microsoft.com/office/drawing/2014/main" id="{616CA808-1DA2-421E-8496-67FE5B6F3227}"/>
               </a:ext>
             </a:extLst>
           </p:cNvPr>
@@ -11592,7 +13762,7 @@
           <p:cNvPr id="4" name="page">
             <a:extLst xmlns:a="http://schemas.openxmlformats.org/drawingml/2006/main">
               <a:ext uri="{FF2B5EF4-FFF2-40B4-BE49-F238E27FC236}">
-                <a16:creationId xmlns:a16="http://schemas.microsoft.com/office/drawing/2014/main" id="{FF1D7A26-4D06-42A5-AAEF-1425497BBDEE}"/>
+                <a16:creationId xmlns:a16="http://schemas.microsoft.com/office/drawing/2014/main" id="{56324189-5AC2-405E-A400-A88E872FC4F6}"/>
               </a:ext>
             </a:extLst>
           </p:cNvPr>
@@ -11650,7 +13820,7 @@
                 <a:ea typeface="Apple SD Gothic Neo"/>
                 <a:cs typeface="Apple SD Gothic Neo"/>
               </a:rPr>
-              <a:t>03</a:t>
+              <a:t>04</a:t>
             </a:r>
           </a:p>
         </p:txBody>
@@ -11660,7 +13830,7 @@
           <p:cNvPr id="5" name="three-items">
             <a:extLst xmlns:a="http://schemas.openxmlformats.org/drawingml/2006/main">
               <a:ext uri="{FF2B5EF4-FFF2-40B4-BE49-F238E27FC236}">
-                <a16:creationId xmlns:a16="http://schemas.microsoft.com/office/drawing/2014/main" id="{E29E0EE0-F6C2-45D8-907C-270E173C1B2B}"/>
+                <a16:creationId xmlns:a16="http://schemas.microsoft.com/office/drawing/2014/main" id="{D37F62AC-7D68-4764-A1F7-8D9B63838725}"/>
               </a:ext>
             </a:extLst>
           </p:cNvPr>
@@ -12063,7 +14233,7 @@
           <p:cNvPr id="6" name="measurement-caution">
             <a:extLst xmlns:a="http://schemas.openxmlformats.org/drawingml/2006/main">
               <a:ext uri="{FF2B5EF4-FFF2-40B4-BE49-F238E27FC236}">
-                <a16:creationId xmlns:a16="http://schemas.microsoft.com/office/drawing/2014/main" id="{C47ACD8A-6334-4500-B48A-0297FF85D2E6}"/>
+                <a16:creationId xmlns:a16="http://schemas.microsoft.com/office/drawing/2014/main" id="{8BE41EEB-2929-4426-B889-3617A4A270C1}"/>
               </a:ext>
             </a:extLst>
           </p:cNvPr>
@@ -12152,14 +14322,14 @@
     </p:spTree>
     <p:extLst>
       <p:ext uri="{BB962C8B-B14F-4D97-AF65-F5344CB8AC3E}">
-        <p14:creationId xmlns:p14="http://schemas.microsoft.com/office/powerpoint/2010/main" val="424130183"/>
+        <p14:creationId xmlns:p14="http://schemas.microsoft.com/office/powerpoint/2010/main" val="325603626"/>
       </p:ext>
     </p:extLst>
   </p:cSld>
 </p:sld>
 </file>
 
-<file path=ppt/slides/slide4.xml><?xml version="1.0" encoding="utf-8"?>
+<file path=ppt/slides/slide5.xml><?xml version="1.0" encoding="utf-8"?>
 <p:sld xmlns:p="http://schemas.openxmlformats.org/presentationml/2006/main">
   <p:cSld>
     <p:bg>
@@ -12183,7 +14353,7 @@
           <p:cNvPr id="12" name="title">
             <a:extLst xmlns:a="http://schemas.openxmlformats.org/drawingml/2006/main">
               <a:ext uri="{FF2B5EF4-FFF2-40B4-BE49-F238E27FC236}">
-                <a16:creationId xmlns:a16="http://schemas.microsoft.com/office/drawing/2014/main" id="{1B71FBCE-0FD5-4310-8D92-646FF91F7935}"/>
+                <a16:creationId xmlns:a16="http://schemas.microsoft.com/office/drawing/2014/main" id="{6FB6A9ED-F35B-40BA-B5D3-BE55894196F7}"/>
               </a:ext>
             </a:extLst>
           </p:cNvPr>
@@ -12251,7 +14421,7 @@
           <p:cNvPr id="2" name="subtitle">
             <a:extLst xmlns:a="http://schemas.openxmlformats.org/drawingml/2006/main">
               <a:ext uri="{FF2B5EF4-FFF2-40B4-BE49-F238E27FC236}">
-                <a16:creationId xmlns:a16="http://schemas.microsoft.com/office/drawing/2014/main" id="{C3F43632-A8B6-491F-9A95-0A195334B495}"/>
+                <a16:creationId xmlns:a16="http://schemas.microsoft.com/office/drawing/2014/main" id="{0F73B0A0-A42B-4ECA-AAB8-5FD83EDE3E0B}"/>
               </a:ext>
             </a:extLst>
           </p:cNvPr>
@@ -12319,7 +14489,7 @@
           <p:cNvPr id="3" name="footer">
             <a:extLst xmlns:a="http://schemas.openxmlformats.org/drawingml/2006/main">
               <a:ext uri="{FF2B5EF4-FFF2-40B4-BE49-F238E27FC236}">
-                <a16:creationId xmlns:a16="http://schemas.microsoft.com/office/drawing/2014/main" id="{7A132597-700A-4C50-8DB4-06177CDDA6CA}"/>
+                <a16:creationId xmlns:a16="http://schemas.microsoft.com/office/drawing/2014/main" id="{DB0A5464-C554-490F-94F4-8D75C20698AD}"/>
               </a:ext>
             </a:extLst>
           </p:cNvPr>
@@ -12387,7 +14557,7 @@
           <p:cNvPr id="4" name="page">
             <a:extLst xmlns:a="http://schemas.openxmlformats.org/drawingml/2006/main">
               <a:ext uri="{FF2B5EF4-FFF2-40B4-BE49-F238E27FC236}">
-                <a16:creationId xmlns:a16="http://schemas.microsoft.com/office/drawing/2014/main" id="{778AF9CC-A4B1-4681-8692-507924BD3409}"/>
+                <a16:creationId xmlns:a16="http://schemas.microsoft.com/office/drawing/2014/main" id="{338D48F3-91C5-4CFF-96DE-E56F4EEB661D}"/>
               </a:ext>
             </a:extLst>
           </p:cNvPr>
@@ -12445,7 +14615,7 @@
                 <a:ea typeface="Apple SD Gothic Neo"/>
                 <a:cs typeface="Apple SD Gothic Neo"/>
               </a:rPr>
-              <a:t>04</a:t>
+              <a:t>05</a:t>
             </a:r>
           </a:p>
         </p:txBody>
@@ -12455,7 +14625,7 @@
           <p:cNvPr id="5" name="chart-unit">
             <a:extLst xmlns:a="http://schemas.openxmlformats.org/drawingml/2006/main">
               <a:ext uri="{FF2B5EF4-FFF2-40B4-BE49-F238E27FC236}">
-                <a16:creationId xmlns:a16="http://schemas.microsoft.com/office/drawing/2014/main" id="{51CB7F01-4D8F-46FC-A36A-B0014A3D794F}"/>
+                <a16:creationId xmlns:a16="http://schemas.microsoft.com/office/drawing/2014/main" id="{A36803C3-423F-4F6A-B045-8BA822013474}"/>
               </a:ext>
             </a:extLst>
           </p:cNvPr>
@@ -12523,7 +14693,7 @@
           <p:cNvPr id="6" name="Chart">
             <a:extLst xmlns:a="http://schemas.openxmlformats.org/drawingml/2006/main">
               <a:ext uri="{FF2B5EF4-FFF2-40B4-BE49-F238E27FC236}">
-                <a16:creationId xmlns:a16="http://schemas.microsoft.com/office/drawing/2014/main" id="{2D636541-67D9-4843-A417-276FBDED351D}"/>
+                <a16:creationId xmlns:a16="http://schemas.microsoft.com/office/drawing/2014/main" id="{EFD46B6F-C4BB-4533-A1FD-70D9FD9BDF01}"/>
               </a:ext>
             </a:extLst>
           </p:cNvPr>
@@ -12536,7 +14706,7 @@
         </p:xfrm>
         <a:graphic xmlns:a="http://schemas.openxmlformats.org/drawingml/2006/main">
           <a:graphicData uri="http://schemas.openxmlformats.org/drawingml/2006/chart">
-            <c:chart xmlns:r="http://schemas.openxmlformats.org/officeDocument/2006/relationships" xmlns:c="http://schemas.openxmlformats.org/drawingml/2006/chart" r:id="Re2286ec0962e4c4d"/>
+            <c:chart xmlns:r="http://schemas.openxmlformats.org/officeDocument/2006/relationships" xmlns:c="http://schemas.openxmlformats.org/drawingml/2006/chart" r:id="R8dd33dbf06c6430c"/>
           </a:graphicData>
         </a:graphic>
       </p:graphicFrame>
@@ -12545,7 +14715,7 @@
           <p:cNvPr id="7" name="tr-mix">
             <a:extLst xmlns:a="http://schemas.openxmlformats.org/drawingml/2006/main">
               <a:ext uri="{FF2B5EF4-FFF2-40B4-BE49-F238E27FC236}">
-                <a16:creationId xmlns:a16="http://schemas.microsoft.com/office/drawing/2014/main" id="{56705447-5C6C-45A0-B8C2-8B140B47B443}"/>
+                <a16:creationId xmlns:a16="http://schemas.microsoft.com/office/drawing/2014/main" id="{17F63E63-916B-4439-8C6F-713A590040F3}"/>
               </a:ext>
             </a:extLst>
           </p:cNvPr>
@@ -12722,7 +14892,7 @@
           <p:cNvPr id="8" name="mechanism1">
             <a:extLst xmlns:a="http://schemas.openxmlformats.org/drawingml/2006/main">
               <a:ext uri="{FF2B5EF4-FFF2-40B4-BE49-F238E27FC236}">
-                <a16:creationId xmlns:a16="http://schemas.microsoft.com/office/drawing/2014/main" id="{4A4A86AF-9314-41AC-9B8E-23175578FF81}"/>
+                <a16:creationId xmlns:a16="http://schemas.microsoft.com/office/drawing/2014/main" id="{BE781C89-3ECA-4B28-BC68-4804BCDADACA}"/>
               </a:ext>
             </a:extLst>
           </p:cNvPr>
@@ -12790,7 +14960,7 @@
           <p:cNvPr id="9" name="mechanism1-detail">
             <a:extLst xmlns:a="http://schemas.openxmlformats.org/drawingml/2006/main">
               <a:ext uri="{FF2B5EF4-FFF2-40B4-BE49-F238E27FC236}">
-                <a16:creationId xmlns:a16="http://schemas.microsoft.com/office/drawing/2014/main" id="{E3E54CA3-AE11-487D-9DF9-0253F2297883}"/>
+                <a16:creationId xmlns:a16="http://schemas.microsoft.com/office/drawing/2014/main" id="{BE8989D0-7213-4FEC-AE1D-EB60FDFCB596}"/>
               </a:ext>
             </a:extLst>
           </p:cNvPr>
@@ -12927,7 +15097,7 @@
           <p:cNvPr id="10" name="ordering">
             <a:extLst xmlns:a="http://schemas.openxmlformats.org/drawingml/2006/main">
               <a:ext uri="{FF2B5EF4-FFF2-40B4-BE49-F238E27FC236}">
-                <a16:creationId xmlns:a16="http://schemas.microsoft.com/office/drawing/2014/main" id="{8AA28414-D229-408B-8961-7BC303AC3C92}"/>
+                <a16:creationId xmlns:a16="http://schemas.microsoft.com/office/drawing/2014/main" id="{85920509-EB1F-419A-AE96-92DC4DCCC770}"/>
               </a:ext>
             </a:extLst>
           </p:cNvPr>
@@ -13018,7 +15188,7 @@
           <p:cNvPr id="11" name="bounded">
             <a:extLst xmlns:a="http://schemas.openxmlformats.org/drawingml/2006/main">
               <a:ext uri="{FF2B5EF4-FFF2-40B4-BE49-F238E27FC236}">
-                <a16:creationId xmlns:a16="http://schemas.microsoft.com/office/drawing/2014/main" id="{4F24A0B9-448C-45B2-AD96-2E7E50796811}"/>
+                <a16:creationId xmlns:a16="http://schemas.microsoft.com/office/drawing/2014/main" id="{A2C84517-FDA7-43D2-9FDD-B7E2E4402278}"/>
               </a:ext>
             </a:extLst>
           </p:cNvPr>
@@ -13130,14 +15300,14 @@
     </p:spTree>
     <p:extLst>
       <p:ext uri="{BB962C8B-B14F-4D97-AF65-F5344CB8AC3E}">
-        <p14:creationId xmlns:p14="http://schemas.microsoft.com/office/powerpoint/2010/main" val="1059422861"/>
+        <p14:creationId xmlns:p14="http://schemas.microsoft.com/office/powerpoint/2010/main" val="674104076"/>
       </p:ext>
     </p:extLst>
   </p:cSld>
 </p:sld>
 </file>
 
-<file path=ppt/slides/slide5.xml><?xml version="1.0" encoding="utf-8"?>
+<file path=ppt/slides/slide6.xml><?xml version="1.0" encoding="utf-8"?>
 <p:sld xmlns:p="http://schemas.openxmlformats.org/presentationml/2006/main">
   <p:cSld>
     <p:bg>
@@ -13161,7 +15331,7 @@
           <p:cNvPr id="12" name="title">
             <a:extLst xmlns:a="http://schemas.openxmlformats.org/drawingml/2006/main">
               <a:ext uri="{FF2B5EF4-FFF2-40B4-BE49-F238E27FC236}">
-                <a16:creationId xmlns:a16="http://schemas.microsoft.com/office/drawing/2014/main" id="{0B66EF4A-876F-48B9-80D4-BCBDFB54F0FA}"/>
+                <a16:creationId xmlns:a16="http://schemas.microsoft.com/office/drawing/2014/main" id="{D89DF0B7-7F15-483D-A512-B4785AA23421}"/>
               </a:ext>
             </a:extLst>
           </p:cNvPr>
@@ -13229,7 +15399,7 @@
           <p:cNvPr id="2" name="subtitle">
             <a:extLst xmlns:a="http://schemas.openxmlformats.org/drawingml/2006/main">
               <a:ext uri="{FF2B5EF4-FFF2-40B4-BE49-F238E27FC236}">
-                <a16:creationId xmlns:a16="http://schemas.microsoft.com/office/drawing/2014/main" id="{9944A134-5724-466F-A564-54C0A5752FAF}"/>
+                <a16:creationId xmlns:a16="http://schemas.microsoft.com/office/drawing/2014/main" id="{418C5CFC-62F1-4F07-B87D-DD3C88ED9ADF}"/>
               </a:ext>
             </a:extLst>
           </p:cNvPr>
@@ -13297,7 +15467,7 @@
           <p:cNvPr id="3" name="footer">
             <a:extLst xmlns:a="http://schemas.openxmlformats.org/drawingml/2006/main">
               <a:ext uri="{FF2B5EF4-FFF2-40B4-BE49-F238E27FC236}">
-                <a16:creationId xmlns:a16="http://schemas.microsoft.com/office/drawing/2014/main" id="{AF6FEFE1-9399-4415-9530-5320C94004CA}"/>
+                <a16:creationId xmlns:a16="http://schemas.microsoft.com/office/drawing/2014/main" id="{3560F371-6A5D-4BF3-BBEB-B1566FE8C380}"/>
               </a:ext>
             </a:extLst>
           </p:cNvPr>
@@ -13365,7 +15535,7 @@
           <p:cNvPr id="4" name="page">
             <a:extLst xmlns:a="http://schemas.openxmlformats.org/drawingml/2006/main">
               <a:ext uri="{FF2B5EF4-FFF2-40B4-BE49-F238E27FC236}">
-                <a16:creationId xmlns:a16="http://schemas.microsoft.com/office/drawing/2014/main" id="{A684C704-7C95-4610-80B3-C70DA008611E}"/>
+                <a16:creationId xmlns:a16="http://schemas.microsoft.com/office/drawing/2014/main" id="{CC146789-7A2A-4882-9059-B522F98246F7}"/>
               </a:ext>
             </a:extLst>
           </p:cNvPr>
@@ -13423,7 +15593,7 @@
                 <a:ea typeface="Apple SD Gothic Neo"/>
                 <a:cs typeface="Apple SD Gothic Neo"/>
               </a:rPr>
-              <a:t>05</a:t>
+              <a:t>06</a:t>
             </a:r>
           </a:p>
         </p:txBody>
@@ -13433,7 +15603,7 @@
           <p:cNvPr id="5" name="chart-unit">
             <a:extLst xmlns:a="http://schemas.openxmlformats.org/drawingml/2006/main">
               <a:ext uri="{FF2B5EF4-FFF2-40B4-BE49-F238E27FC236}">
-                <a16:creationId xmlns:a16="http://schemas.microsoft.com/office/drawing/2014/main" id="{2F60C700-198E-428D-8BB3-7FF42C673B6D}"/>
+                <a16:creationId xmlns:a16="http://schemas.microsoft.com/office/drawing/2014/main" id="{4B7A844E-78F9-47F4-A6DE-93027D0F8814}"/>
               </a:ext>
             </a:extLst>
           </p:cNvPr>
@@ -13501,7 +15671,7 @@
           <p:cNvPr id="6" name="Chart">
             <a:extLst xmlns:a="http://schemas.openxmlformats.org/drawingml/2006/main">
               <a:ext uri="{FF2B5EF4-FFF2-40B4-BE49-F238E27FC236}">
-                <a16:creationId xmlns:a16="http://schemas.microsoft.com/office/drawing/2014/main" id="{EB5905E2-B556-4A2E-B640-E06213D84776}"/>
+                <a16:creationId xmlns:a16="http://schemas.microsoft.com/office/drawing/2014/main" id="{C2D79933-AFE7-4A0D-80FF-F361466F115E}"/>
               </a:ext>
             </a:extLst>
           </p:cNvPr>
@@ -13514,7 +15684,7 @@
         </p:xfrm>
         <a:graphic xmlns:a="http://schemas.openxmlformats.org/drawingml/2006/main">
           <a:graphicData uri="http://schemas.openxmlformats.org/drawingml/2006/chart">
-            <c:chart xmlns:r="http://schemas.openxmlformats.org/officeDocument/2006/relationships" xmlns:c="http://schemas.openxmlformats.org/drawingml/2006/chart" r:id="R86d2872920b74aa4"/>
+            <c:chart xmlns:r="http://schemas.openxmlformats.org/officeDocument/2006/relationships" xmlns:c="http://schemas.openxmlformats.org/drawingml/2006/chart" r:id="Rfa32c273f1f64e4a"/>
           </a:graphicData>
         </a:graphic>
       </p:graphicFrame>
@@ -13523,7 +15693,7 @@
           <p:cNvPr id="7" name="geometry">
             <a:extLst xmlns:a="http://schemas.openxmlformats.org/drawingml/2006/main">
               <a:ext uri="{FF2B5EF4-FFF2-40B4-BE49-F238E27FC236}">
-                <a16:creationId xmlns:a16="http://schemas.microsoft.com/office/drawing/2014/main" id="{347DB9BF-5F0E-4367-9F4F-6C41E71CF2E0}"/>
+                <a16:creationId xmlns:a16="http://schemas.microsoft.com/office/drawing/2014/main" id="{B7B88FC3-A48C-4428-9D88-C89E4321C51B}"/>
               </a:ext>
             </a:extLst>
           </p:cNvPr>
@@ -13591,7 +15761,7 @@
           <p:cNvPr id="8" name="geometry-detail">
             <a:extLst xmlns:a="http://schemas.openxmlformats.org/drawingml/2006/main">
               <a:ext uri="{FF2B5EF4-FFF2-40B4-BE49-F238E27FC236}">
-                <a16:creationId xmlns:a16="http://schemas.microsoft.com/office/drawing/2014/main" id="{4943FD15-E93A-44A7-AE7F-2F07A90D3549}"/>
+                <a16:creationId xmlns:a16="http://schemas.microsoft.com/office/drawing/2014/main" id="{ADE053B3-6F19-4E88-B2DA-8E30DC23C1A8}"/>
               </a:ext>
             </a:extLst>
           </p:cNvPr>
@@ -13728,7 +15898,7 @@
           <p:cNvPr id="9" name="layout">
             <a:extLst xmlns:a="http://schemas.openxmlformats.org/drawingml/2006/main">
               <a:ext uri="{FF2B5EF4-FFF2-40B4-BE49-F238E27FC236}">
-                <a16:creationId xmlns:a16="http://schemas.microsoft.com/office/drawing/2014/main" id="{E2D4DE55-8350-446F-8442-6AA0E4EF5F20}"/>
+                <a16:creationId xmlns:a16="http://schemas.microsoft.com/office/drawing/2014/main" id="{8BEB7CF4-9BF6-492D-A23C-7D7FD6EC63A6}"/>
               </a:ext>
             </a:extLst>
           </p:cNvPr>
@@ -13796,7 +15966,7 @@
           <p:cNvPr id="10" name="layout-detail">
             <a:extLst xmlns:a="http://schemas.openxmlformats.org/drawingml/2006/main">
               <a:ext uri="{FF2B5EF4-FFF2-40B4-BE49-F238E27FC236}">
-                <a16:creationId xmlns:a16="http://schemas.microsoft.com/office/drawing/2014/main" id="{070AF45C-230C-4F4B-824F-7E4E6067C88E}"/>
+                <a16:creationId xmlns:a16="http://schemas.microsoft.com/office/drawing/2014/main" id="{12D1C302-1AD5-47AA-A365-6160AEB6B72F}"/>
               </a:ext>
             </a:extLst>
           </p:cNvPr>
@@ -13910,7 +16080,7 @@
           <p:cNvPr id="11" name="separate-effects">
             <a:extLst xmlns:a="http://schemas.openxmlformats.org/drawingml/2006/main">
               <a:ext uri="{FF2B5EF4-FFF2-40B4-BE49-F238E27FC236}">
-                <a16:creationId xmlns:a16="http://schemas.microsoft.com/office/drawing/2014/main" id="{2EB68D7E-D3E6-479A-850F-92FACCF43255}"/>
+                <a16:creationId xmlns:a16="http://schemas.microsoft.com/office/drawing/2014/main" id="{016F9021-CD95-49B6-8834-E3F16C0CCAB1}"/>
               </a:ext>
             </a:extLst>
           </p:cNvPr>
@@ -13976,14 +16146,14 @@
     </p:spTree>
     <p:extLst>
       <p:ext uri="{BB962C8B-B14F-4D97-AF65-F5344CB8AC3E}">
-        <p14:creationId xmlns:p14="http://schemas.microsoft.com/office/powerpoint/2010/main" val="148705373"/>
+        <p14:creationId xmlns:p14="http://schemas.microsoft.com/office/powerpoint/2010/main" val="1108177138"/>
       </p:ext>
     </p:extLst>
   </p:cSld>
 </p:sld>
 </file>
 
-<file path=ppt/slides/slide6.xml><?xml version="1.0" encoding="utf-8"?>
+<file path=ppt/slides/slide7.xml><?xml version="1.0" encoding="utf-8"?>
 <p:sld xmlns:p="http://schemas.openxmlformats.org/presentationml/2006/main">
   <p:cSld>
     <p:bg>
@@ -14007,7 +16177,7 @@
           <p:cNvPr id="8" name="title">
             <a:extLst xmlns:a="http://schemas.openxmlformats.org/drawingml/2006/main">
               <a:ext uri="{FF2B5EF4-FFF2-40B4-BE49-F238E27FC236}">
-                <a16:creationId xmlns:a16="http://schemas.microsoft.com/office/drawing/2014/main" id="{14B470B8-296D-4E24-85CE-37B05E2C0FCC}"/>
+                <a16:creationId xmlns:a16="http://schemas.microsoft.com/office/drawing/2014/main" id="{2492B617-84F7-450E-97F4-EDDA92369DED}"/>
               </a:ext>
             </a:extLst>
           </p:cNvPr>
@@ -14075,7 +16245,7 @@
           <p:cNvPr id="2" name="subtitle">
             <a:extLst xmlns:a="http://schemas.openxmlformats.org/drawingml/2006/main">
               <a:ext uri="{FF2B5EF4-FFF2-40B4-BE49-F238E27FC236}">
-                <a16:creationId xmlns:a16="http://schemas.microsoft.com/office/drawing/2014/main" id="{971F9138-D79B-4315-BC32-89AE4DB269D8}"/>
+                <a16:creationId xmlns:a16="http://schemas.microsoft.com/office/drawing/2014/main" id="{C15309BF-D097-4292-88FC-223380C7279E}"/>
               </a:ext>
             </a:extLst>
           </p:cNvPr>
@@ -14143,7 +16313,7 @@
           <p:cNvPr id="3" name="footer">
             <a:extLst xmlns:a="http://schemas.openxmlformats.org/drawingml/2006/main">
               <a:ext uri="{FF2B5EF4-FFF2-40B4-BE49-F238E27FC236}">
-                <a16:creationId xmlns:a16="http://schemas.microsoft.com/office/drawing/2014/main" id="{999ACDE2-E9F4-4463-8B86-6CFFFA20D411}"/>
+                <a16:creationId xmlns:a16="http://schemas.microsoft.com/office/drawing/2014/main" id="{1C3158D2-81FE-4356-8D46-0033688EE344}"/>
               </a:ext>
             </a:extLst>
           </p:cNvPr>
@@ -14211,7 +16381,7 @@
           <p:cNvPr id="4" name="page">
             <a:extLst xmlns:a="http://schemas.openxmlformats.org/drawingml/2006/main">
               <a:ext uri="{FF2B5EF4-FFF2-40B4-BE49-F238E27FC236}">
-                <a16:creationId xmlns:a16="http://schemas.microsoft.com/office/drawing/2014/main" id="{10D138B4-96F3-441C-8A39-AE46F2D28728}"/>
+                <a16:creationId xmlns:a16="http://schemas.microsoft.com/office/drawing/2014/main" id="{7B7E5088-C8B9-4A50-A185-C9D2A7B20F4C}"/>
               </a:ext>
             </a:extLst>
           </p:cNvPr>
@@ -14269,7 +16439,7 @@
                 <a:ea typeface="Apple SD Gothic Neo"/>
                 <a:cs typeface="Apple SD Gothic Neo"/>
               </a:rPr>
-              <a:t>06</a:t>
+              <a:t>07</a:t>
             </a:r>
           </a:p>
         </p:txBody>
@@ -14279,7 +16449,7 @@
           <p:cNvPr id="5" name="region-mapping">
             <a:extLst xmlns:a="http://schemas.openxmlformats.org/drawingml/2006/main">
               <a:ext uri="{FF2B5EF4-FFF2-40B4-BE49-F238E27FC236}">
-                <a16:creationId xmlns:a16="http://schemas.microsoft.com/office/drawing/2014/main" id="{87BCB31C-5C6A-412C-ACD7-5BFC21375BFC}"/>
+                <a16:creationId xmlns:a16="http://schemas.microsoft.com/office/drawing/2014/main" id="{9D55715C-B160-44E3-B51D-99C8684C1627}"/>
               </a:ext>
             </a:extLst>
           </p:cNvPr>
@@ -14920,7 +17090,7 @@
           <p:cNvPr id="6" name="placement-why">
             <a:extLst xmlns:a="http://schemas.openxmlformats.org/drawingml/2006/main">
               <a:ext uri="{FF2B5EF4-FFF2-40B4-BE49-F238E27FC236}">
-                <a16:creationId xmlns:a16="http://schemas.microsoft.com/office/drawing/2014/main" id="{C81964AE-DF99-40DA-A805-492F1BD40C64}"/>
+                <a16:creationId xmlns:a16="http://schemas.microsoft.com/office/drawing/2014/main" id="{1C761C12-1BA5-4350-A763-BF6CF84D033F}"/>
               </a:ext>
             </a:extLst>
           </p:cNvPr>
@@ -15011,7 +17181,7 @@
           <p:cNvPr id="7" name="mapping-not-wiring">
             <a:extLst xmlns:a="http://schemas.openxmlformats.org/drawingml/2006/main">
               <a:ext uri="{FF2B5EF4-FFF2-40B4-BE49-F238E27FC236}">
-                <a16:creationId xmlns:a16="http://schemas.microsoft.com/office/drawing/2014/main" id="{D4A5AFB6-61A6-4498-9350-A09E18E04976}"/>
+                <a16:creationId xmlns:a16="http://schemas.microsoft.com/office/drawing/2014/main" id="{24A5799E-B58B-4C7F-9F4F-A5E232986B87}"/>
               </a:ext>
             </a:extLst>
           </p:cNvPr>
@@ -15100,14 +17270,14 @@
     </p:spTree>
     <p:extLst>
       <p:ext uri="{BB962C8B-B14F-4D97-AF65-F5344CB8AC3E}">
-        <p14:creationId xmlns:p14="http://schemas.microsoft.com/office/powerpoint/2010/main" val="656085281"/>
+        <p14:creationId xmlns:p14="http://schemas.microsoft.com/office/powerpoint/2010/main" val="1734183450"/>
       </p:ext>
     </p:extLst>
   </p:cSld>
 </p:sld>
 </file>
 
-<file path=ppt/slides/slide7.xml><?xml version="1.0" encoding="utf-8"?>
+<file path=ppt/slides/slide8.xml><?xml version="1.0" encoding="utf-8"?>
 <p:sld xmlns:p="http://schemas.openxmlformats.org/presentationml/2006/main">
   <p:cSld>
     <p:bg>
@@ -15131,7 +17301,7 @@
           <p:cNvPr id="11" name="title">
             <a:extLst xmlns:a="http://schemas.openxmlformats.org/drawingml/2006/main">
               <a:ext uri="{FF2B5EF4-FFF2-40B4-BE49-F238E27FC236}">
-                <a16:creationId xmlns:a16="http://schemas.microsoft.com/office/drawing/2014/main" id="{BA84E022-AADA-45D7-B807-4BABFE74970A}"/>
+                <a16:creationId xmlns:a16="http://schemas.microsoft.com/office/drawing/2014/main" id="{518FE2D4-53B8-436A-884B-4AB34084EB58}"/>
               </a:ext>
             </a:extLst>
           </p:cNvPr>
@@ -15199,7 +17369,7 @@
           <p:cNvPr id="2" name="subtitle">
             <a:extLst xmlns:a="http://schemas.openxmlformats.org/drawingml/2006/main">
               <a:ext uri="{FF2B5EF4-FFF2-40B4-BE49-F238E27FC236}">
-                <a16:creationId xmlns:a16="http://schemas.microsoft.com/office/drawing/2014/main" id="{1D9C2A41-7A4C-443E-95E2-91DC58E887BF}"/>
+                <a16:creationId xmlns:a16="http://schemas.microsoft.com/office/drawing/2014/main" id="{94B09014-6CE4-4DD0-A234-21943A62FC49}"/>
               </a:ext>
             </a:extLst>
           </p:cNvPr>
@@ -15267,7 +17437,7 @@
           <p:cNvPr id="3" name="footer">
             <a:extLst xmlns:a="http://schemas.openxmlformats.org/drawingml/2006/main">
               <a:ext uri="{FF2B5EF4-FFF2-40B4-BE49-F238E27FC236}">
-                <a16:creationId xmlns:a16="http://schemas.microsoft.com/office/drawing/2014/main" id="{9A86FCFF-D9A2-413B-8FAC-47453187FBB0}"/>
+                <a16:creationId xmlns:a16="http://schemas.microsoft.com/office/drawing/2014/main" id="{C9042A24-9F7A-4556-833E-1AD7DA2E6A2F}"/>
               </a:ext>
             </a:extLst>
           </p:cNvPr>
@@ -15335,7 +17505,7 @@
           <p:cNvPr id="4" name="page">
             <a:extLst xmlns:a="http://schemas.openxmlformats.org/drawingml/2006/main">
               <a:ext uri="{FF2B5EF4-FFF2-40B4-BE49-F238E27FC236}">
-                <a16:creationId xmlns:a16="http://schemas.microsoft.com/office/drawing/2014/main" id="{F075B390-8BC5-44AF-8375-03ACF0A28608}"/>
+                <a16:creationId xmlns:a16="http://schemas.microsoft.com/office/drawing/2014/main" id="{5C42A0A1-4241-439B-8F1D-21F14CB65D31}"/>
               </a:ext>
             </a:extLst>
           </p:cNvPr>
@@ -15393,7 +17563,7 @@
                 <a:ea typeface="Apple SD Gothic Neo"/>
                 <a:cs typeface="Apple SD Gothic Neo"/>
               </a:rPr>
-              <a:t>07</a:t>
+              <a:t>08</a:t>
             </a:r>
           </a:p>
         </p:txBody>
@@ -15403,7 +17573,7 @@
           <p:cNvPr id="5" name="chart-unit">
             <a:extLst xmlns:a="http://schemas.openxmlformats.org/drawingml/2006/main">
               <a:ext uri="{FF2B5EF4-FFF2-40B4-BE49-F238E27FC236}">
-                <a16:creationId xmlns:a16="http://schemas.microsoft.com/office/drawing/2014/main" id="{972D96C7-3B59-42D9-9CA8-44DCAB808518}"/>
+                <a16:creationId xmlns:a16="http://schemas.microsoft.com/office/drawing/2014/main" id="{FA5718DD-A5C4-4C96-96B8-1BA05A9931BD}"/>
               </a:ext>
             </a:extLst>
           </p:cNvPr>
@@ -15471,7 +17641,7 @@
           <p:cNvPr id="6" name="Chart">
             <a:extLst xmlns:a="http://schemas.openxmlformats.org/drawingml/2006/main">
               <a:ext uri="{FF2B5EF4-FFF2-40B4-BE49-F238E27FC236}">
-                <a16:creationId xmlns:a16="http://schemas.microsoft.com/office/drawing/2014/main" id="{839C790C-E925-4B24-BCD4-29C1925DE692}"/>
+                <a16:creationId xmlns:a16="http://schemas.microsoft.com/office/drawing/2014/main" id="{A175D983-FE68-43D2-8828-F83FA9E8C518}"/>
               </a:ext>
             </a:extLst>
           </p:cNvPr>
@@ -15484,7 +17654,7 @@
         </p:xfrm>
         <a:graphic xmlns:a="http://schemas.openxmlformats.org/drawingml/2006/main">
           <a:graphicData uri="http://schemas.openxmlformats.org/drawingml/2006/chart">
-            <c:chart xmlns:r="http://schemas.openxmlformats.org/officeDocument/2006/relationships" xmlns:c="http://schemas.openxmlformats.org/drawingml/2006/chart" r:id="R3fda4ae8e820432e"/>
+            <c:chart xmlns:r="http://schemas.openxmlformats.org/officeDocument/2006/relationships" xmlns:c="http://schemas.openxmlformats.org/drawingml/2006/chart" r:id="Rc883fd2438294e51"/>
           </a:graphicData>
         </a:graphic>
       </p:graphicFrame>
@@ -15493,7 +17663,7 @@
           <p:cNvPr id="7" name="qd-effect">
             <a:extLst xmlns:a="http://schemas.openxmlformats.org/drawingml/2006/main">
               <a:ext uri="{FF2B5EF4-FFF2-40B4-BE49-F238E27FC236}">
-                <a16:creationId xmlns:a16="http://schemas.microsoft.com/office/drawing/2014/main" id="{CC9977C4-ABCA-478F-BC1E-DE5501AF3A54}"/>
+                <a16:creationId xmlns:a16="http://schemas.microsoft.com/office/drawing/2014/main" id="{D1EBC093-92B2-46C7-B282-69C4F1B16737}"/>
               </a:ext>
             </a:extLst>
           </p:cNvPr>
@@ -15561,7 +17731,7 @@
           <p:cNvPr id="8" name="qd-effect-2">
             <a:extLst xmlns:a="http://schemas.openxmlformats.org/drawingml/2006/main">
               <a:ext uri="{FF2B5EF4-FFF2-40B4-BE49-F238E27FC236}">
-                <a16:creationId xmlns:a16="http://schemas.microsoft.com/office/drawing/2014/main" id="{DFFB6CA8-B4E4-4C6C-A864-7D8D19303E21}"/>
+                <a16:creationId xmlns:a16="http://schemas.microsoft.com/office/drawing/2014/main" id="{44FF68E9-AD3B-4B12-B034-F3652CB1418D}"/>
               </a:ext>
             </a:extLst>
           </p:cNvPr>
@@ -15698,7 +17868,7 @@
           <p:cNvPr id="9" name="actual-qd-caption">
             <a:extLst xmlns:a="http://schemas.openxmlformats.org/drawingml/2006/main">
               <a:ext uri="{FF2B5EF4-FFF2-40B4-BE49-F238E27FC236}">
-                <a16:creationId xmlns:a16="http://schemas.microsoft.com/office/drawing/2014/main" id="{816E3349-B848-4971-B2C7-4AEE271577FB}"/>
+                <a16:creationId xmlns:a16="http://schemas.microsoft.com/office/drawing/2014/main" id="{9D977E59-7B66-4D06-A053-76058884FFCC}"/>
               </a:ext>
             </a:extLst>
           </p:cNvPr>
@@ -15766,7 +17936,7 @@
           <p:cNvPr id="10" name="actual-qd">
             <a:extLst xmlns:a="http://schemas.openxmlformats.org/drawingml/2006/main">
               <a:ext uri="{FF2B5EF4-FFF2-40B4-BE49-F238E27FC236}">
-                <a16:creationId xmlns:a16="http://schemas.microsoft.com/office/drawing/2014/main" id="{90F5B5BF-AC17-4A30-A2DF-CDE1BBF58DF7}"/>
+                <a16:creationId xmlns:a16="http://schemas.microsoft.com/office/drawing/2014/main" id="{ED81B0FB-43FB-412D-9535-27FF26C9465E}"/>
               </a:ext>
             </a:extLst>
           </p:cNvPr>
@@ -16161,14 +18331,14 @@
     </p:spTree>
     <p:extLst>
       <p:ext uri="{BB962C8B-B14F-4D97-AF65-F5344CB8AC3E}">
-        <p14:creationId xmlns:p14="http://schemas.microsoft.com/office/powerpoint/2010/main" val="186433097"/>
+        <p14:creationId xmlns:p14="http://schemas.microsoft.com/office/powerpoint/2010/main" val="1564417264"/>
       </p:ext>
     </p:extLst>
   </p:cSld>
 </p:sld>
 </file>
 
-<file path=ppt/slides/slide8.xml><?xml version="1.0" encoding="utf-8"?>
+<file path=ppt/slides/slide9.xml><?xml version="1.0" encoding="utf-8"?>
 <p:sld xmlns:p="http://schemas.openxmlformats.org/presentationml/2006/main">
   <p:cSld>
     <p:bg>
@@ -16192,7 +18362,7 @@
           <p:cNvPr id="10" name="title">
             <a:extLst xmlns:a="http://schemas.openxmlformats.org/drawingml/2006/main">
               <a:ext uri="{FF2B5EF4-FFF2-40B4-BE49-F238E27FC236}">
-                <a16:creationId xmlns:a16="http://schemas.microsoft.com/office/drawing/2014/main" id="{B2B5B53A-3ED2-4C12-99BA-217ABA09643E}"/>
+                <a16:creationId xmlns:a16="http://schemas.microsoft.com/office/drawing/2014/main" id="{DDFF0C47-1015-4684-8EDB-03B439E3E420}"/>
               </a:ext>
             </a:extLst>
           </p:cNvPr>
@@ -16260,7 +18430,7 @@
           <p:cNvPr id="2" name="subtitle">
             <a:extLst xmlns:a="http://schemas.openxmlformats.org/drawingml/2006/main">
               <a:ext uri="{FF2B5EF4-FFF2-40B4-BE49-F238E27FC236}">
-                <a16:creationId xmlns:a16="http://schemas.microsoft.com/office/drawing/2014/main" id="{9F42B10A-CA74-4D58-8D96-AEA4405BFA1F}"/>
+                <a16:creationId xmlns:a16="http://schemas.microsoft.com/office/drawing/2014/main" id="{458B796C-910E-4DE7-AD15-FE7EA926A574}"/>
               </a:ext>
             </a:extLst>
           </p:cNvPr>
@@ -16328,7 +18498,7 @@
           <p:cNvPr id="3" name="footer">
             <a:extLst xmlns:a="http://schemas.openxmlformats.org/drawingml/2006/main">
               <a:ext uri="{FF2B5EF4-FFF2-40B4-BE49-F238E27FC236}">
-                <a16:creationId xmlns:a16="http://schemas.microsoft.com/office/drawing/2014/main" id="{F51FE464-C8B3-46F9-8276-84F70296C248}"/>
+                <a16:creationId xmlns:a16="http://schemas.microsoft.com/office/drawing/2014/main" id="{5CFAC331-2CA9-4605-8F7B-3B8836440B5E}"/>
               </a:ext>
             </a:extLst>
           </p:cNvPr>
@@ -16396,7 +18566,7 @@
           <p:cNvPr id="4" name="page">
             <a:extLst xmlns:a="http://schemas.openxmlformats.org/drawingml/2006/main">
               <a:ext uri="{FF2B5EF4-FFF2-40B4-BE49-F238E27FC236}">
-                <a16:creationId xmlns:a16="http://schemas.microsoft.com/office/drawing/2014/main" id="{DC7860ED-BB27-4864-A224-AFFCCB1F49D2}"/>
+                <a16:creationId xmlns:a16="http://schemas.microsoft.com/office/drawing/2014/main" id="{76EC9411-6413-4AA8-B56F-35129A743CD2}"/>
               </a:ext>
             </a:extLst>
           </p:cNvPr>
@@ -16454,7 +18624,7 @@
                 <a:ea typeface="Apple SD Gothic Neo"/>
                 <a:cs typeface="Apple SD Gothic Neo"/>
               </a:rPr>
-              <a:t>08</a:t>
+              <a:t>09</a:t>
             </a:r>
           </a:p>
         </p:txBody>
@@ -16464,7 +18634,7 @@
           <p:cNvPr id="5" name="buffer-choices">
             <a:extLst xmlns:a="http://schemas.openxmlformats.org/drawingml/2006/main">
               <a:ext uri="{FF2B5EF4-FFF2-40B4-BE49-F238E27FC236}">
-                <a16:creationId xmlns:a16="http://schemas.microsoft.com/office/drawing/2014/main" id="{0D5A5F5F-73AD-44EE-94F7-6A68C8B5CA7E}"/>
+                <a16:creationId xmlns:a16="http://schemas.microsoft.com/office/drawing/2014/main" id="{E7C0D534-E910-4835-83E2-21F2B263B8FF}"/>
               </a:ext>
             </a:extLst>
           </p:cNvPr>
@@ -16886,7 +19056,7 @@
           <p:cNvPr id="6" name="current-configuration">
             <a:extLst xmlns:a="http://schemas.openxmlformats.org/drawingml/2006/main">
               <a:ext uri="{FF2B5EF4-FFF2-40B4-BE49-F238E27FC236}">
-                <a16:creationId xmlns:a16="http://schemas.microsoft.com/office/drawing/2014/main" id="{62DADFA0-67ED-4D58-9155-0EA191D4A849}"/>
+                <a16:creationId xmlns:a16="http://schemas.microsoft.com/office/drawing/2014/main" id="{2196F9C8-4833-4CE0-BC35-0270B7836495}"/>
               </a:ext>
             </a:extLst>
           </p:cNvPr>
@@ -16954,7 +19124,7 @@
           <p:cNvPr id="7" name="current-configuration-detail">
             <a:extLst xmlns:a="http://schemas.openxmlformats.org/drawingml/2006/main">
               <a:ext uri="{FF2B5EF4-FFF2-40B4-BE49-F238E27FC236}">
-                <a16:creationId xmlns:a16="http://schemas.microsoft.com/office/drawing/2014/main" id="{59A65445-8341-4BC4-B0BC-3C73429E9CC3}"/>
+                <a16:creationId xmlns:a16="http://schemas.microsoft.com/office/drawing/2014/main" id="{4710A22C-2B78-492C-BDA1-B6D77D55C502}"/>
               </a:ext>
             </a:extLst>
           </p:cNvPr>
@@ -17114,7 +19284,7 @@
           <p:cNvPr id="8" name="buffer-choice-explanation">
             <a:extLst xmlns:a="http://schemas.openxmlformats.org/drawingml/2006/main">
               <a:ext uri="{FF2B5EF4-FFF2-40B4-BE49-F238E27FC236}">
-                <a16:creationId xmlns:a16="http://schemas.microsoft.com/office/drawing/2014/main" id="{993839F7-0F49-4AF7-8226-1DABE0D02B1C}"/>
+                <a16:creationId xmlns:a16="http://schemas.microsoft.com/office/drawing/2014/main" id="{AF88936F-9442-4392-A4BF-3E10AF384057}"/>
               </a:ext>
             </a:extLst>
           </p:cNvPr>
@@ -17205,7 +19375,7 @@
           <p:cNvPr id="9" name="partial-read-limit">
             <a:extLst xmlns:a="http://schemas.openxmlformats.org/drawingml/2006/main">
               <a:ext uri="{FF2B5EF4-FFF2-40B4-BE49-F238E27FC236}">
-                <a16:creationId xmlns:a16="http://schemas.microsoft.com/office/drawing/2014/main" id="{B79757B9-7F3C-4D21-B3A1-83B8CF101701}"/>
+                <a16:creationId xmlns:a16="http://schemas.microsoft.com/office/drawing/2014/main" id="{C28A5562-BF77-4309-9C24-5574179FAFBA}"/>
               </a:ext>
             </a:extLst>
           </p:cNvPr>
@@ -17294,860 +19464,7 @@
     </p:spTree>
     <p:extLst>
       <p:ext uri="{BB962C8B-B14F-4D97-AF65-F5344CB8AC3E}">
-        <p14:creationId xmlns:p14="http://schemas.microsoft.com/office/powerpoint/2010/main" val="950395944"/>
-      </p:ext>
-    </p:extLst>
-  </p:cSld>
-</p:sld>
-</file>
-
-<file path=ppt/slides/slide9.xml><?xml version="1.0" encoding="utf-8"?>
-<p:sld xmlns:p="http://schemas.openxmlformats.org/presentationml/2006/main">
-  <p:cSld>
-    <p:bg>
-      <p:bgPr>
-        <a:solidFill xmlns:a="http://schemas.openxmlformats.org/drawingml/2006/main">
-          <a:srgbClr val="FFFFFF"/>
-        </a:solidFill>
-      </p:bgPr>
-    </p:bg>
-    <p:spTree>
-      <p:nvGrpSpPr>
-        <p:cNvPr id="1" name=""/>
-        <p:cNvGrpSpPr/>
-        <p:nvPr/>
-      </p:nvGrpSpPr>
-      <p:grpSpPr>
-        <a:xfrm xmlns:a="http://schemas.openxmlformats.org/drawingml/2006/main"/>
-      </p:grpSpPr>
-      <p:sp>
-        <p:nvSpPr>
-          <p:cNvPr id="9" name="title">
-            <a:extLst xmlns:a="http://schemas.openxmlformats.org/drawingml/2006/main">
-              <a:ext uri="{FF2B5EF4-FFF2-40B4-BE49-F238E27FC236}">
-                <a16:creationId xmlns:a16="http://schemas.microsoft.com/office/drawing/2014/main" id="{2F9DAC8C-78C1-4772-8594-443481B27CE7}"/>
-              </a:ext>
-            </a:extLst>
-          </p:cNvPr>
-          <p:cNvSpPr>
-            <a:spLocks xmlns:a="http://schemas.openxmlformats.org/drawingml/2006/main" noGrp="1"/>
-          </p:cNvSpPr>
-          <p:nvPr/>
-        </p:nvSpPr>
-        <p:spPr>
-          <a:xfrm xmlns:a="http://schemas.openxmlformats.org/drawingml/2006/main">
-            <a:off x="533400" y="438150"/>
-            <a:ext cx="11125200" cy="628650"/>
-          </a:xfrm>
-          <a:prstGeom xmlns:a="http://schemas.openxmlformats.org/drawingml/2006/main" prst="rect">
-            <a:avLst/>
-          </a:prstGeom>
-          <a:noFill xmlns:a="http://schemas.openxmlformats.org/drawingml/2006/main"/>
-          <a:ln xmlns:a="http://schemas.openxmlformats.org/drawingml/2006/main" w="0">
-            <a:noFill/>
-          </a:ln>
-        </p:spPr>
-        <p:txBody>
-          <a:bodyPr xmlns:a="http://schemas.openxmlformats.org/drawingml/2006/main" wrap="square" lIns="0" tIns="0" rIns="0" bIns="0" anchor="t">
-            <a:noAutofit/>
-          </a:bodyPr>
-          <a:lstStyle xmlns:a="http://schemas.openxmlformats.org/drawingml/2006/main">
-            <a:defPPr>
-              <a:defRPr sz="3300" b="1">
-                <a:solidFill>
-                  <a:srgbClr val="172738"/>
-                </a:solidFill>
-                <a:latin typeface="Apple SD Gothic Neo"/>
-                <a:ea typeface="Apple SD Gothic Neo"/>
-                <a:cs typeface="Apple SD Gothic Neo"/>
-              </a:defRPr>
-            </a:defPPr>
-          </a:lstStyle>
-          <a:p xmlns:a="http://schemas.openxmlformats.org/drawingml/2006/main">
-            <a:pPr>
-              <a:defRPr sz="3300" b="1">
-                <a:solidFill>
-                  <a:srgbClr val="172738"/>
-                </a:solidFill>
-                <a:latin typeface="Apple SD Gothic Neo"/>
-                <a:ea typeface="Apple SD Gothic Neo"/>
-                <a:cs typeface="Apple SD Gothic Neo"/>
-              </a:defRPr>
-            </a:pPr>
-            <a:r>
-              <a:rPr sz="3300" b="1">
-                <a:solidFill>
-                  <a:srgbClr val="172738"/>
-                </a:solidFill>
-                <a:latin typeface="Apple SD Gothic Neo"/>
-                <a:ea typeface="Apple SD Gothic Neo"/>
-                <a:cs typeface="Apple SD Gothic Neo"/>
-              </a:rPr>
-              <a:t>비교 조건과 적용 범위</a:t>
-            </a:r>
-          </a:p>
-        </p:txBody>
-      </p:sp>
-      <p:sp>
-        <p:nvSpPr>
-          <p:cNvPr id="2" name="subtitle">
-            <a:extLst xmlns:a="http://schemas.openxmlformats.org/drawingml/2006/main">
-              <a:ext uri="{FF2B5EF4-FFF2-40B4-BE49-F238E27FC236}">
-                <a16:creationId xmlns:a16="http://schemas.microsoft.com/office/drawing/2014/main" id="{EF50C885-4432-4C61-8E71-79BAAADF16F3}"/>
-              </a:ext>
-            </a:extLst>
-          </p:cNvPr>
-          <p:cNvSpPr>
-            <a:spLocks xmlns:a="http://schemas.openxmlformats.org/drawingml/2006/main" noGrp="1"/>
-          </p:cNvSpPr>
-          <p:nvPr/>
-        </p:nvSpPr>
-        <p:spPr>
-          <a:xfrm xmlns:a="http://schemas.openxmlformats.org/drawingml/2006/main">
-            <a:off x="552450" y="1104900"/>
-            <a:ext cx="11087100" cy="571500"/>
-          </a:xfrm>
-          <a:prstGeom xmlns:a="http://schemas.openxmlformats.org/drawingml/2006/main" prst="rect">
-            <a:avLst/>
-          </a:prstGeom>
-          <a:noFill xmlns:a="http://schemas.openxmlformats.org/drawingml/2006/main"/>
-          <a:ln xmlns:a="http://schemas.openxmlformats.org/drawingml/2006/main" w="0">
-            <a:noFill/>
-          </a:ln>
-        </p:spPr>
-        <p:txBody>
-          <a:bodyPr xmlns:a="http://schemas.openxmlformats.org/drawingml/2006/main" wrap="square" lIns="0" tIns="0" rIns="0" bIns="0" anchor="t">
-            <a:noAutofit/>
-          </a:bodyPr>
-          <a:lstStyle xmlns:a="http://schemas.openxmlformats.org/drawingml/2006/main">
-            <a:defPPr>
-              <a:defRPr sz="1800" b="0">
-                <a:solidFill>
-                  <a:srgbClr val="586875"/>
-                </a:solidFill>
-                <a:latin typeface="Apple SD Gothic Neo"/>
-                <a:ea typeface="Apple SD Gothic Neo"/>
-                <a:cs typeface="Apple SD Gothic Neo"/>
-              </a:defRPr>
-            </a:defPPr>
-          </a:lstStyle>
-          <a:p xmlns:a="http://schemas.openxmlformats.org/drawingml/2006/main">
-            <a:pPr>
-              <a:defRPr sz="1800" b="0">
-                <a:solidFill>
-                  <a:srgbClr val="586875"/>
-                </a:solidFill>
-                <a:latin typeface="Apple SD Gothic Neo"/>
-                <a:ea typeface="Apple SD Gothic Neo"/>
-                <a:cs typeface="Apple SD Gothic Neo"/>
-              </a:defRPr>
-            </a:pPr>
-            <a:r>
-              <a:rPr sz="1800" b="0">
-                <a:solidFill>
-                  <a:srgbClr val="586875"/>
-                </a:solidFill>
-                <a:latin typeface="Apple SD Gothic Neo"/>
-                <a:ea typeface="Apple SD Gothic Neo"/>
-                <a:cs typeface="Apple SD Gothic Neo"/>
-              </a:rPr>
-              <a:t>각 실험 안의 전후 비교로 효과를 판단하고, 서로 다른 실험의 증가율은 합산하지 않습니다.</a:t>
-            </a:r>
-          </a:p>
-        </p:txBody>
-      </p:sp>
-      <p:sp>
-        <p:nvSpPr>
-          <p:cNvPr id="3" name="footer">
-            <a:extLst xmlns:a="http://schemas.openxmlformats.org/drawingml/2006/main">
-              <a:ext uri="{FF2B5EF4-FFF2-40B4-BE49-F238E27FC236}">
-                <a16:creationId xmlns:a16="http://schemas.microsoft.com/office/drawing/2014/main" id="{797529B4-5B80-438C-AEF9-5AE61784824C}"/>
-              </a:ext>
-            </a:extLst>
-          </p:cNvPr>
-          <p:cNvSpPr>
-            <a:spLocks xmlns:a="http://schemas.openxmlformats.org/drawingml/2006/main" noGrp="1"/>
-          </p:cNvSpPr>
-          <p:nvPr/>
-        </p:nvSpPr>
-        <p:spPr>
-          <a:xfrm xmlns:a="http://schemas.openxmlformats.org/drawingml/2006/main">
-            <a:off x="533400" y="6419850"/>
-            <a:ext cx="10477500" cy="257175"/>
-          </a:xfrm>
-          <a:prstGeom xmlns:a="http://schemas.openxmlformats.org/drawingml/2006/main" prst="rect">
-            <a:avLst/>
-          </a:prstGeom>
-          <a:noFill xmlns:a="http://schemas.openxmlformats.org/drawingml/2006/main"/>
-          <a:ln xmlns:a="http://schemas.openxmlformats.org/drawingml/2006/main" w="0">
-            <a:noFill/>
-          </a:ln>
-        </p:spPr>
-        <p:txBody>
-          <a:bodyPr xmlns:a="http://schemas.openxmlformats.org/drawingml/2006/main" wrap="square" lIns="0" tIns="0" rIns="0" bIns="0" anchor="t">
-            <a:noAutofit/>
-          </a:bodyPr>
-          <a:lstStyle xmlns:a="http://schemas.openxmlformats.org/drawingml/2006/main">
-            <a:defPPr>
-              <a:defRPr sz="1200" b="0">
-                <a:solidFill>
-                  <a:srgbClr val="586875"/>
-                </a:solidFill>
-                <a:latin typeface="Apple SD Gothic Neo"/>
-                <a:ea typeface="Apple SD Gothic Neo"/>
-                <a:cs typeface="Apple SD Gothic Neo"/>
-              </a:defRPr>
-            </a:defPPr>
-          </a:lstStyle>
-          <a:p xmlns:a="http://schemas.openxmlformats.org/drawingml/2006/main">
-            <a:pPr>
-              <a:defRPr sz="1200" b="0">
-                <a:solidFill>
-                  <a:srgbClr val="586875"/>
-                </a:solidFill>
-                <a:latin typeface="Apple SD Gothic Neo"/>
-                <a:ea typeface="Apple SD Gothic Neo"/>
-                <a:cs typeface="Apple SD Gothic Neo"/>
-              </a:defRPr>
-            </a:pPr>
-            <a:r>
-              <a:rPr sz="1200" b="0">
-                <a:solidFill>
-                  <a:srgbClr val="586875"/>
-                </a:solidFill>
-                <a:latin typeface="Apple SD Gothic Neo"/>
-                <a:ea typeface="Apple SD Gothic Neo"/>
-                <a:cs typeface="Apple SD Gothic Neo"/>
-              </a:rPr>
-              <a:t>원자료 기준 커밋: 22d9b33    상세 경로와 설명은 슬라이드 노트 및 동봉 문서 참조</a:t>
-            </a:r>
-          </a:p>
-        </p:txBody>
-      </p:sp>
-      <p:sp>
-        <p:nvSpPr>
-          <p:cNvPr id="4" name="page">
-            <a:extLst xmlns:a="http://schemas.openxmlformats.org/drawingml/2006/main">
-              <a:ext uri="{FF2B5EF4-FFF2-40B4-BE49-F238E27FC236}">
-                <a16:creationId xmlns:a16="http://schemas.microsoft.com/office/drawing/2014/main" id="{12A183F4-59AD-4179-979B-DAF6A1891D7D}"/>
-              </a:ext>
-            </a:extLst>
-          </p:cNvPr>
-          <p:cNvSpPr>
-            <a:spLocks xmlns:a="http://schemas.openxmlformats.org/drawingml/2006/main" noGrp="1"/>
-          </p:cNvSpPr>
-          <p:nvPr/>
-        </p:nvSpPr>
-        <p:spPr>
-          <a:xfrm xmlns:a="http://schemas.openxmlformats.org/drawingml/2006/main">
-            <a:off x="11144250" y="6419850"/>
-            <a:ext cx="495300" cy="257175"/>
-          </a:xfrm>
-          <a:prstGeom xmlns:a="http://schemas.openxmlformats.org/drawingml/2006/main" prst="rect">
-            <a:avLst/>
-          </a:prstGeom>
-          <a:noFill xmlns:a="http://schemas.openxmlformats.org/drawingml/2006/main"/>
-          <a:ln xmlns:a="http://schemas.openxmlformats.org/drawingml/2006/main" w="0">
-            <a:noFill/>
-          </a:ln>
-        </p:spPr>
-        <p:txBody>
-          <a:bodyPr xmlns:a="http://schemas.openxmlformats.org/drawingml/2006/main" wrap="square" lIns="0" tIns="0" rIns="0" bIns="0" anchor="t">
-            <a:noAutofit/>
-          </a:bodyPr>
-          <a:lstStyle xmlns:a="http://schemas.openxmlformats.org/drawingml/2006/main">
-            <a:defPPr>
-              <a:defRPr sz="1200" b="0">
-                <a:solidFill>
-                  <a:srgbClr val="586875"/>
-                </a:solidFill>
-                <a:latin typeface="Apple SD Gothic Neo"/>
-                <a:ea typeface="Apple SD Gothic Neo"/>
-                <a:cs typeface="Apple SD Gothic Neo"/>
-              </a:defRPr>
-            </a:defPPr>
-          </a:lstStyle>
-          <a:p xmlns:a="http://schemas.openxmlformats.org/drawingml/2006/main">
-            <a:pPr>
-              <a:defRPr sz="1200" b="0">
-                <a:solidFill>
-                  <a:srgbClr val="586875"/>
-                </a:solidFill>
-                <a:latin typeface="Apple SD Gothic Neo"/>
-                <a:ea typeface="Apple SD Gothic Neo"/>
-                <a:cs typeface="Apple SD Gothic Neo"/>
-              </a:defRPr>
-            </a:pPr>
-            <a:r>
-              <a:rPr sz="1200" b="0">
-                <a:solidFill>
-                  <a:srgbClr val="586875"/>
-                </a:solidFill>
-                <a:latin typeface="Apple SD Gothic Neo"/>
-                <a:ea typeface="Apple SD Gothic Neo"/>
-                <a:cs typeface="Apple SD Gothic Neo"/>
-              </a:rPr>
-              <a:t>09</a:t>
-            </a:r>
-          </a:p>
-        </p:txBody>
-      </p:sp>
-      <p:graphicFrame>
-        <p:nvGraphicFramePr>
-          <p:cNvPr id="5" name="comparison-contract">
-            <a:extLst xmlns:a="http://schemas.openxmlformats.org/drawingml/2006/main">
-              <a:ext uri="{FF2B5EF4-FFF2-40B4-BE49-F238E27FC236}">
-                <a16:creationId xmlns:a16="http://schemas.microsoft.com/office/drawing/2014/main" id="{909BA190-CC27-432A-8F65-8F9F42AC672D}"/>
-              </a:ext>
-            </a:extLst>
-          </p:cNvPr>
-          <p:cNvGraphicFramePr/>
-          <p:nvPr/>
-        </p:nvGraphicFramePr>
-        <p:xfrm>
-          <a:off xmlns:a="http://schemas.openxmlformats.org/drawingml/2006/main" x="533400" y="1866900"/>
-          <a:ext xmlns:a="http://schemas.openxmlformats.org/drawingml/2006/main" cx="11125200" cy="2171700"/>
-        </p:xfrm>
-        <a:graphic xmlns:a="http://schemas.openxmlformats.org/drawingml/2006/main">
-          <a:graphicData uri="http://schemas.openxmlformats.org/drawingml/2006/table">
-            <a:tbl>
-              <a:tblPr/>
-              <a:tblGrid>
-                <a:gridCol w="2590800"/>
-                <a:gridCol w="4457700"/>
-                <a:gridCol w="4076700"/>
-              </a:tblGrid>
-              <a:tr h="542925">
-                <a:tc>
-                  <a:txBody>
-                    <a:bodyPr lIns="114300" tIns="114300" rIns="114300" bIns="114300"/>
-                    <a:lstStyle/>
-                    <a:p>
-                      <a:r>
-                        <a:rPr sz="1725" b="1">
-                          <a:solidFill>
-                            <a:srgbClr val="FFFFFF"/>
-                          </a:solidFill>
-                          <a:latin typeface="Apple SD Gothic Neo"/>
-                          <a:ea typeface="Apple SD Gothic Neo"/>
-                          <a:cs typeface="Apple SD Gothic Neo"/>
-                        </a:rPr>
-                        <a:t>자료의 비교</a:t>
-                      </a:r>
-                    </a:p>
-                  </a:txBody>
-                  <a:tcPr marL="133350" marR="133350" marT="95250" marB="95250" anchor="ctr">
-                    <a:solidFill>
-                      <a:srgbClr val="122C40"/>
-                    </a:solidFill>
-                  </a:tcPr>
-                </a:tc>
-                <a:tc>
-                  <a:txBody>
-                    <a:bodyPr lIns="114300" tIns="114300" rIns="114300" bIns="114300"/>
-                    <a:lstStyle/>
-                    <a:p>
-                      <a:r>
-                        <a:rPr sz="1725" b="1">
-                          <a:solidFill>
-                            <a:srgbClr val="FFFFFF"/>
-                          </a:solidFill>
-                          <a:latin typeface="Apple SD Gothic Neo"/>
-                          <a:ea typeface="Apple SD Gothic Neo"/>
-                          <a:cs typeface="Apple SD Gothic Neo"/>
-                        </a:rPr>
-                        <a:t>측정 방식</a:t>
-                      </a:r>
-                    </a:p>
-                  </a:txBody>
-                  <a:tcPr marL="133350" marR="133350" marT="95250" marB="95250" anchor="ctr">
-                    <a:solidFill>
-                      <a:srgbClr val="122C40"/>
-                    </a:solidFill>
-                  </a:tcPr>
-                </a:tc>
-                <a:tc>
-                  <a:txBody>
-                    <a:bodyPr lIns="114300" tIns="114300" rIns="114300" bIns="114300"/>
-                    <a:lstStyle/>
-                    <a:p>
-                      <a:r>
-                        <a:rPr sz="1725" b="1">
-                          <a:solidFill>
-                            <a:srgbClr val="FFFFFF"/>
-                          </a:solidFill>
-                          <a:latin typeface="Apple SD Gothic Neo"/>
-                          <a:ea typeface="Apple SD Gothic Neo"/>
-                          <a:cs typeface="Apple SD Gothic Neo"/>
-                        </a:rPr>
-                        <a:t>구분할 조건</a:t>
-                      </a:r>
-                    </a:p>
-                  </a:txBody>
-                  <a:tcPr marL="133350" marR="133350" marT="95250" marB="95250" anchor="ctr">
-                    <a:solidFill>
-                      <a:srgbClr val="122C40"/>
-                    </a:solidFill>
-                  </a:tcPr>
-                </a:tc>
-              </a:tr>
-              <a:tr h="542925">
-                <a:tc>
-                  <a:txBody>
-                    <a:bodyPr lIns="114300" tIns="114300" rIns="114300" bIns="114300"/>
-                    <a:lstStyle/>
-                    <a:p>
-                      <a:r>
-                        <a:rPr sz="1725" b="0">
-                          <a:solidFill>
-                            <a:srgbClr val="172738"/>
-                          </a:solidFill>
-                          <a:latin typeface="Apple SD Gothic Neo"/>
-                          <a:ea typeface="Apple SD Gothic Neo"/>
-                          <a:cs typeface="Apple SD Gothic Neo"/>
-                        </a:rPr>
-                        <a:t>1. CA 스케줄링</a:t>
-                      </a:r>
-                    </a:p>
-                  </a:txBody>
-                  <a:tcPr marL="133350" marR="133350" marT="95250" marB="95250" anchor="ctr">
-                    <a:solidFill>
-                      <a:srgbClr val="FFFFFF"/>
-                    </a:solidFill>
-                  </a:tcPr>
-                </a:tc>
-                <a:tc>
-                  <a:txBody>
-                    <a:bodyPr lIns="114300" tIns="114300" rIns="114300" bIns="114300"/>
-                    <a:lstStyle/>
-                    <a:p>
-                      <a:r>
-                        <a:rPr sz="1725" b="0">
-                          <a:solidFill>
-                            <a:srgbClr val="172738"/>
-                          </a:solidFill>
-                          <a:latin typeface="Apple SD Gothic Neo"/>
-                          <a:ea typeface="Apple SD Gothic Neo"/>
-                          <a:cs typeface="Apple SD Gothic Neo"/>
-                        </a:rPr>
-                        <a:t>8,192요청/Port의 전체 완료 평균</a:t>
-                      </a:r>
-                    </a:p>
-                  </a:txBody>
-                  <a:tcPr marL="133350" marR="133350" marT="95250" marB="95250" anchor="ctr">
-                    <a:solidFill>
-                      <a:srgbClr val="FFFFFF"/>
-                    </a:solidFill>
-                  </a:tcPr>
-                </a:tc>
-                <a:tc>
-                  <a:txBody>
-                    <a:bodyPr lIns="114300" tIns="114300" rIns="114300" bIns="114300"/>
-                    <a:lstStyle/>
-                    <a:p>
-                      <a:r>
-                        <a:rPr sz="1725" b="0">
-                          <a:solidFill>
-                            <a:srgbClr val="172738"/>
-                          </a:solidFill>
-                          <a:latin typeface="Apple SD Gothic Neo"/>
-                          <a:ea typeface="Apple SD Gothic Neo"/>
-                          <a:cs typeface="Apple SD Gothic Neo"/>
-                        </a:rPr>
-                        <a:t>32 Plane, PF ON</a:t>
-                      </a:r>
-                    </a:p>
-                  </a:txBody>
-                  <a:tcPr marL="133350" marR="133350" marT="95250" marB="95250" anchor="ctr">
-                    <a:solidFill>
-                      <a:srgbClr val="FFFFFF"/>
-                    </a:solidFill>
-                  </a:tcPr>
-                </a:tc>
-              </a:tr>
-              <a:tr h="542925">
-                <a:tc>
-                  <a:txBody>
-                    <a:bodyPr lIns="114300" tIns="114300" rIns="114300" bIns="114300"/>
-                    <a:lstStyle/>
-                    <a:p>
-                      <a:r>
-                        <a:rPr sz="1725" b="0">
-                          <a:solidFill>
-                            <a:srgbClr val="172738"/>
-                          </a:solidFill>
-                          <a:latin typeface="Apple SD Gothic Neo"/>
-                          <a:ea typeface="Apple SD Gothic Neo"/>
-                          <a:cs typeface="Apple SD Gothic Neo"/>
-                        </a:rPr>
-                        <a:t>2. Plane과 배치</a:t>
-                      </a:r>
-                    </a:p>
-                  </a:txBody>
-                  <a:tcPr marL="133350" marR="133350" marT="95250" marB="95250" anchor="ctr">
-                    <a:solidFill>
-                      <a:srgbClr val="F1F5F8"/>
-                    </a:solidFill>
-                  </a:tcPr>
-                </a:tc>
-                <a:tc>
-                  <a:txBody>
-                    <a:bodyPr lIns="114300" tIns="114300" rIns="114300" bIns="114300"/>
-                    <a:lstStyle/>
-                    <a:p>
-                      <a:r>
-                        <a:rPr sz="1725" b="0">
-                          <a:solidFill>
-                            <a:srgbClr val="172738"/>
-                          </a:solidFill>
-                          <a:latin typeface="Apple SD Gothic Neo"/>
-                          <a:ea typeface="Apple SD Gothic Neo"/>
-                          <a:cs typeface="Apple SD Gothic Neo"/>
-                        </a:rPr>
-                        <a:t>8,192요청/Port의 전체 완료 평균</a:t>
-                      </a:r>
-                    </a:p>
-                  </a:txBody>
-                  <a:tcPr marL="133350" marR="133350" marT="95250" marB="95250" anchor="ctr">
-                    <a:solidFill>
-                      <a:srgbClr val="F1F5F8"/>
-                    </a:solidFill>
-                  </a:tcPr>
-                </a:tc>
-                <a:tc>
-                  <a:txBody>
-                    <a:bodyPr lIns="114300" tIns="114300" rIns="114300" bIns="114300"/>
-                    <a:lstStyle/>
-                    <a:p>
-                      <a:r>
-                        <a:rPr sz="1725" b="0">
-                          <a:solidFill>
-                            <a:srgbClr val="172738"/>
-                          </a:solidFill>
-                          <a:latin typeface="Apple SD Gothic Neo"/>
-                          <a:ea typeface="Apple SD Gothic Neo"/>
-                          <a:cs typeface="Apple SD Gothic Neo"/>
-                        </a:rPr>
-                        <a:t>32/64 Plane, PF OFF</a:t>
-                      </a:r>
-                    </a:p>
-                  </a:txBody>
-                  <a:tcPr marL="133350" marR="133350" marT="95250" marB="95250" anchor="ctr">
-                    <a:solidFill>
-                      <a:srgbClr val="F1F5F8"/>
-                    </a:solidFill>
-                  </a:tcPr>
-                </a:tc>
-              </a:tr>
-              <a:tr h="542925">
-                <a:tc>
-                  <a:txBody>
-                    <a:bodyPr lIns="114300" tIns="114300" rIns="114300" bIns="114300"/>
-                    <a:lstStyle/>
-                    <a:p>
-                      <a:r>
-                        <a:rPr sz="1725" b="0">
-                          <a:solidFill>
-                            <a:srgbClr val="172738"/>
-                          </a:solidFill>
-                          <a:latin typeface="Apple SD Gothic Neo"/>
-                          <a:ea typeface="Apple SD Gothic Neo"/>
-                          <a:cs typeface="Apple SD Gothic Neo"/>
-                        </a:rPr>
-                        <a:t>3. 버퍼와 QD</a:t>
-                      </a:r>
-                    </a:p>
-                  </a:txBody>
-                  <a:tcPr marL="133350" marR="133350" marT="95250" marB="95250" anchor="ctr">
-                    <a:solidFill>
-                      <a:srgbClr val="FFFFFF"/>
-                    </a:solidFill>
-                  </a:tcPr>
-                </a:tc>
-                <a:tc>
-                  <a:txBody>
-                    <a:bodyPr lIns="114300" tIns="114300" rIns="114300" bIns="114300"/>
-                    <a:lstStyle/>
-                    <a:p>
-                      <a:r>
-                        <a:rPr sz="1725" b="0">
-                          <a:solidFill>
-                            <a:srgbClr val="172738"/>
-                          </a:solidFill>
-                          <a:latin typeface="Apple SD Gothic Neo"/>
-                          <a:ea typeface="Apple SD Gothic Neo"/>
-                          <a:cs typeface="Apple SD Gothic Neo"/>
-                        </a:rPr>
-                        <a:t>지속 공급 중 고정 2ms 평균</a:t>
-                      </a:r>
-                    </a:p>
-                  </a:txBody>
-                  <a:tcPr marL="133350" marR="133350" marT="95250" marB="95250" anchor="ctr">
-                    <a:solidFill>
-                      <a:srgbClr val="FFFFFF"/>
-                    </a:solidFill>
-                  </a:tcPr>
-                </a:tc>
-                <a:tc>
-                  <a:txBody>
-                    <a:bodyPr lIns="114300" tIns="114300" rIns="114300" bIns="114300"/>
-                    <a:lstStyle/>
-                    <a:p>
-                      <a:r>
-                        <a:rPr sz="1725" b="0">
-                          <a:solidFill>
-                            <a:srgbClr val="172738"/>
-                          </a:solidFill>
-                          <a:latin typeface="Apple SD Gothic Neo"/>
-                          <a:ea typeface="Apple SD Gothic Neo"/>
-                          <a:cs typeface="Apple SD Gothic Neo"/>
-                        </a:rPr>
-                        <a:t>64 Plane, PF OFF, 종료 drain 제외</a:t>
-                      </a:r>
-                    </a:p>
-                  </a:txBody>
-                  <a:tcPr marL="133350" marR="133350" marT="95250" marB="95250" anchor="ctr">
-                    <a:solidFill>
-                      <a:srgbClr val="FFFFFF"/>
-                    </a:solidFill>
-                  </a:tcPr>
-                </a:tc>
-              </a:tr>
-            </a:tbl>
-          </a:graphicData>
-        </a:graphic>
-      </p:graphicFrame>
-      <p:sp>
-        <p:nvSpPr>
-          <p:cNvPr id="6" name="tr-preserved">
-            <a:extLst xmlns:a="http://schemas.openxmlformats.org/drawingml/2006/main">
-              <a:ext uri="{FF2B5EF4-FFF2-40B4-BE49-F238E27FC236}">
-                <a16:creationId xmlns:a16="http://schemas.microsoft.com/office/drawing/2014/main" id="{9E472644-8AA9-428C-9A35-F7B4710BDD1B}"/>
-              </a:ext>
-            </a:extLst>
-          </p:cNvPr>
-          <p:cNvSpPr>
-            <a:spLocks xmlns:a="http://schemas.openxmlformats.org/drawingml/2006/main" noGrp="1"/>
-          </p:cNvSpPr>
-          <p:nvPr/>
-        </p:nvSpPr>
-        <p:spPr>
-          <a:xfrm xmlns:a="http://schemas.openxmlformats.org/drawingml/2006/main">
-            <a:off x="571500" y="4381500"/>
-            <a:ext cx="10953750" cy="381000"/>
-          </a:xfrm>
-          <a:prstGeom xmlns:a="http://schemas.openxmlformats.org/drawingml/2006/main" prst="rect">
-            <a:avLst/>
-          </a:prstGeom>
-          <a:noFill xmlns:a="http://schemas.openxmlformats.org/drawingml/2006/main"/>
-          <a:ln xmlns:a="http://schemas.openxmlformats.org/drawingml/2006/main" w="0">
-            <a:noFill/>
-          </a:ln>
-        </p:spPr>
-        <p:txBody>
-          <a:bodyPr xmlns:a="http://schemas.openxmlformats.org/drawingml/2006/main" wrap="square" lIns="0" tIns="0" rIns="0" bIns="0" anchor="t">
-            <a:noAutofit/>
-          </a:bodyPr>
-          <a:lstStyle xmlns:a="http://schemas.openxmlformats.org/drawingml/2006/main">
-            <a:defPPr>
-              <a:defRPr sz="2100" b="1">
-                <a:solidFill>
-                  <a:srgbClr val="126DCA"/>
-                </a:solidFill>
-                <a:latin typeface="Apple SD Gothic Neo"/>
-                <a:ea typeface="Apple SD Gothic Neo"/>
-                <a:cs typeface="Apple SD Gothic Neo"/>
-              </a:defRPr>
-            </a:defPPr>
-          </a:lstStyle>
-          <a:p xmlns:a="http://schemas.openxmlformats.org/drawingml/2006/main">
-            <a:pPr>
-              <a:defRPr sz="2100" b="1">
-                <a:solidFill>
-                  <a:srgbClr val="126DCA"/>
-                </a:solidFill>
-                <a:latin typeface="Apple SD Gothic Neo"/>
-                <a:ea typeface="Apple SD Gothic Neo"/>
-                <a:cs typeface="Apple SD Gothic Neo"/>
-              </a:defRPr>
-            </a:pPr>
-            <a:r>
-              <a:rPr sz="2100" b="1">
-                <a:solidFill>
-                  <a:srgbClr val="126DCA"/>
-                </a:solidFill>
-                <a:latin typeface="Apple SD Gothic Neo"/>
-                <a:ea typeface="Apple SD Gothic Neo"/>
-                <a:cs typeface="Apple SD Gothic Neo"/>
-              </a:rPr>
-              <a:t>유지한 tR 입력값</a:t>
-            </a:r>
-          </a:p>
-        </p:txBody>
-      </p:sp>
-      <p:sp>
-        <p:nvSpPr>
-          <p:cNvPr id="7" name="tr-values">
-            <a:extLst xmlns:a="http://schemas.openxmlformats.org/drawingml/2006/main">
-              <a:ext uri="{FF2B5EF4-FFF2-40B4-BE49-F238E27FC236}">
-                <a16:creationId xmlns:a16="http://schemas.microsoft.com/office/drawing/2014/main" id="{EDA547CC-5648-4E36-9A2B-AB21C403E4C3}"/>
-              </a:ext>
-            </a:extLst>
-          </p:cNvPr>
-          <p:cNvSpPr>
-            <a:spLocks xmlns:a="http://schemas.openxmlformats.org/drawingml/2006/main" noGrp="1"/>
-          </p:cNvSpPr>
-          <p:nvPr/>
-        </p:nvSpPr>
-        <p:spPr>
-          <a:xfrm xmlns:a="http://schemas.openxmlformats.org/drawingml/2006/main">
-            <a:off x="571500" y="4876800"/>
-            <a:ext cx="10953750" cy="381000"/>
-          </a:xfrm>
-          <a:prstGeom xmlns:a="http://schemas.openxmlformats.org/drawingml/2006/main" prst="rect">
-            <a:avLst/>
-          </a:prstGeom>
-          <a:noFill xmlns:a="http://schemas.openxmlformats.org/drawingml/2006/main"/>
-          <a:ln xmlns:a="http://schemas.openxmlformats.org/drawingml/2006/main" w="0">
-            <a:noFill/>
-          </a:ln>
-        </p:spPr>
-        <p:txBody>
-          <a:bodyPr xmlns:a="http://schemas.openxmlformats.org/drawingml/2006/main" wrap="square" lIns="0" tIns="0" rIns="0" bIns="0" anchor="t">
-            <a:noAutofit/>
-          </a:bodyPr>
-          <a:lstStyle xmlns:a="http://schemas.openxmlformats.org/drawingml/2006/main">
-            <a:defPPr>
-              <a:defRPr sz="1800" b="0">
-                <a:solidFill>
-                  <a:srgbClr val="172738"/>
-                </a:solidFill>
-                <a:latin typeface="Apple SD Gothic Neo"/>
-                <a:ea typeface="Apple SD Gothic Neo"/>
-                <a:cs typeface="Apple SD Gothic Neo"/>
-              </a:defRPr>
-            </a:defPPr>
-          </a:lstStyle>
-          <a:p xmlns:a="http://schemas.openxmlformats.org/drawingml/2006/main">
-            <a:pPr>
-              <a:defRPr sz="1800" b="0">
-                <a:solidFill>
-                  <a:srgbClr val="172738"/>
-                </a:solidFill>
-                <a:latin typeface="Apple SD Gothic Neo"/>
-                <a:ea typeface="Apple SD Gothic Neo"/>
-                <a:cs typeface="Apple SD Gothic Neo"/>
-              </a:defRPr>
-            </a:pPr>
-            <a:r>
-              <a:rPr sz="1800" b="0">
-                <a:solidFill>
-                  <a:srgbClr val="172738"/>
-                </a:solidFill>
-                <a:latin typeface="Apple SD Gothic Neo"/>
-                <a:ea typeface="Apple SD Gothic Neo"/>
-                <a:cs typeface="Apple SD Gothic Neo"/>
-              </a:rPr>
-              <a:t>Short 2.00µs    Mid 2.08µs    Long 12.16µs    First / Group 20.69µs</a:t>
-            </a:r>
-          </a:p>
-        </p:txBody>
-      </p:sp>
-      <p:sp>
-        <p:nvSpPr>
-          <p:cNvPr id="8" name="limits">
-            <a:extLst xmlns:a="http://schemas.openxmlformats.org/drawingml/2006/main">
-              <a:ext uri="{FF2B5EF4-FFF2-40B4-BE49-F238E27FC236}">
-                <a16:creationId xmlns:a16="http://schemas.microsoft.com/office/drawing/2014/main" id="{47165242-0F03-46E7-9D34-2B52BC5E3A22}"/>
-              </a:ext>
-            </a:extLst>
-          </p:cNvPr>
-          <p:cNvSpPr>
-            <a:spLocks xmlns:a="http://schemas.openxmlformats.org/drawingml/2006/main" noGrp="1"/>
-          </p:cNvSpPr>
-          <p:nvPr/>
-        </p:nvSpPr>
-        <p:spPr>
-          <a:xfrm xmlns:a="http://schemas.openxmlformats.org/drawingml/2006/main">
-            <a:off x="571500" y="5514975"/>
-            <a:ext cx="10953750" cy="704850"/>
-          </a:xfrm>
-          <a:prstGeom xmlns:a="http://schemas.openxmlformats.org/drawingml/2006/main" prst="rect">
-            <a:avLst/>
-          </a:prstGeom>
-          <a:noFill xmlns:a="http://schemas.openxmlformats.org/drawingml/2006/main"/>
-          <a:ln xmlns:a="http://schemas.openxmlformats.org/drawingml/2006/main" w="0">
-            <a:noFill/>
-          </a:ln>
-        </p:spPr>
-        <p:txBody>
-          <a:bodyPr xmlns:a="http://schemas.openxmlformats.org/drawingml/2006/main" wrap="square" lIns="0" tIns="0" rIns="0" bIns="0" anchor="t">
-            <a:noAutofit/>
-          </a:bodyPr>
-          <a:lstStyle xmlns:a="http://schemas.openxmlformats.org/drawingml/2006/main">
-            <a:defPPr>
-              <a:defRPr sz="1800" b="0">
-                <a:solidFill>
-                  <a:srgbClr val="586875"/>
-                </a:solidFill>
-                <a:latin typeface="Apple SD Gothic Neo"/>
-                <a:ea typeface="Apple SD Gothic Neo"/>
-                <a:cs typeface="Apple SD Gothic Neo"/>
-              </a:defRPr>
-            </a:defPPr>
-          </a:lstStyle>
-          <a:p xmlns:a="http://schemas.openxmlformats.org/drawingml/2006/main">
-            <a:pPr>
-              <a:defRPr sz="1800" b="0">
-                <a:solidFill>
-                  <a:srgbClr val="586875"/>
-                </a:solidFill>
-                <a:latin typeface="Apple SD Gothic Neo"/>
-                <a:ea typeface="Apple SD Gothic Neo"/>
-                <a:cs typeface="Apple SD Gothic Neo"/>
-              </a:defRPr>
-            </a:pPr>
-            <a:r>
-              <a:rPr sz="1800" b="0">
-                <a:solidFill>
-                  <a:srgbClr val="586875"/>
-                </a:solidFill>
-                <a:latin typeface="Apple SD Gothic Neo"/>
-                <a:ea typeface="Apple SD Gothic Neo"/>
-                <a:cs typeface="Apple SD Gothic Neo"/>
-              </a:rPr>
-              <a:t>가용률 85%와 Port 내부 순서 제약을 유지한 모델 결과입니다.</a:t>
-            </a:r>
-          </a:p>
-          <a:p xmlns:a="http://schemas.openxmlformats.org/drawingml/2006/main">
-            <a:pPr>
-              <a:defRPr sz="1800" b="0">
-                <a:solidFill>
-                  <a:srgbClr val="586875"/>
-                </a:solidFill>
-                <a:latin typeface="Apple SD Gothic Neo"/>
-                <a:ea typeface="Apple SD Gothic Neo"/>
-                <a:cs typeface="Apple SD Gothic Neo"/>
-              </a:defRPr>
-            </a:pPr>
-            <a:r>
-              <a:rPr sz="1800" b="0">
-                <a:solidFill>
-                  <a:srgbClr val="586875"/>
-                </a:solidFill>
-                <a:latin typeface="Apple SD Gothic Neo"/>
-                <a:ea typeface="Apple SD Gothic Neo"/>
-                <a:cs typeface="Apple SD Gothic Neo"/>
-              </a:rPr>
-              <a:t>다른 주소 편향, 동적 L2P, 실제 GC 및 Die/LUN 공유 자원은 별도 검증이 필요합니다.</a:t>
-            </a:r>
-          </a:p>
-        </p:txBody>
-      </p:sp>
-    </p:spTree>
-    <p:extLst>
-      <p:ext uri="{BB962C8B-B14F-4D97-AF65-F5344CB8AC3E}">
-        <p14:creationId xmlns:p14="http://schemas.microsoft.com/office/powerpoint/2010/main" val="684631606"/>
+        <p14:creationId xmlns:p14="http://schemas.microsoft.com/office/powerpoint/2010/main" val="809149204"/>
       </p:ext>
     </p:extLst>
   </p:cSld>
